--- a/Curso Gas B/06 - ITC-ICG 09 - Instaladores y empresas instaladoras/06 - ITC-ICG 09 - Instaladores y empresas instaladoras - Vídeo 3.pptx
+++ b/Curso Gas B/06 - ITC-ICG 09 - Instaladores y empresas instaladoras/06 - ITC-ICG 09 - Instaladores y empresas instaladoras - Vídeo 3.pptx
@@ -20,6 +20,7 @@
     <p:sldId id="268" r:id="rId20"/>
     <p:sldId id="269" r:id="rId21"/>
     <p:sldId id="270" r:id="rId22"/>
+    <p:sldId id="271" r:id="rId23"/>
   </p:sldIdLst>
   <p:sldSz cx="12191695" cy="6858000" type="screen4x3"/>
   <p:notesSz cx="6858000" cy="9144000"/>
@@ -591,12 +592,12 @@
           <a:lstStyle/>
           <a:p>
             <a:r>
-              <a:t>N1: ¿Y la reglamentación de la C todavía es más corta?</a:t>
-            </a:r>
-          </a:p>
-          <a:p>
-            <a:r>
-              <a:t>N2: La más corta de todas, sí, es la más pelada. Encadena la jerarquía: la ce es la reglamentación de la be, pero quitando todavía más cosas. Se le caen más capítulos de la ley de hidrocarburos, dos instrucciones técnicas, la cero seis, de envases de gas licuado para uso propio, y la diez, de caravanas y autocaravanas, y una norma importante: la de salas de máquinas. Fíjate en un dato que cae en el examen: la norma de salas de máquinas la estudian la a y la be, pero no la ce. ¿Por qué? Porque la ce solo toca viviendas individuales a baja presión; no va a ver en su vida una sala de máquinas, ni una caravana, ni un envase de uso propio. Otra vez la misma idea: el temario acompaña al alcance. Si te preguntan qué categorías estudian la norma de salas de máquinas, la respuesta es la a y la be; la ce no.</a:t>
+              <a:t>N1: ¿La C estudia mucho menos?</a:t>
+            </a:r>
+          </a:p>
+          <a:p>
+            <a:r>
+              <a:t>N2: Sí, es el temario más recortado de los tres, y tiene todo el sentido. La ce solo toca instalaciones individuales de vivienda a cero coma cuatro bar, así que su temario se queda con lo justo para eso. ¿Qué se le cae respecto a la be? Las matemáticas y la física vienen recortadas, sin las partes más avanzadas, como las potencias, las raíces o el comportamiento de los gases. En química, se quita lo de los gases inertes. Y desaparecen dos bloques importantes: el de adaptación de aparatos a otras familias de gas, lógico porque la ce no puede cambiar de familia, y el de los depósitos móviles de gas licuado de más de quince kilos. En resumen, la ce estudia lo básico de la vivienda: tuberías sencillas, aparatos domésticos, ventilación y seguridad. Nada de lo grande ni lo enterrado.</a:t>
             </a:r>
           </a:p>
         </p:txBody>
@@ -666,12 +667,12 @@
           <a:lstStyle/>
           <a:p>
             <a:r>
-              <a:t>N1: ¿Qué dos normas UNE tengo que tener claras?</a:t>
-            </a:r>
-          </a:p>
-          <a:p>
-            <a:r>
-              <a:t>N2: Dos, y son de las que más caen, así que las separamos bien. La primera es la norma de instalaciones receptoras hasta cinco bar. Esa la estudian las tres categorías, la a, la be y la ce, porque cubre lo básico del oficio: las tuberías y sus pruebas, los contadores y, muy importante, la ventilación de los locales. Y ojo con la ventilación, que no es relleno: es justo lo que evita el problema más grave del gas, la intoxicación por monóxido de carbono cuando falta aire para la combustión o los humos se evacúan mal. La segunda norma es la de salas de máquinas, y esa solo la ven la a y la be, no la ce. Chuleta rápida: la norma de receptoras hasta cinco bar, las tres; la de salas de máquinas, solo la a y la be. Si las tienes claras, resuelves varias preguntas de golpe.</a:t>
+              <a:t>N1: ¿Y la reglamentación de la C todavía es más corta?</a:t>
+            </a:r>
+          </a:p>
+          <a:p>
+            <a:r>
+              <a:t>N2: La más corta de todas, sí, es la más pelada. Encadena la jerarquía: la ce es la reglamentación de la be, pero quitando todavía más cosas. Se le caen más capítulos de la ley de hidrocarburos, dos instrucciones técnicas, la cero seis, de envases de gas licuado para uso propio, y la diez, de caravanas y autocaravanas, y una norma importante: la de salas de máquinas. Fíjate en un dato que cae en el examen: la norma de salas de máquinas la estudian la a y la be, pero no la ce. ¿Por qué? Porque la ce solo toca viviendas individuales a baja presión; no va a ver en su vida una sala de máquinas, ni una caravana, ni un envase de uso propio. Otra vez la misma idea: el temario acompaña al alcance. Si te preguntan qué categorías estudian la norma de salas de máquinas, la respuesta es la a y la be; la ce no.</a:t>
             </a:r>
           </a:p>
         </p:txBody>
@@ -741,12 +742,12 @@
           <a:lstStyle/>
           <a:p>
             <a:r>
-              <a:t>N1: ¿Todo el que toca aparatos gordos estudia el anexo dos entero?</a:t>
-            </a:r>
-          </a:p>
-          <a:p>
-            <a:r>
-              <a:t>N2: No, y aquí está la regla fina que cae en el examen. El anexo dos tiene dieciocho apartados. El reparto depende de qué operación quieras hacer. Si es el cuatro punto uno, arrancar, mantener o reparar los aparatos grandes y las vitros de fuegos cubiertos, necesitas los apartados del uno al diecisiete. Si es el cuatro punto dos, adecuar por cambio de familia de gas, necesitas el anexo completo, los dieciocho. ¿Qué tiene de especial el apartado dieciocho para marcar la diferencia? Es justo el de adaptación de aparatos a otras familias de gas: pasar un aparato de butano a gas natural, por ejemplo. Por eso solo lo pide el cuatro punto dos. Y recuerda del vídeo dos: ese cuatro punto dos solo lo pueden hacer la a y la be, nunca la ce. Chuleta de una línea: el dieciocho es el cambio de gas, y solo lo necesita el cuatro punto dos.</a:t>
+              <a:t>N1: ¿Qué dos normas UNE tengo que tener claras?</a:t>
+            </a:r>
+          </a:p>
+          <a:p>
+            <a:r>
+              <a:t>N2: Dos, y son de las que más caen, así que las separamos bien. La primera es la norma de instalaciones receptoras hasta cinco bar. Esa la estudian las tres categorías, la a, la be y la ce, porque cubre lo básico del oficio: las tuberías y sus pruebas, los contadores y, muy importante, la ventilación de los locales. Y ojo con la ventilación, que no es relleno: es justo lo que evita el problema más grave del gas, la intoxicación por monóxido de carbono cuando falta aire para la combustión o los humos se evacúan mal. La segunda norma es la de salas de máquinas, y esa solo la ven la a y la be, no la ce. Chuleta rápida: la norma de receptoras hasta cinco bar, las tres; la de salas de máquinas, solo la a y la be. Si las tienes claras, resuelves varias preguntas de golpe.</a:t>
             </a:r>
           </a:p>
         </p:txBody>
@@ -816,12 +817,12 @@
           <a:lstStyle/>
           <a:p>
             <a:r>
-              <a:t>N1: ¿El anexo dos es solo teoría de aparatos?</a:t>
-            </a:r>
-          </a:p>
-          <a:p>
-            <a:r>
-              <a:t>N2: Es mucho más útil de lo que parece: es un manual de averías puesto en forma de temario. Mira lo que hay dentro. Análisis de los productos de la combustión y el monóxido de carbono ambiente, o sea, cómo medir si un aparato quema bien o está soltando gases peligrosos. El rendimiento y los inquemados, para saber cuánta energía se pierde. Los dispositivos de seguridad, como el cortatiro, el termopar o el antidesbordamiento de humos, que son las piezas que apagan el aparato cuando algo va mal. Y, lo más jugoso, las averías más frecuentes de calentadores y calderas: el vaso de expansión descargado, el presostato, la válvula de tres vías, el purgador. Esto es lo que separa a quien cambia una pieza a ciegas de quien diagnostica de verdad por qué una caldera se apaga, ennegrece la pared o no da agua caliente. Por eso el anexo dos, más que temario, es oficio.</a:t>
+              <a:t>N1: ¿Todo el que toca aparatos gordos estudia el anexo dos entero?</a:t>
+            </a:r>
+          </a:p>
+          <a:p>
+            <a:r>
+              <a:t>N2: No, y aquí está la regla fina que cae en el examen. El anexo dos tiene dieciocho apartados. El reparto depende de qué operación quieras hacer. Si es el cuatro punto uno, arrancar, mantener o reparar los aparatos grandes y las vitros de fuegos cubiertos, necesitas los apartados del uno al diecisiete. Si es el cuatro punto dos, adecuar por cambio de familia de gas, necesitas el anexo completo, los dieciocho. ¿Qué tiene de especial el apartado dieciocho para marcar la diferencia? Es justo el de adaptación de aparatos a otras familias de gas: pasar un aparato de butano a gas natural, por ejemplo. Por eso solo lo pide el cuatro punto dos. Y recuerda del vídeo dos: ese cuatro punto dos solo lo pueden hacer la a y la be, nunca la ce. Chuleta de una línea: el dieciocho es el cambio de gas, y solo lo necesita el cuatro punto dos.</a:t>
             </a:r>
           </a:p>
         </p:txBody>
@@ -891,12 +892,12 @@
           <a:lstStyle/>
           <a:p>
             <a:r>
-              <a:t>N1: Espera, ¿los tipos de aparato A, B y C son mis categorías?</a:t>
-            </a:r>
-          </a:p>
-          <a:p>
-            <a:r>
-              <a:t>N2: No, y esta es la trampa clásica del tema, así que fíjate bien. En el anexo dos aparecen los aparatos clasificados en tipo a, tipo be y tipo ce, pero esto no tiene nada que ver con las categorías del instalador. Aquí, las letras van por cómo evacúa el aparato los humos de la combustión. El tipo a es el no conducido: suelta los humos directamente al local donde está, como una cocina de gas. El tipo be es el conducido: coge el aire del local pero saca los humos fuera por un conducto, como muchos calentadores antiguos. Y el tipo ce es el estanco: coge el aire de fuera y expulsa los humos fuera, en un circuito cerrado que no toca el aire de la casa, como las calderas modernas de pared. Son dos clasificaciones distintas que, por mala suerte, usan las mismas letras. En obra importa mucho: un aparato tipo a en un local sin ventilación es un riesgo directo de monóxido de carbono. No confundas el tipo del aparato con la categoría de tu carné.</a:t>
+              <a:t>N1: ¿El anexo dos es solo teoría de aparatos?</a:t>
+            </a:r>
+          </a:p>
+          <a:p>
+            <a:r>
+              <a:t>N2: Es mucho más útil de lo que parece: es un manual de averías puesto en forma de temario. Mira lo que hay dentro. Análisis de los productos de la combustión y el monóxido de carbono ambiente, o sea, cómo medir si un aparato quema bien o está soltando gases peligrosos. El rendimiento y los inquemados, para saber cuánta energía se pierde. Los dispositivos de seguridad, como el cortatiro, el termopar o el antidesbordamiento de humos, que son las piezas que apagan el aparato cuando algo va mal. Y, lo más jugoso, las averías más frecuentes de calentadores y calderas: el vaso de expansión descargado, el presostato, la válvula de tres vías, el purgador. Esto es lo que separa a quien cambia una pieza a ciegas de quien diagnostica de verdad por qué una caldera se apaga, ennegrece la pared o no da agua caliente. Por eso el anexo dos, más que temario, es oficio.</a:t>
             </a:r>
           </a:p>
         </p:txBody>
@@ -966,6 +967,81 @@
           <a:lstStyle/>
           <a:p>
             <a:r>
+              <a:t>N1: Espera, ¿los tipos de aparato A, B y C son mis categorías?</a:t>
+            </a:r>
+          </a:p>
+          <a:p>
+            <a:r>
+              <a:t>N2: No, y esta es la trampa clásica del tema, así que fíjate bien. En el anexo dos aparecen los aparatos clasificados en tipo a, tipo be y tipo ce, pero esto no tiene nada que ver con las categorías del instalador. Aquí, las letras van por cómo evacúa el aparato los humos de la combustión. El tipo a es el no conducido: suelta los humos directamente al local donde está, como una cocina de gas. El tipo be es el conducido: coge el aire del local pero saca los humos fuera por un conducto, como muchos calentadores antiguos. Y el tipo ce es el estanco: coge el aire de fuera y expulsa los humos fuera, en un circuito cerrado que no toca el aire de la casa, como las calderas modernas de pared. Son dos clasificaciones distintas que, por mala suerte, usan las mismas letras. En obra importa mucho: un aparato tipo a en un local sin ventilación es un riesgo directo de monóxido de carbono. No confundas el tipo del aparato con la categoría de tu carné.</a:t>
+            </a:r>
+          </a:p>
+        </p:txBody>
+      </p:sp>
+      <p:sp>
+        <p:nvSpPr>
+          <p:cNvPr id="4" name="Slide Number Placeholder 3"/>
+          <p:cNvSpPr>
+            <a:spLocks noGrp="1"/>
+          </p:cNvSpPr>
+          <p:nvPr>
+            <p:ph type="sldNum" idx="5" sz="quarter"/>
+          </p:nvPr>
+        </p:nvSpPr>
+        <p:spPr/>
+      </p:sp>
+    </p:spTree>
+  </p:cSld>
+  <p:clrMapOvr>
+    <a:masterClrMapping/>
+  </p:clrMapOvr>
+</p:notes>
+</file>
+
+<file path=ppt/notesSlides/notesSlide16.xml><?xml version="1.0" encoding="utf-8"?>
+<p:notes xmlns:a="http://schemas.openxmlformats.org/drawingml/2006/main" xmlns:p="http://schemas.openxmlformats.org/presentationml/2006/main" xmlns:r="http://schemas.openxmlformats.org/officeDocument/2006/relationships">
+  <p:cSld>
+    <p:spTree>
+      <p:nvGrpSpPr>
+        <p:cNvPr id="1" name=""/>
+        <p:cNvGrpSpPr/>
+        <p:nvPr/>
+      </p:nvGrpSpPr>
+      <p:grpSpPr>
+        <a:xfrm>
+          <a:off x="0" y="0"/>
+          <a:ext cx="0" cy="0"/>
+          <a:chOff x="0" y="0"/>
+          <a:chExt cx="0" cy="0"/>
+        </a:xfrm>
+      </p:grpSpPr>
+      <p:sp>
+        <p:nvSpPr>
+          <p:cNvPr id="2" name="Slide Image Placeholder 1"/>
+          <p:cNvSpPr>
+            <a:spLocks noGrp="1"/>
+          </p:cNvSpPr>
+          <p:nvPr>
+            <p:ph type="sldImg" idx="2"/>
+          </p:nvPr>
+        </p:nvSpPr>
+        <p:spPr/>
+      </p:sp>
+      <p:sp>
+        <p:nvSpPr>
+          <p:cNvPr id="3" name="Notes Placeholder 2"/>
+          <p:cNvSpPr>
+            <a:spLocks noGrp="1"/>
+          </p:cNvSpPr>
+          <p:nvPr>
+            <p:ph type="body" idx="3" sz="quarter"/>
+          </p:nvPr>
+        </p:nvSpPr>
+        <p:spPr/>
+        <p:txBody>
+          <a:bodyPr/>
+          <a:lstStyle/>
+          <a:p>
+            <a:r>
               <a:t>N1: Último cierre. ¿Qué me llevo de los anexos y del tema entero?</a:t>
             </a:r>
           </a:p>
@@ -1124,16 +1200,7 @@
         <p:txBody>
           <a:bodyPr/>
           <a:lstStyle/>
-          <a:p>
-            <a:r>
-              <a:t>N1: ¿Los dos anexos sirven para lo mismo?</a:t>
-            </a:r>
-          </a:p>
-          <a:p>
-            <a:r>
-              <a:t>N2: No, cada uno tiene su función, y conviene separarlos desde el principio. El anexo uno es el temario base: la lista de conocimientos mínimos, teóricos, prácticos y de reglamentación, que necesita cada categoría de instalador. ¿Para qué te sirve en la práctica? Es la referencia del examen de tu comunidad autónoma, esa vía ce para sacar el carné de la que hablamos en el vídeo uno. Si te presentas al examen, sale de aquí. El anexo dos es otra cosa: son los conocimientos avanzados sobre aparatos, los que exige el apartado cuatro para tocar los aparatos gordos, las calderas grandes, las vitros de fuegos cubiertos y el cambio de familia de gas. Resumen: anexo uno, el temario para ser instalador; anexo dos, el temario para tocar los aparatos difíciles.</a:t>
-            </a:r>
-          </a:p>
+          <a:p/>
         </p:txBody>
       </p:sp>
       <p:sp>
@@ -1201,12 +1268,12 @@
           <a:lstStyle/>
           <a:p>
             <a:r>
-              <a:t>N1: ¿Cada categoría estudia un temario totalmente distinto?</a:t>
-            </a:r>
-          </a:p>
-          <a:p>
-            <a:r>
-              <a:t>N2: No, y aquí está el truco que te ahorra la mitad del esfuerzo. Los temarios están encajados como muñecas rusas, uno dentro de otro. En los conocimientos teórico-prácticos, la categoría a es la de la be más unos extras; por eso, cuando lees el temario de la a, solo aparecen los añadidos, y parece corto. En la reglamentación se cuenta al revés: la be es la de la a menos unas cuantas cosas, y la ce es la de la be menos otras tantas. Pero la conclusión es siempre la misma: cuanto más alta la categoría, más temario. La a estudia lo de la be y algo más; la ce es la que menos estudia. Si entiendes esta jerarquía, ya no te asusta ver que el listado de la a es breve, porque son solo los extras, ni que el de la ce sea el más pelado.</a:t>
+              <a:t>N1: ¿Los dos anexos sirven para lo mismo?</a:t>
+            </a:r>
+          </a:p>
+          <a:p>
+            <a:r>
+              <a:t>N2: No, cada uno tiene su función, y conviene separarlos desde el principio. El anexo uno es el temario base: la lista de conocimientos mínimos, teóricos, prácticos y de reglamentación, que necesita cada categoría de instalador. ¿Para qué te sirve en la práctica? Es la referencia del examen de tu comunidad autónoma, esa vía ce para sacar el carné de la que hablamos en el vídeo uno. Si te presentas al examen, sale de aquí. El anexo dos es otra cosa: son los conocimientos avanzados sobre aparatos, los que exige el apartado cuatro para tocar los aparatos gordos, las calderas grandes, las vitros de fuegos cubiertos y el cambio de familia de gas. Resumen: anexo uno, el temario para ser instalador; anexo dos, el temario para tocar los aparatos difíciles.</a:t>
             </a:r>
           </a:p>
         </p:txBody>
@@ -1276,12 +1343,12 @@
           <a:lstStyle/>
           <a:p>
             <a:r>
-              <a:t>N1: ¿Qué estudia la A que no estudie la B?</a:t>
-            </a:r>
-          </a:p>
-          <a:p>
-            <a:r>
-              <a:t>N2: Mira los añadidos de la a y verás un patrón muy claro que engancha con el vídeo uno: todo lo que suma la a suena a exterior, a enterrado y a gas licuado a granel. Te lo agrupo. Por un lado, el polietileno, ese tubo de plástico de las conducciones enterradas, con sus cortes y soldaduras. Por otro, la corrosión y la protección catódica, que es la técnica para que las tuberías metálicas enterradas no se oxiden, con las corrientes de fuga y galvánicas. Y por otro, los depósitos fijos de gas licuado, las zanjas, los vaporizadores, los compresores y las válvulas de trasvase. ¿Por qué justo esto? Porque la a es la única categoría que toca lo enterrado por el exterior y los depósitos fijos de gas licuado. La be ya se sabe lo de dentro de los edificios; la a añade lo de fuera y bajo tierra. El temario acompaña al alcance, siempre.</a:t>
+              <a:t>N1: ¿Cada categoría estudia un temario totalmente distinto?</a:t>
+            </a:r>
+          </a:p>
+          <a:p>
+            <a:r>
+              <a:t>N2: No, y aquí está el truco que te ahorra la mitad del esfuerzo. Los temarios están encajados como muñecas rusas, uno dentro de otro. En los conocimientos teórico-prácticos, la categoría a es la de la be más unos extras; por eso, cuando lees el temario de la a, solo aparecen los añadidos, y parece corto. En la reglamentación se cuenta al revés: la be es la de la a menos unas cuantas cosas, y la ce es la de la be menos otras tantas. Pero la conclusión es siempre la misma: cuanto más alta la categoría, más temario. La a estudia lo de la be y algo más; la ce es la que menos estudia. Si entiendes esta jerarquía, ya no te asusta ver que el listado de la a es breve, porque son solo los extras, ni que el de la ce sea el más pelado.</a:t>
             </a:r>
           </a:p>
         </p:txBody>
@@ -1351,12 +1418,12 @@
           <a:lstStyle/>
           <a:p>
             <a:r>
-              <a:t>N1: ¿Y la parte de leyes de la A es muy larga?</a:t>
-            </a:r>
-          </a:p>
-          <a:p>
-            <a:r>
-              <a:t>N2: Es la más completa de las tres, porque la a llega a todo. No hace falta que te la sepas coma a coma, pero sí que ubiques los bloques. Primero, la reglamentación de la calidad y la seguridad industrial: qué son las entidades de normalización, como AENOR, y las de acreditación, como la ENAC, y qué es una norma UNE. Segundo, la ley del sector de hidrocarburos, que es la gran ley del gas, con sus capítulos de gas natural y gas licuado. Tercero, el propio Reglamento técnico de gas y todas sus instrucciones técnicas, las ITC, de la uno a la diez. Y cuarto, dos normas UNE clave: la de instalaciones receptoras hasta cinco bar y la de salas de máquinas. La idea que te tienes que llevar: la a se lo estudia todo porque puede tocarlo todo; en las siguientes categorías iremos quitando piezas.</a:t>
+              <a:t>N1: ¿Qué estudia la A que no estudie la B?</a:t>
+            </a:r>
+          </a:p>
+          <a:p>
+            <a:r>
+              <a:t>N2: Mira los añadidos de la a y verás un patrón muy claro que engancha con el vídeo uno: todo lo que suma la a suena a exterior, a enterrado y a gas licuado a granel. Te lo agrupo. Por un lado, el polietileno, ese tubo de plástico de las conducciones enterradas, con sus cortes y soldaduras. Por otro, la corrosión y la protección catódica, que es la técnica para que las tuberías metálicas enterradas no se oxiden, con las corrientes de fuga y galvánicas. Y por otro, los depósitos fijos de gas licuado, las zanjas, los vaporizadores, los compresores y las válvulas de trasvase. ¿Por qué justo esto? Porque la a es la única categoría que toca lo enterrado por el exterior y los depósitos fijos de gas licuado. La be ya se sabe lo de dentro de los edificios; la a añade lo de fuera y bajo tierra. El temario acompaña al alcance, siempre.</a:t>
             </a:r>
           </a:p>
         </p:txBody>
@@ -1426,12 +1493,12 @@
           <a:lstStyle/>
           <a:p>
             <a:r>
-              <a:t>N1: La B es la que me saco yo, ¿qué entra en su temario?</a:t>
-            </a:r>
-          </a:p>
-          <a:p>
-            <a:r>
-              <a:t>N2: El grueso de todo, porque la be es la base sobre la que se construyen las demás. Te lo cuento por bloques, sin agobios. Primero, una base de matemáticas y física: operaciones, unidades del sistema internacional, presión, calor, caudal, nociones de electricidad. Segundo, química del gas: qué gases hay, las familias y, sobre todo, la combustión, cómo arde el gas y qué significa una llama azul o amarilla. Tercero, materiales y uniones: tuberías de cobre, acero y plomo, y los tipos de soldadura. Cuarto, el corazón práctico: quemadores, dispositivos de seguridad, sistemas de encendido y los aparatos, cocinas, calentadores y calderas. Y quinto, algo muy de examen: el cálculo de la instalación receptora, cómo se dimensiona una tubería según el caudal. Todo esto, más la parte de seguridad y emergencias, es lo que te convierte en instalador be.</a:t>
+              <a:t>N1: ¿Y la parte de leyes de la A es muy larga?</a:t>
+            </a:r>
+          </a:p>
+          <a:p>
+            <a:r>
+              <a:t>N2: Es la más completa de las tres, porque la a llega a todo. No hace falta que te la sepas coma a coma, pero sí que ubiques los bloques. Primero, la reglamentación de la calidad y la seguridad industrial: qué son las entidades de normalización, como AENOR, y las de acreditación, como la ENAC, y qué es una norma UNE. Segundo, la ley del sector de hidrocarburos, que es la gran ley del gas, con sus capítulos de gas natural y gas licuado. Tercero, el propio Reglamento técnico de gas y todas sus instrucciones técnicas, las ITC, de la uno a la diez. Y cuarto, dos normas UNE clave: la de instalaciones receptoras hasta cinco bar y la de salas de máquinas. La idea que te tienes que llevar: la a se lo estudia todo porque puede tocarlo todo; en las siguientes categorías iremos quitando piezas.</a:t>
             </a:r>
           </a:p>
         </p:txBody>
@@ -1501,12 +1568,12 @@
           <a:lstStyle/>
           <a:p>
             <a:r>
-              <a:t>N1: ¿Y en leyes, qué se ahorra la B respecto a la A?</a:t>
-            </a:r>
-          </a:p>
-          <a:p>
-            <a:r>
-              <a:t>N2: Se ahorra justo lo que no va a tocar nunca, y es fácil de recordar. La reglamentación de la be es la misma que la de la a, pero quitando tres piezas. Una: el capítulo de la ley de hidrocarburos que habla de regasificación, transporte y almacenamiento de gas natural, o sea, la infraestructura gorda, las grandes redes. Y dos: tres instrucciones técnicas concretas, la cero uno, la cero tres y la cero cinco. La cero uno es la de distribución de gas por canalización; la cero tres, la de depósitos fijos de gas licuado; y la cero cinco, la de estaciones de servicio para vehículos a gas. ¿Ves la coherencia? La be no toca ni las grandes redes, ni los depósitos fijos, ni las gasolineras de gas, así que no necesita estudiárselo. Memoriza qué ITC se le caen a la be respecto a la a: la cero uno, la cero tres y la cero cinco.</a:t>
+              <a:t>N1: La B es la que me saco yo, ¿qué entra en su temario?</a:t>
+            </a:r>
+          </a:p>
+          <a:p>
+            <a:r>
+              <a:t>N2: El grueso de todo, porque la be es la base sobre la que se construyen las demás. Te lo cuento por bloques, sin agobios. Primero, una base de matemáticas y física: operaciones, unidades del sistema internacional, presión, calor, caudal, nociones de electricidad. Segundo, química del gas: qué gases hay, las familias y, sobre todo, la combustión, cómo arde el gas y qué significa una llama azul o amarilla. Tercero, materiales y uniones: tuberías de cobre, acero y plomo, y los tipos de soldadura. Cuarto, el corazón práctico: quemadores, dispositivos de seguridad, sistemas de encendido y los aparatos, cocinas, calentadores y calderas. Y quinto, algo muy de examen: el cálculo de la instalación receptora, cómo se dimensiona una tubería según el caudal. Todo esto, más la parte de seguridad y emergencias, es lo que te convierte en instalador be.</a:t>
             </a:r>
           </a:p>
         </p:txBody>
@@ -1576,12 +1643,12 @@
           <a:lstStyle/>
           <a:p>
             <a:r>
-              <a:t>N1: ¿La C estudia mucho menos?</a:t>
-            </a:r>
-          </a:p>
-          <a:p>
-            <a:r>
-              <a:t>N2: Sí, es el temario más recortado de los tres, y tiene todo el sentido. La ce solo toca instalaciones individuales de vivienda a cero coma cuatro bar, así que su temario se queda con lo justo para eso. ¿Qué se le cae respecto a la be? Las matemáticas y la física vienen recortadas, sin las partes más avanzadas, como las potencias, las raíces o el comportamiento de los gases. En química, se quita lo de los gases inertes. Y desaparecen dos bloques importantes: el de adaptación de aparatos a otras familias de gas, lógico porque la ce no puede cambiar de familia, y el de los depósitos móviles de gas licuado de más de quince kilos. En resumen, la ce estudia lo básico de la vivienda: tuberías sencillas, aparatos domésticos, ventilación y seguridad. Nada de lo grande ni lo enterrado.</a:t>
+              <a:t>N1: ¿Y en leyes, qué se ahorra la B respecto a la A?</a:t>
+            </a:r>
+          </a:p>
+          <a:p>
+            <a:r>
+              <a:t>N2: Se ahorra justo lo que no va a tocar nunca, y es fácil de recordar. La reglamentación de la be es la misma que la de la a, pero quitando tres piezas. Una: el capítulo de la ley de hidrocarburos que habla de regasificación, transporte y almacenamiento de gas natural, o sea, la infraestructura gorda, las grandes redes. Y dos: tres instrucciones técnicas concretas, la cero uno, la cero tres y la cero cinco. La cero uno es la de distribución de gas por canalización; la cero tres, la de depósitos fijos de gas licuado; y la cero cinco, la de estaciones de servicio para vehículos a gas. ¿Ves la coherencia? La be no toca ni las grandes redes, ni los depósitos fijos, ni las gasolineras de gas, así que no necesita estudiárselo. Memoriza qué ITC se le caen a la be respecto a la a: la cero uno, la cero tres y la cero cinco.</a:t>
             </a:r>
           </a:p>
         </p:txBody>
@@ -4656,7 +4723,7 @@
             <a:r>
               <a:rPr sz="1400" b="1" i="0">
                 <a:solidFill>
-                  <a:srgbClr val="CADCFC"/>
+                  <a:srgbClr val="F4A24C"/>
                 </a:solidFill>
                 <a:latin typeface="Montserrat"/>
               </a:rPr>
@@ -4667,13 +4734,57 @@
       </p:sp>
       <p:sp>
         <p:nvSpPr>
-          <p:cNvPr id="4" name="TextBox 3"/>
+          <p:cNvPr id="4" name="Rounded Rectangle 3"/>
+          <p:cNvSpPr/>
+          <p:nvPr/>
+        </p:nvSpPr>
+        <p:spPr>
+          <a:xfrm>
+            <a:off x="868680" y="2057400"/>
+            <a:ext cx="1463040" cy="82296"/>
+          </a:xfrm>
+          <a:prstGeom prst="roundRect">
+            <a:avLst/>
+          </a:prstGeom>
+          <a:solidFill>
+            <a:srgbClr val="E8801A"/>
+          </a:solidFill>
+          <a:ln>
+            <a:noFill/>
+          </a:ln>
+          <a:effectLst/>
+        </p:spPr>
+        <p:style>
+          <a:lnRef idx="1">
+            <a:schemeClr val="accent1"/>
+          </a:lnRef>
+          <a:fillRef idx="3">
+            <a:schemeClr val="accent1"/>
+          </a:fillRef>
+          <a:effectRef idx="2">
+            <a:schemeClr val="accent1"/>
+          </a:effectRef>
+          <a:fontRef idx="minor">
+            <a:schemeClr val="lt1"/>
+          </a:fontRef>
+        </p:style>
+        <p:txBody>
+          <a:bodyPr rtlCol="0" anchor="ctr"/>
+          <a:lstStyle/>
+          <a:p>
+            <a:pPr algn="ctr"/>
+          </a:p>
+        </p:txBody>
+      </p:sp>
+      <p:sp>
+        <p:nvSpPr>
+          <p:cNvPr id="5" name="TextBox 4"/>
           <p:cNvSpPr txBox="1"/>
           <p:nvPr/>
         </p:nvSpPr>
         <p:spPr>
           <a:xfrm>
-            <a:off x="822960" y="2194560"/>
+            <a:off x="822960" y="2286000"/>
             <a:ext cx="10515600" cy="2011680"/>
           </a:xfrm>
           <a:prstGeom prst="rect">
@@ -4712,7 +4823,7 @@
       </p:sp>
       <p:sp>
         <p:nvSpPr>
-          <p:cNvPr id="5" name="TextBox 4"/>
+          <p:cNvPr id="6" name="TextBox 5"/>
           <p:cNvSpPr txBox="1"/>
           <p:nvPr/>
         </p:nvSpPr>
@@ -4836,7 +4947,7 @@
                 </a:solidFill>
                 <a:latin typeface="Montserrat"/>
               </a:rPr>
-              <a:t>010 / 015</a:t>
+              <a:t>010 / 016</a:t>
             </a:r>
           </a:p>
         </p:txBody>
@@ -4884,7 +4995,7 @@
         <p:spPr>
           <a:xfrm>
             <a:off x="822960" y="457200"/>
-            <a:ext cx="8229600" cy="365760"/>
+            <a:ext cx="10058400" cy="365760"/>
           </a:xfrm>
           <a:prstGeom prst="rect">
             <a:avLst/>
@@ -4898,13 +5009,13 @@
           <a:lstStyle/>
           <a:p>
             <a:r>
-              <a:rPr sz="1200" b="1" i="0">
-                <a:solidFill>
-                  <a:srgbClr val="64748B"/>
-                </a:solidFill>
-                <a:latin typeface="Montserrat"/>
-              </a:rPr>
-              <a:t>ANEXO 1 · REGLAMENTACIÓN C</a:t>
+              <a:rPr sz="1300" b="1" i="0">
+                <a:solidFill>
+                  <a:srgbClr val="E8801A"/>
+                </a:solidFill>
+                <a:latin typeface="Montserrat"/>
+              </a:rPr>
+              <a:t>ANEXO 1 · CATEGORÍA C</a:t>
             </a:r>
           </a:p>
         </p:txBody>
@@ -4932,26 +5043,70 @@
           <a:lstStyle/>
           <a:p>
             <a:r>
-              <a:rPr sz="2700" b="1" i="0">
+              <a:rPr sz="2800" b="1" i="0">
                 <a:solidFill>
                   <a:srgbClr val="1E2761"/>
                 </a:solidFill>
                 <a:latin typeface="Montserrat"/>
               </a:rPr>
-              <a:t>La C es la B menos aún más</a:t>
-            </a:r>
-          </a:p>
-        </p:txBody>
-      </p:sp>
-      <p:sp>
-        <p:nvSpPr>
-          <p:cNvPr id="7" name="TextBox 6"/>
+              <a:t>La C: el temario más recortado</a:t>
+            </a:r>
+          </a:p>
+        </p:txBody>
+      </p:sp>
+      <p:sp>
+        <p:nvSpPr>
+          <p:cNvPr id="7" name="Rounded Rectangle 6"/>
+          <p:cNvSpPr/>
+          <p:nvPr/>
+        </p:nvSpPr>
+        <p:spPr>
+          <a:xfrm>
+            <a:off x="868680" y="1627632"/>
+            <a:ext cx="2011680" cy="73152"/>
+          </a:xfrm>
+          <a:prstGeom prst="roundRect">
+            <a:avLst/>
+          </a:prstGeom>
+          <a:solidFill>
+            <a:srgbClr val="E8801A"/>
+          </a:solidFill>
+          <a:ln>
+            <a:noFill/>
+          </a:ln>
+          <a:effectLst/>
+        </p:spPr>
+        <p:style>
+          <a:lnRef idx="1">
+            <a:schemeClr val="accent1"/>
+          </a:lnRef>
+          <a:fillRef idx="3">
+            <a:schemeClr val="accent1"/>
+          </a:fillRef>
+          <a:effectRef idx="2">
+            <a:schemeClr val="accent1"/>
+          </a:effectRef>
+          <a:fontRef idx="minor">
+            <a:schemeClr val="lt1"/>
+          </a:fontRef>
+        </p:style>
+        <p:txBody>
+          <a:bodyPr rtlCol="0" anchor="ctr"/>
+          <a:lstStyle/>
+          <a:p>
+            <a:pPr algn="ctr"/>
+          </a:p>
+        </p:txBody>
+      </p:sp>
+      <p:sp>
+        <p:nvSpPr>
+          <p:cNvPr id="8" name="TextBox 7"/>
           <p:cNvSpPr txBox="1"/>
           <p:nvPr/>
         </p:nvSpPr>
         <p:spPr>
           <a:xfrm>
-            <a:off x="822960" y="1920240"/>
+            <a:off x="822960" y="1965960"/>
             <a:ext cx="4983480" cy="4206240"/>
           </a:xfrm>
           <a:prstGeom prst="rect">
@@ -4967,17 +5122,17 @@
           <a:p>
             <a:pPr>
               <a:spcAft>
-                <a:spcPts val="1000"/>
+                <a:spcPts val="1100"/>
               </a:spcAft>
             </a:pPr>
             <a:r>
               <a:rPr sz="1600" b="1" i="0">
                 <a:solidFill>
-                  <a:srgbClr val="2E3A80"/>
-                </a:solidFill>
-                <a:latin typeface="Montserrat"/>
-              </a:rPr>
-              <a:t>•  </a:t>
+                  <a:srgbClr val="E8801A"/>
+                </a:solidFill>
+                <a:latin typeface="Montserrat"/>
+              </a:rPr>
+              <a:t>▸  </a:t>
             </a:r>
             <a:r>
               <a:rPr sz="1600" b="0" i="0">
@@ -4986,23 +5141,23 @@
                 </a:solidFill>
                 <a:latin typeface="Montserrat"/>
               </a:rPr>
-              <a:t>Fuera: más capítulos de hidrocarburos</a:t>
+              <a:t>Matemáticas y física reducidas</a:t>
             </a:r>
           </a:p>
           <a:p>
             <a:pPr>
               <a:spcAft>
-                <a:spcPts val="1000"/>
+                <a:spcPts val="1100"/>
               </a:spcAft>
             </a:pPr>
             <a:r>
               <a:rPr sz="1600" b="1" i="0">
                 <a:solidFill>
-                  <a:srgbClr val="2E3A80"/>
-                </a:solidFill>
-                <a:latin typeface="Montserrat"/>
-              </a:rPr>
-              <a:t>•  </a:t>
+                  <a:srgbClr val="E8801A"/>
+                </a:solidFill>
+                <a:latin typeface="Montserrat"/>
+              </a:rPr>
+              <a:t>▸  </a:t>
             </a:r>
             <a:r>
               <a:rPr sz="1600" b="0" i="0">
@@ -5011,23 +5166,23 @@
                 </a:solidFill>
                 <a:latin typeface="Montserrat"/>
               </a:rPr>
-              <a:t>Fuera: ITC-ICG 06 y 10</a:t>
+              <a:t>Sin adaptación a otras familias de gas</a:t>
             </a:r>
           </a:p>
           <a:p>
             <a:pPr>
               <a:spcAft>
-                <a:spcPts val="1000"/>
+                <a:spcPts val="1100"/>
               </a:spcAft>
             </a:pPr>
             <a:r>
               <a:rPr sz="1600" b="1" i="0">
                 <a:solidFill>
-                  <a:srgbClr val="2E3A80"/>
-                </a:solidFill>
-                <a:latin typeface="Montserrat"/>
-              </a:rPr>
-              <a:t>•  </a:t>
+                  <a:srgbClr val="E8801A"/>
+                </a:solidFill>
+                <a:latin typeface="Montserrat"/>
+              </a:rPr>
+              <a:t>▸  </a:t>
             </a:r>
             <a:r>
               <a:rPr sz="1600" b="0" i="0">
@@ -5036,23 +5191,23 @@
                 </a:solidFill>
                 <a:latin typeface="Montserrat"/>
               </a:rPr>
-              <a:t>Fuera: UNE 60601 de salas de máquinas</a:t>
+              <a:t>Sin depósitos móviles grandes</a:t>
             </a:r>
           </a:p>
           <a:p>
             <a:pPr>
               <a:spcAft>
-                <a:spcPts val="1000"/>
+                <a:spcPts val="1100"/>
               </a:spcAft>
             </a:pPr>
             <a:r>
               <a:rPr sz="1600" b="1" i="0">
                 <a:solidFill>
-                  <a:srgbClr val="2E3A80"/>
-                </a:solidFill>
-                <a:latin typeface="Montserrat"/>
-              </a:rPr>
-              <a:t>•  </a:t>
+                  <a:srgbClr val="E8801A"/>
+                </a:solidFill>
+                <a:latin typeface="Montserrat"/>
+              </a:rPr>
+              <a:t>▸  </a:t>
             </a:r>
             <a:r>
               <a:rPr sz="1600" b="0" i="0">
@@ -5061,14 +5216,14 @@
                 </a:solidFill>
                 <a:latin typeface="Montserrat"/>
               </a:rPr>
-              <a:t>La UNE 60601 la ven A y B</a:t>
-            </a:r>
-          </a:p>
-        </p:txBody>
-      </p:sp>
-      <p:sp>
-        <p:nvSpPr>
-          <p:cNvPr id="8" name="imgph" descr="IMGQ:industrial gas boiler machine room"/>
+              <a:t>Solo lo de la vivienda</a:t>
+            </a:r>
+          </a:p>
+        </p:txBody>
+      </p:sp>
+      <p:sp>
+        <p:nvSpPr>
+          <p:cNvPr id="9" name="imgph" descr="IMGQ:simple home gas water heater"/>
           <p:cNvSpPr/>
           <p:nvPr/>
         </p:nvSpPr>
@@ -5114,7 +5269,7 @@
       </p:sp>
       <p:sp>
         <p:nvSpPr>
-          <p:cNvPr id="9" name="TextBox 8"/>
+          <p:cNvPr id="10" name="TextBox 9"/>
           <p:cNvSpPr txBox="1"/>
           <p:nvPr/>
         </p:nvSpPr>
@@ -5154,7 +5309,7 @@
                 </a:solidFill>
                 <a:latin typeface="Montserrat"/>
               </a:rPr>
-              <a:t>industrial gas boiler machine room</a:t>
+              <a:t>simple home gas water heater</a:t>
             </a:r>
           </a:p>
         </p:txBody>
@@ -5251,7 +5406,7 @@
                 </a:solidFill>
                 <a:latin typeface="Montserrat"/>
               </a:rPr>
-              <a:t>011 / 015</a:t>
+              <a:t>011 / 016</a:t>
             </a:r>
           </a:p>
         </p:txBody>
@@ -5299,7 +5454,7 @@
         <p:spPr>
           <a:xfrm>
             <a:off x="822960" y="457200"/>
-            <a:ext cx="8229600" cy="365760"/>
+            <a:ext cx="10058400" cy="365760"/>
           </a:xfrm>
           <a:prstGeom prst="rect">
             <a:avLst/>
@@ -5313,13 +5468,13 @@
           <a:lstStyle/>
           <a:p>
             <a:r>
-              <a:rPr sz="1200" b="1" i="0">
-                <a:solidFill>
-                  <a:srgbClr val="64748B"/>
-                </a:solidFill>
-                <a:latin typeface="Montserrat"/>
-              </a:rPr>
-              <a:t>NORMAS DE EXAMEN</a:t>
+              <a:rPr sz="1300" b="1" i="0">
+                <a:solidFill>
+                  <a:srgbClr val="E8801A"/>
+                </a:solidFill>
+                <a:latin typeface="Montserrat"/>
+              </a:rPr>
+              <a:t>ANEXO 1 · REGLAMENTACIÓN C</a:t>
             </a:r>
           </a:p>
         </p:txBody>
@@ -5347,26 +5502,70 @@
           <a:lstStyle/>
           <a:p>
             <a:r>
-              <a:rPr sz="2700" b="1" i="0">
+              <a:rPr sz="2800" b="1" i="0">
                 <a:solidFill>
                   <a:srgbClr val="1E2761"/>
                 </a:solidFill>
                 <a:latin typeface="Montserrat"/>
               </a:rPr>
-              <a:t>UNE 60670 y UNE 60601</a:t>
-            </a:r>
-          </a:p>
-        </p:txBody>
-      </p:sp>
-      <p:sp>
-        <p:nvSpPr>
-          <p:cNvPr id="7" name="TextBox 6"/>
+              <a:t>La C es la B menos aún más</a:t>
+            </a:r>
+          </a:p>
+        </p:txBody>
+      </p:sp>
+      <p:sp>
+        <p:nvSpPr>
+          <p:cNvPr id="7" name="Rounded Rectangle 6"/>
+          <p:cNvSpPr/>
+          <p:nvPr/>
+        </p:nvSpPr>
+        <p:spPr>
+          <a:xfrm>
+            <a:off x="868680" y="1627632"/>
+            <a:ext cx="2011680" cy="73152"/>
+          </a:xfrm>
+          <a:prstGeom prst="roundRect">
+            <a:avLst/>
+          </a:prstGeom>
+          <a:solidFill>
+            <a:srgbClr val="E8801A"/>
+          </a:solidFill>
+          <a:ln>
+            <a:noFill/>
+          </a:ln>
+          <a:effectLst/>
+        </p:spPr>
+        <p:style>
+          <a:lnRef idx="1">
+            <a:schemeClr val="accent1"/>
+          </a:lnRef>
+          <a:fillRef idx="3">
+            <a:schemeClr val="accent1"/>
+          </a:fillRef>
+          <a:effectRef idx="2">
+            <a:schemeClr val="accent1"/>
+          </a:effectRef>
+          <a:fontRef idx="minor">
+            <a:schemeClr val="lt1"/>
+          </a:fontRef>
+        </p:style>
+        <p:txBody>
+          <a:bodyPr rtlCol="0" anchor="ctr"/>
+          <a:lstStyle/>
+          <a:p>
+            <a:pPr algn="ctr"/>
+          </a:p>
+        </p:txBody>
+      </p:sp>
+      <p:sp>
+        <p:nvSpPr>
+          <p:cNvPr id="8" name="TextBox 7"/>
           <p:cNvSpPr txBox="1"/>
           <p:nvPr/>
         </p:nvSpPr>
         <p:spPr>
           <a:xfrm>
-            <a:off x="822960" y="1920240"/>
+            <a:off x="822960" y="1965960"/>
             <a:ext cx="4983480" cy="4206240"/>
           </a:xfrm>
           <a:prstGeom prst="rect">
@@ -5382,17 +5581,17 @@
           <a:p>
             <a:pPr>
               <a:spcAft>
-                <a:spcPts val="1000"/>
+                <a:spcPts val="1100"/>
               </a:spcAft>
             </a:pPr>
             <a:r>
               <a:rPr sz="1600" b="1" i="0">
                 <a:solidFill>
-                  <a:srgbClr val="2E3A80"/>
-                </a:solidFill>
-                <a:latin typeface="Montserrat"/>
-              </a:rPr>
-              <a:t>•  </a:t>
+                  <a:srgbClr val="E8801A"/>
+                </a:solidFill>
+                <a:latin typeface="Montserrat"/>
+              </a:rPr>
+              <a:t>▸  </a:t>
             </a:r>
             <a:r>
               <a:rPr sz="1600" b="0" i="0">
@@ -5401,23 +5600,23 @@
                 </a:solidFill>
                 <a:latin typeface="Montserrat"/>
               </a:rPr>
-              <a:t>UNE 60670: la estudian las tres</a:t>
+              <a:t>Fuera: más capítulos de hidrocarburos</a:t>
             </a:r>
           </a:p>
           <a:p>
             <a:pPr>
               <a:spcAft>
-                <a:spcPts val="1000"/>
+                <a:spcPts val="1100"/>
               </a:spcAft>
             </a:pPr>
             <a:r>
               <a:rPr sz="1600" b="1" i="0">
                 <a:solidFill>
-                  <a:srgbClr val="2E3A80"/>
-                </a:solidFill>
-                <a:latin typeface="Montserrat"/>
-              </a:rPr>
-              <a:t>•  </a:t>
+                  <a:srgbClr val="E8801A"/>
+                </a:solidFill>
+                <a:latin typeface="Montserrat"/>
+              </a:rPr>
+              <a:t>▸  </a:t>
             </a:r>
             <a:r>
               <a:rPr sz="1600" b="0" i="0">
@@ -5426,23 +5625,23 @@
                 </a:solidFill>
                 <a:latin typeface="Montserrat"/>
               </a:rPr>
-              <a:t>Receptoras hasta 5 bar y ventilación</a:t>
+              <a:t>Fuera: ITC-ICG 06 y 10</a:t>
             </a:r>
           </a:p>
           <a:p>
             <a:pPr>
               <a:spcAft>
-                <a:spcPts val="1000"/>
+                <a:spcPts val="1100"/>
               </a:spcAft>
             </a:pPr>
             <a:r>
               <a:rPr sz="1600" b="1" i="0">
                 <a:solidFill>
-                  <a:srgbClr val="2E3A80"/>
-                </a:solidFill>
-                <a:latin typeface="Montserrat"/>
-              </a:rPr>
-              <a:t>•  </a:t>
+                  <a:srgbClr val="E8801A"/>
+                </a:solidFill>
+                <a:latin typeface="Montserrat"/>
+              </a:rPr>
+              <a:t>▸  </a:t>
             </a:r>
             <a:r>
               <a:rPr sz="1600" b="0" i="0">
@@ -5451,23 +5650,23 @@
                 </a:solidFill>
                 <a:latin typeface="Montserrat"/>
               </a:rPr>
-              <a:t>UNE 60601: solo A y B</a:t>
+              <a:t>Fuera: UNE 60601 de salas de máquinas</a:t>
             </a:r>
           </a:p>
           <a:p>
             <a:pPr>
               <a:spcAft>
-                <a:spcPts val="1000"/>
+                <a:spcPts val="1100"/>
               </a:spcAft>
             </a:pPr>
             <a:r>
               <a:rPr sz="1600" b="1" i="0">
                 <a:solidFill>
-                  <a:srgbClr val="2E3A80"/>
-                </a:solidFill>
-                <a:latin typeface="Montserrat"/>
-              </a:rPr>
-              <a:t>•  </a:t>
+                  <a:srgbClr val="E8801A"/>
+                </a:solidFill>
+                <a:latin typeface="Montserrat"/>
+              </a:rPr>
+              <a:t>▸  </a:t>
             </a:r>
             <a:r>
               <a:rPr sz="1600" b="0" i="0">
@@ -5476,14 +5675,14 @@
                 </a:solidFill>
                 <a:latin typeface="Montserrat"/>
               </a:rPr>
-              <a:t>Salas de máquinas</a:t>
-            </a:r>
-          </a:p>
-        </p:txBody>
-      </p:sp>
-      <p:sp>
-        <p:nvSpPr>
-          <p:cNvPr id="8" name="imgph" descr="IMGQ:ventilation grille on kitchen wall"/>
+              <a:t>La UNE 60601 la ven A y B</a:t>
+            </a:r>
+          </a:p>
+        </p:txBody>
+      </p:sp>
+      <p:sp>
+        <p:nvSpPr>
+          <p:cNvPr id="9" name="imgph" descr="IMGQ:industrial gas boiler machine room"/>
           <p:cNvSpPr/>
           <p:nvPr/>
         </p:nvSpPr>
@@ -5529,7 +5728,7 @@
       </p:sp>
       <p:sp>
         <p:nvSpPr>
-          <p:cNvPr id="9" name="TextBox 8"/>
+          <p:cNvPr id="10" name="TextBox 9"/>
           <p:cNvSpPr txBox="1"/>
           <p:nvPr/>
         </p:nvSpPr>
@@ -5569,7 +5768,7 @@
                 </a:solidFill>
                 <a:latin typeface="Montserrat"/>
               </a:rPr>
-              <a:t>ventilation grille on kitchen wall</a:t>
+              <a:t>industrial gas boiler machine room</a:t>
             </a:r>
           </a:p>
         </p:txBody>
@@ -5666,7 +5865,7 @@
                 </a:solidFill>
                 <a:latin typeface="Montserrat"/>
               </a:rPr>
-              <a:t>012 / 015</a:t>
+              <a:t>012 / 016</a:t>
             </a:r>
           </a:p>
         </p:txBody>
@@ -5714,7 +5913,7 @@
         <p:spPr>
           <a:xfrm>
             <a:off x="822960" y="457200"/>
-            <a:ext cx="8229600" cy="365760"/>
+            <a:ext cx="10058400" cy="365760"/>
           </a:xfrm>
           <a:prstGeom prst="rect">
             <a:avLst/>
@@ -5728,13 +5927,13 @@
           <a:lstStyle/>
           <a:p>
             <a:r>
-              <a:rPr sz="1200" b="1" i="0">
-                <a:solidFill>
-                  <a:srgbClr val="64748B"/>
-                </a:solidFill>
-                <a:latin typeface="Montserrat"/>
-              </a:rPr>
-              <a:t>ANEXO 2 · REPARTO</a:t>
+              <a:rPr sz="1300" b="1" i="0">
+                <a:solidFill>
+                  <a:srgbClr val="E8801A"/>
+                </a:solidFill>
+                <a:latin typeface="Montserrat"/>
+              </a:rPr>
+              <a:t>NORMAS DE EXAMEN</a:t>
             </a:r>
           </a:p>
         </p:txBody>
@@ -5762,26 +5961,70 @@
           <a:lstStyle/>
           <a:p>
             <a:r>
-              <a:rPr sz="2700" b="1" i="0">
+              <a:rPr sz="2800" b="1" i="0">
                 <a:solidFill>
                   <a:srgbClr val="1E2761"/>
                 </a:solidFill>
                 <a:latin typeface="Montserrat"/>
               </a:rPr>
-              <a:t>18 apartados: 1 a 17 o completo</a:t>
-            </a:r>
-          </a:p>
-        </p:txBody>
-      </p:sp>
-      <p:sp>
-        <p:nvSpPr>
-          <p:cNvPr id="7" name="TextBox 6"/>
+              <a:t>UNE 60670 y UNE 60601</a:t>
+            </a:r>
+          </a:p>
+        </p:txBody>
+      </p:sp>
+      <p:sp>
+        <p:nvSpPr>
+          <p:cNvPr id="7" name="Rounded Rectangle 6"/>
+          <p:cNvSpPr/>
+          <p:nvPr/>
+        </p:nvSpPr>
+        <p:spPr>
+          <a:xfrm>
+            <a:off x="868680" y="1627632"/>
+            <a:ext cx="2011680" cy="73152"/>
+          </a:xfrm>
+          <a:prstGeom prst="roundRect">
+            <a:avLst/>
+          </a:prstGeom>
+          <a:solidFill>
+            <a:srgbClr val="E8801A"/>
+          </a:solidFill>
+          <a:ln>
+            <a:noFill/>
+          </a:ln>
+          <a:effectLst/>
+        </p:spPr>
+        <p:style>
+          <a:lnRef idx="1">
+            <a:schemeClr val="accent1"/>
+          </a:lnRef>
+          <a:fillRef idx="3">
+            <a:schemeClr val="accent1"/>
+          </a:fillRef>
+          <a:effectRef idx="2">
+            <a:schemeClr val="accent1"/>
+          </a:effectRef>
+          <a:fontRef idx="minor">
+            <a:schemeClr val="lt1"/>
+          </a:fontRef>
+        </p:style>
+        <p:txBody>
+          <a:bodyPr rtlCol="0" anchor="ctr"/>
+          <a:lstStyle/>
+          <a:p>
+            <a:pPr algn="ctr"/>
+          </a:p>
+        </p:txBody>
+      </p:sp>
+      <p:sp>
+        <p:nvSpPr>
+          <p:cNvPr id="8" name="TextBox 7"/>
           <p:cNvSpPr txBox="1"/>
           <p:nvPr/>
         </p:nvSpPr>
         <p:spPr>
           <a:xfrm>
-            <a:off x="822960" y="1920240"/>
+            <a:off x="822960" y="1965960"/>
             <a:ext cx="4983480" cy="4206240"/>
           </a:xfrm>
           <a:prstGeom prst="rect">
@@ -5797,17 +6040,17 @@
           <a:p>
             <a:pPr>
               <a:spcAft>
-                <a:spcPts val="1000"/>
+                <a:spcPts val="1100"/>
               </a:spcAft>
             </a:pPr>
             <a:r>
               <a:rPr sz="1600" b="1" i="0">
                 <a:solidFill>
-                  <a:srgbClr val="2E3A80"/>
-                </a:solidFill>
-                <a:latin typeface="Montserrat"/>
-              </a:rPr>
-              <a:t>•  </a:t>
+                  <a:srgbClr val="E8801A"/>
+                </a:solidFill>
+                <a:latin typeface="Montserrat"/>
+              </a:rPr>
+              <a:t>▸  </a:t>
             </a:r>
             <a:r>
               <a:rPr sz="1600" b="0" i="0">
@@ -5816,23 +6059,23 @@
                 </a:solidFill>
                 <a:latin typeface="Montserrat"/>
               </a:rPr>
-              <a:t>4.1 (aparatos grandes): apartados 1 a 17</a:t>
+              <a:t>UNE 60670: la estudian las tres</a:t>
             </a:r>
           </a:p>
           <a:p>
             <a:pPr>
               <a:spcAft>
-                <a:spcPts val="1000"/>
+                <a:spcPts val="1100"/>
               </a:spcAft>
             </a:pPr>
             <a:r>
               <a:rPr sz="1600" b="1" i="0">
                 <a:solidFill>
-                  <a:srgbClr val="2E3A80"/>
-                </a:solidFill>
-                <a:latin typeface="Montserrat"/>
-              </a:rPr>
-              <a:t>•  </a:t>
+                  <a:srgbClr val="E8801A"/>
+                </a:solidFill>
+                <a:latin typeface="Montserrat"/>
+              </a:rPr>
+              <a:t>▸  </a:t>
             </a:r>
             <a:r>
               <a:rPr sz="1600" b="0" i="0">
@@ -5841,23 +6084,23 @@
                 </a:solidFill>
                 <a:latin typeface="Montserrat"/>
               </a:rPr>
-              <a:t>4.2 (cambio de gas): anexo completo</a:t>
+              <a:t>Receptoras hasta 5 bar y ventilación</a:t>
             </a:r>
           </a:p>
           <a:p>
             <a:pPr>
               <a:spcAft>
-                <a:spcPts val="1000"/>
+                <a:spcPts val="1100"/>
               </a:spcAft>
             </a:pPr>
             <a:r>
               <a:rPr sz="1600" b="1" i="0">
                 <a:solidFill>
-                  <a:srgbClr val="2E3A80"/>
-                </a:solidFill>
-                <a:latin typeface="Montserrat"/>
-              </a:rPr>
-              <a:t>•  </a:t>
+                  <a:srgbClr val="E8801A"/>
+                </a:solidFill>
+                <a:latin typeface="Montserrat"/>
+              </a:rPr>
+              <a:t>▸  </a:t>
             </a:r>
             <a:r>
               <a:rPr sz="1600" b="0" i="0">
@@ -5866,23 +6109,23 @@
                 </a:solidFill>
                 <a:latin typeface="Montserrat"/>
               </a:rPr>
-              <a:t>El 18 es adaptación a otras familias</a:t>
+              <a:t>UNE 60601: solo A y B</a:t>
             </a:r>
           </a:p>
           <a:p>
             <a:pPr>
               <a:spcAft>
-                <a:spcPts val="1000"/>
+                <a:spcPts val="1100"/>
               </a:spcAft>
             </a:pPr>
             <a:r>
               <a:rPr sz="1600" b="1" i="0">
                 <a:solidFill>
-                  <a:srgbClr val="2E3A80"/>
-                </a:solidFill>
-                <a:latin typeface="Montserrat"/>
-              </a:rPr>
-              <a:t>•  </a:t>
+                  <a:srgbClr val="E8801A"/>
+                </a:solidFill>
+                <a:latin typeface="Montserrat"/>
+              </a:rPr>
+              <a:t>▸  </a:t>
             </a:r>
             <a:r>
               <a:rPr sz="1600" b="0" i="0">
@@ -5891,14 +6134,14 @@
                 </a:solidFill>
                 <a:latin typeface="Montserrat"/>
               </a:rPr>
-              <a:t>El 4.2 es solo para A y B</a:t>
-            </a:r>
-          </a:p>
-        </p:txBody>
-      </p:sp>
-      <p:sp>
-        <p:nvSpPr>
-          <p:cNvPr id="8" name="imgph" descr="IMGQ:gas appliance technical schematic diagram"/>
+              <a:t>Salas de máquinas</a:t>
+            </a:r>
+          </a:p>
+        </p:txBody>
+      </p:sp>
+      <p:sp>
+        <p:nvSpPr>
+          <p:cNvPr id="9" name="imgph" descr="IMGQ:ventilation grille on kitchen wall"/>
           <p:cNvSpPr/>
           <p:nvPr/>
         </p:nvSpPr>
@@ -5944,7 +6187,7 @@
       </p:sp>
       <p:sp>
         <p:nvSpPr>
-          <p:cNvPr id="9" name="TextBox 8"/>
+          <p:cNvPr id="10" name="TextBox 9"/>
           <p:cNvSpPr txBox="1"/>
           <p:nvPr/>
         </p:nvSpPr>
@@ -5984,7 +6227,7 @@
                 </a:solidFill>
                 <a:latin typeface="Montserrat"/>
               </a:rPr>
-              <a:t>gas appliance technical schematic diagram</a:t>
+              <a:t>ventilation grille on kitchen wall</a:t>
             </a:r>
           </a:p>
         </p:txBody>
@@ -6081,7 +6324,7 @@
                 </a:solidFill>
                 <a:latin typeface="Montserrat"/>
               </a:rPr>
-              <a:t>013 / 015</a:t>
+              <a:t>013 / 016</a:t>
             </a:r>
           </a:p>
         </p:txBody>
@@ -6129,7 +6372,7 @@
         <p:spPr>
           <a:xfrm>
             <a:off x="822960" y="457200"/>
-            <a:ext cx="8229600" cy="365760"/>
+            <a:ext cx="10058400" cy="365760"/>
           </a:xfrm>
           <a:prstGeom prst="rect">
             <a:avLst/>
@@ -6143,13 +6386,13 @@
           <a:lstStyle/>
           <a:p>
             <a:r>
-              <a:rPr sz="1200" b="1" i="0">
-                <a:solidFill>
-                  <a:srgbClr val="64748B"/>
-                </a:solidFill>
-                <a:latin typeface="Montserrat"/>
-              </a:rPr>
-              <a:t>ANEXO 2 · EN LA PRÁCTICA</a:t>
+              <a:rPr sz="1300" b="1" i="0">
+                <a:solidFill>
+                  <a:srgbClr val="E8801A"/>
+                </a:solidFill>
+                <a:latin typeface="Montserrat"/>
+              </a:rPr>
+              <a:t>ANEXO 2 · REPARTO</a:t>
             </a:r>
           </a:p>
         </p:txBody>
@@ -6177,26 +6420,70 @@
           <a:lstStyle/>
           <a:p>
             <a:r>
-              <a:rPr sz="2700" b="1" i="0">
+              <a:rPr sz="2800" b="1" i="0">
                 <a:solidFill>
                   <a:srgbClr val="1E2761"/>
                 </a:solidFill>
                 <a:latin typeface="Montserrat"/>
               </a:rPr>
-              <a:t>El anexo 2 es un manual de averías</a:t>
-            </a:r>
-          </a:p>
-        </p:txBody>
-      </p:sp>
-      <p:sp>
-        <p:nvSpPr>
-          <p:cNvPr id="7" name="TextBox 6"/>
+              <a:t>18 apartados: 1 a 17 o completo</a:t>
+            </a:r>
+          </a:p>
+        </p:txBody>
+      </p:sp>
+      <p:sp>
+        <p:nvSpPr>
+          <p:cNvPr id="7" name="Rounded Rectangle 6"/>
+          <p:cNvSpPr/>
+          <p:nvPr/>
+        </p:nvSpPr>
+        <p:spPr>
+          <a:xfrm>
+            <a:off x="868680" y="1627632"/>
+            <a:ext cx="2011680" cy="73152"/>
+          </a:xfrm>
+          <a:prstGeom prst="roundRect">
+            <a:avLst/>
+          </a:prstGeom>
+          <a:solidFill>
+            <a:srgbClr val="E8801A"/>
+          </a:solidFill>
+          <a:ln>
+            <a:noFill/>
+          </a:ln>
+          <a:effectLst/>
+        </p:spPr>
+        <p:style>
+          <a:lnRef idx="1">
+            <a:schemeClr val="accent1"/>
+          </a:lnRef>
+          <a:fillRef idx="3">
+            <a:schemeClr val="accent1"/>
+          </a:fillRef>
+          <a:effectRef idx="2">
+            <a:schemeClr val="accent1"/>
+          </a:effectRef>
+          <a:fontRef idx="minor">
+            <a:schemeClr val="lt1"/>
+          </a:fontRef>
+        </p:style>
+        <p:txBody>
+          <a:bodyPr rtlCol="0" anchor="ctr"/>
+          <a:lstStyle/>
+          <a:p>
+            <a:pPr algn="ctr"/>
+          </a:p>
+        </p:txBody>
+      </p:sp>
+      <p:sp>
+        <p:nvSpPr>
+          <p:cNvPr id="8" name="TextBox 7"/>
           <p:cNvSpPr txBox="1"/>
           <p:nvPr/>
         </p:nvSpPr>
         <p:spPr>
           <a:xfrm>
-            <a:off x="822960" y="1920240"/>
+            <a:off x="822960" y="1965960"/>
             <a:ext cx="4983480" cy="4206240"/>
           </a:xfrm>
           <a:prstGeom prst="rect">
@@ -6212,17 +6499,17 @@
           <a:p>
             <a:pPr>
               <a:spcAft>
-                <a:spcPts val="1000"/>
+                <a:spcPts val="1100"/>
               </a:spcAft>
             </a:pPr>
             <a:r>
               <a:rPr sz="1600" b="1" i="0">
                 <a:solidFill>
-                  <a:srgbClr val="2E3A80"/>
-                </a:solidFill>
-                <a:latin typeface="Montserrat"/>
-              </a:rPr>
-              <a:t>•  </a:t>
+                  <a:srgbClr val="E8801A"/>
+                </a:solidFill>
+                <a:latin typeface="Montserrat"/>
+              </a:rPr>
+              <a:t>▸  </a:t>
             </a:r>
             <a:r>
               <a:rPr sz="1600" b="0" i="0">
@@ -6231,23 +6518,23 @@
                 </a:solidFill>
                 <a:latin typeface="Montserrat"/>
               </a:rPr>
-              <a:t>Análisis de humos y CO ambiente</a:t>
+              <a:t>4.1 (aparatos grandes): apartados 1 a 17</a:t>
             </a:r>
           </a:p>
           <a:p>
             <a:pPr>
               <a:spcAft>
-                <a:spcPts val="1000"/>
+                <a:spcPts val="1100"/>
               </a:spcAft>
             </a:pPr>
             <a:r>
               <a:rPr sz="1600" b="1" i="0">
                 <a:solidFill>
-                  <a:srgbClr val="2E3A80"/>
-                </a:solidFill>
-                <a:latin typeface="Montserrat"/>
-              </a:rPr>
-              <a:t>•  </a:t>
+                  <a:srgbClr val="E8801A"/>
+                </a:solidFill>
+                <a:latin typeface="Montserrat"/>
+              </a:rPr>
+              <a:t>▸  </a:t>
             </a:r>
             <a:r>
               <a:rPr sz="1600" b="0" i="0">
@@ -6256,23 +6543,23 @@
                 </a:solidFill>
                 <a:latin typeface="Montserrat"/>
               </a:rPr>
-              <a:t>Rendimiento e inquemados</a:t>
+              <a:t>4.2 (cambio de gas): anexo completo</a:t>
             </a:r>
           </a:p>
           <a:p>
             <a:pPr>
               <a:spcAft>
-                <a:spcPts val="1000"/>
+                <a:spcPts val="1100"/>
               </a:spcAft>
             </a:pPr>
             <a:r>
               <a:rPr sz="1600" b="1" i="0">
                 <a:solidFill>
-                  <a:srgbClr val="2E3A80"/>
-                </a:solidFill>
-                <a:latin typeface="Montserrat"/>
-              </a:rPr>
-              <a:t>•  </a:t>
+                  <a:srgbClr val="E8801A"/>
+                </a:solidFill>
+                <a:latin typeface="Montserrat"/>
+              </a:rPr>
+              <a:t>▸  </a:t>
             </a:r>
             <a:r>
               <a:rPr sz="1600" b="0" i="0">
@@ -6281,23 +6568,23 @@
                 </a:solidFill>
                 <a:latin typeface="Montserrat"/>
               </a:rPr>
-              <a:t>Seguridad: cortatiro y termopar</a:t>
+              <a:t>El 18 es adaptación a otras familias</a:t>
             </a:r>
           </a:p>
           <a:p>
             <a:pPr>
               <a:spcAft>
-                <a:spcPts val="1000"/>
+                <a:spcPts val="1100"/>
               </a:spcAft>
             </a:pPr>
             <a:r>
               <a:rPr sz="1600" b="1" i="0">
                 <a:solidFill>
-                  <a:srgbClr val="2E3A80"/>
-                </a:solidFill>
-                <a:latin typeface="Montserrat"/>
-              </a:rPr>
-              <a:t>•  </a:t>
+                  <a:srgbClr val="E8801A"/>
+                </a:solidFill>
+                <a:latin typeface="Montserrat"/>
+              </a:rPr>
+              <a:t>▸  </a:t>
             </a:r>
             <a:r>
               <a:rPr sz="1600" b="0" i="0">
@@ -6306,14 +6593,14 @@
                 </a:solidFill>
                 <a:latin typeface="Montserrat"/>
               </a:rPr>
-              <a:t>Averías de calentadores y calderas</a:t>
-            </a:r>
-          </a:p>
-        </p:txBody>
-      </p:sp>
-      <p:sp>
-        <p:nvSpPr>
-          <p:cNvPr id="8" name="imgph" descr="IMGQ:technician measuring boiler flue gases with analyzer"/>
+              <a:t>El 4.2 es solo para A y B</a:t>
+            </a:r>
+          </a:p>
+        </p:txBody>
+      </p:sp>
+      <p:sp>
+        <p:nvSpPr>
+          <p:cNvPr id="9" name="imgph" descr="IMGQ:gas appliance technical schematic diagram"/>
           <p:cNvSpPr/>
           <p:nvPr/>
         </p:nvSpPr>
@@ -6359,7 +6646,7 @@
       </p:sp>
       <p:sp>
         <p:nvSpPr>
-          <p:cNvPr id="9" name="TextBox 8"/>
+          <p:cNvPr id="10" name="TextBox 9"/>
           <p:cNvSpPr txBox="1"/>
           <p:nvPr/>
         </p:nvSpPr>
@@ -6399,7 +6686,7 @@
                 </a:solidFill>
                 <a:latin typeface="Montserrat"/>
               </a:rPr>
-              <a:t>technician measuring boiler flue gases with analyzer</a:t>
+              <a:t>gas appliance technical schematic diagram</a:t>
             </a:r>
           </a:p>
         </p:txBody>
@@ -6496,7 +6783,7 @@
                 </a:solidFill>
                 <a:latin typeface="Montserrat"/>
               </a:rPr>
-              <a:t>014 / 015</a:t>
+              <a:t>014 / 016</a:t>
             </a:r>
           </a:p>
         </p:txBody>
@@ -6544,7 +6831,7 @@
         <p:spPr>
           <a:xfrm>
             <a:off x="822960" y="457200"/>
-            <a:ext cx="8229600" cy="365760"/>
+            <a:ext cx="10058400" cy="365760"/>
           </a:xfrm>
           <a:prstGeom prst="rect">
             <a:avLst/>
@@ -6558,13 +6845,13 @@
           <a:lstStyle/>
           <a:p>
             <a:r>
-              <a:rPr sz="1200" b="1" i="0">
-                <a:solidFill>
-                  <a:srgbClr val="64748B"/>
-                </a:solidFill>
-                <a:latin typeface="Montserrat"/>
-              </a:rPr>
-              <a:t>TRAMPA CLÁSICA</a:t>
+              <a:rPr sz="1300" b="1" i="0">
+                <a:solidFill>
+                  <a:srgbClr val="E8801A"/>
+                </a:solidFill>
+                <a:latin typeface="Montserrat"/>
+              </a:rPr>
+              <a:t>ANEXO 2 · EN LA PRÁCTICA</a:t>
             </a:r>
           </a:p>
         </p:txBody>
@@ -6592,26 +6879,70 @@
           <a:lstStyle/>
           <a:p>
             <a:r>
-              <a:rPr sz="2700" b="1" i="0">
+              <a:rPr sz="2800" b="1" i="0">
                 <a:solidFill>
                   <a:srgbClr val="1E2761"/>
                 </a:solidFill>
                 <a:latin typeface="Montserrat"/>
               </a:rPr>
-              <a:t>Tipos de aparato ≠ categorías</a:t>
-            </a:r>
-          </a:p>
-        </p:txBody>
-      </p:sp>
-      <p:sp>
-        <p:nvSpPr>
-          <p:cNvPr id="7" name="TextBox 6"/>
+              <a:t>El anexo 2 es un manual de averías</a:t>
+            </a:r>
+          </a:p>
+        </p:txBody>
+      </p:sp>
+      <p:sp>
+        <p:nvSpPr>
+          <p:cNvPr id="7" name="Rounded Rectangle 6"/>
+          <p:cNvSpPr/>
+          <p:nvPr/>
+        </p:nvSpPr>
+        <p:spPr>
+          <a:xfrm>
+            <a:off x="868680" y="1627632"/>
+            <a:ext cx="2011680" cy="73152"/>
+          </a:xfrm>
+          <a:prstGeom prst="roundRect">
+            <a:avLst/>
+          </a:prstGeom>
+          <a:solidFill>
+            <a:srgbClr val="E8801A"/>
+          </a:solidFill>
+          <a:ln>
+            <a:noFill/>
+          </a:ln>
+          <a:effectLst/>
+        </p:spPr>
+        <p:style>
+          <a:lnRef idx="1">
+            <a:schemeClr val="accent1"/>
+          </a:lnRef>
+          <a:fillRef idx="3">
+            <a:schemeClr val="accent1"/>
+          </a:fillRef>
+          <a:effectRef idx="2">
+            <a:schemeClr val="accent1"/>
+          </a:effectRef>
+          <a:fontRef idx="minor">
+            <a:schemeClr val="lt1"/>
+          </a:fontRef>
+        </p:style>
+        <p:txBody>
+          <a:bodyPr rtlCol="0" anchor="ctr"/>
+          <a:lstStyle/>
+          <a:p>
+            <a:pPr algn="ctr"/>
+          </a:p>
+        </p:txBody>
+      </p:sp>
+      <p:sp>
+        <p:nvSpPr>
+          <p:cNvPr id="8" name="TextBox 7"/>
           <p:cNvSpPr txBox="1"/>
           <p:nvPr/>
         </p:nvSpPr>
         <p:spPr>
           <a:xfrm>
-            <a:off x="822960" y="1920240"/>
+            <a:off x="822960" y="1965960"/>
             <a:ext cx="4983480" cy="4206240"/>
           </a:xfrm>
           <a:prstGeom prst="rect">
@@ -6627,17 +6958,17 @@
           <a:p>
             <a:pPr>
               <a:spcAft>
-                <a:spcPts val="1000"/>
+                <a:spcPts val="1100"/>
               </a:spcAft>
             </a:pPr>
             <a:r>
               <a:rPr sz="1600" b="1" i="0">
                 <a:solidFill>
-                  <a:srgbClr val="2E3A80"/>
-                </a:solidFill>
-                <a:latin typeface="Montserrat"/>
-              </a:rPr>
-              <a:t>•  </a:t>
+                  <a:srgbClr val="E8801A"/>
+                </a:solidFill>
+                <a:latin typeface="Montserrat"/>
+              </a:rPr>
+              <a:t>▸  </a:t>
             </a:r>
             <a:r>
               <a:rPr sz="1600" b="0" i="0">
@@ -6646,23 +6977,23 @@
                 </a:solidFill>
                 <a:latin typeface="Montserrat"/>
               </a:rPr>
-              <a:t>Tipo A: no conducido (humos al local)</a:t>
+              <a:t>Análisis de humos y CO ambiente</a:t>
             </a:r>
           </a:p>
           <a:p>
             <a:pPr>
               <a:spcAft>
-                <a:spcPts val="1000"/>
+                <a:spcPts val="1100"/>
               </a:spcAft>
             </a:pPr>
             <a:r>
               <a:rPr sz="1600" b="1" i="0">
                 <a:solidFill>
-                  <a:srgbClr val="2E3A80"/>
-                </a:solidFill>
-                <a:latin typeface="Montserrat"/>
-              </a:rPr>
-              <a:t>•  </a:t>
+                  <a:srgbClr val="E8801A"/>
+                </a:solidFill>
+                <a:latin typeface="Montserrat"/>
+              </a:rPr>
+              <a:t>▸  </a:t>
             </a:r>
             <a:r>
               <a:rPr sz="1600" b="0" i="0">
@@ -6671,23 +7002,23 @@
                 </a:solidFill>
                 <a:latin typeface="Montserrat"/>
               </a:rPr>
-              <a:t>Tipo B: conducido, toma aire del local</a:t>
+              <a:t>Rendimiento e inquemados</a:t>
             </a:r>
           </a:p>
           <a:p>
             <a:pPr>
               <a:spcAft>
-                <a:spcPts val="1000"/>
+                <a:spcPts val="1100"/>
               </a:spcAft>
             </a:pPr>
             <a:r>
               <a:rPr sz="1600" b="1" i="0">
                 <a:solidFill>
-                  <a:srgbClr val="2E3A80"/>
-                </a:solidFill>
-                <a:latin typeface="Montserrat"/>
-              </a:rPr>
-              <a:t>•  </a:t>
+                  <a:srgbClr val="E8801A"/>
+                </a:solidFill>
+                <a:latin typeface="Montserrat"/>
+              </a:rPr>
+              <a:t>▸  </a:t>
             </a:r>
             <a:r>
               <a:rPr sz="1600" b="0" i="0">
@@ -6696,23 +7027,23 @@
                 </a:solidFill>
                 <a:latin typeface="Montserrat"/>
               </a:rPr>
-              <a:t>Tipo C: estanco, circuito con el exterior</a:t>
+              <a:t>Seguridad: cortatiro y termopar</a:t>
             </a:r>
           </a:p>
           <a:p>
             <a:pPr>
               <a:spcAft>
-                <a:spcPts val="1000"/>
+                <a:spcPts val="1100"/>
               </a:spcAft>
             </a:pPr>
             <a:r>
               <a:rPr sz="1600" b="1" i="0">
                 <a:solidFill>
-                  <a:srgbClr val="2E3A80"/>
-                </a:solidFill>
-                <a:latin typeface="Montserrat"/>
-              </a:rPr>
-              <a:t>•  </a:t>
+                  <a:srgbClr val="E8801A"/>
+                </a:solidFill>
+                <a:latin typeface="Montserrat"/>
+              </a:rPr>
+              <a:t>▸  </a:t>
             </a:r>
             <a:r>
               <a:rPr sz="1600" b="0" i="0">
@@ -6721,14 +7052,14 @@
                 </a:solidFill>
                 <a:latin typeface="Montserrat"/>
               </a:rPr>
-              <a:t>No son las categorías del instalador</a:t>
-            </a:r>
-          </a:p>
-        </p:txBody>
-      </p:sp>
-      <p:sp>
-        <p:nvSpPr>
-          <p:cNvPr id="8" name="imgph" descr="IMGQ:sealed balanced flue gas boiler on wall"/>
+              <a:t>Averías de calentadores y calderas</a:t>
+            </a:r>
+          </a:p>
+        </p:txBody>
+      </p:sp>
+      <p:sp>
+        <p:nvSpPr>
+          <p:cNvPr id="9" name="imgph" descr="IMGQ:technician measuring boiler flue gases with analyzer"/>
           <p:cNvSpPr/>
           <p:nvPr/>
         </p:nvSpPr>
@@ -6774,7 +7105,7 @@
       </p:sp>
       <p:sp>
         <p:nvSpPr>
-          <p:cNvPr id="9" name="TextBox 8"/>
+          <p:cNvPr id="10" name="TextBox 9"/>
           <p:cNvSpPr txBox="1"/>
           <p:nvPr/>
         </p:nvSpPr>
@@ -6814,7 +7145,7 @@
                 </a:solidFill>
                 <a:latin typeface="Montserrat"/>
               </a:rPr>
-              <a:t>sealed balanced flue gas boiler on wall</a:t>
+              <a:t>technician measuring boiler flue gases with analyzer</a:t>
             </a:r>
           </a:p>
         </p:txBody>
@@ -6852,6 +7183,465 @@
             <a:avLst/>
           </a:prstGeom>
           <a:solidFill>
+            <a:srgbClr val="FFFFFF"/>
+          </a:solidFill>
+          <a:ln>
+            <a:noFill/>
+          </a:ln>
+          <a:effectLst/>
+        </p:spPr>
+        <p:style>
+          <a:lnRef idx="1">
+            <a:schemeClr val="accent1"/>
+          </a:lnRef>
+          <a:fillRef idx="3">
+            <a:schemeClr val="accent1"/>
+          </a:fillRef>
+          <a:effectRef idx="2">
+            <a:schemeClr val="accent1"/>
+          </a:effectRef>
+          <a:fontRef idx="minor">
+            <a:schemeClr val="lt1"/>
+          </a:fontRef>
+        </p:style>
+        <p:txBody>
+          <a:bodyPr rtlCol="0" anchor="ctr"/>
+          <a:lstStyle/>
+          <a:p>
+            <a:pPr algn="ctr"/>
+          </a:p>
+        </p:txBody>
+      </p:sp>
+      <p:sp>
+        <p:nvSpPr>
+          <p:cNvPr id="3" name="TextBox 2"/>
+          <p:cNvSpPr txBox="1"/>
+          <p:nvPr/>
+        </p:nvSpPr>
+        <p:spPr>
+          <a:xfrm>
+            <a:off x="10607040" y="320040"/>
+            <a:ext cx="1371600" cy="365760"/>
+          </a:xfrm>
+          <a:prstGeom prst="rect">
+            <a:avLst/>
+          </a:prstGeom>
+          <a:noFill/>
+        </p:spPr>
+        <p:txBody>
+          <a:bodyPr wrap="square">
+            <a:spAutoFit/>
+          </a:bodyPr>
+          <a:lstStyle/>
+          <a:p>
+            <a:pPr algn="r"/>
+            <a:r>
+              <a:rPr sz="1000" b="1" i="0">
+                <a:solidFill>
+                  <a:srgbClr val="64748B"/>
+                </a:solidFill>
+                <a:latin typeface="Montserrat"/>
+              </a:rPr>
+              <a:t>015 / 016</a:t>
+            </a:r>
+          </a:p>
+        </p:txBody>
+      </p:sp>
+      <p:sp>
+        <p:nvSpPr>
+          <p:cNvPr id="4" name="TextBox 3"/>
+          <p:cNvSpPr txBox="1"/>
+          <p:nvPr/>
+        </p:nvSpPr>
+        <p:spPr>
+          <a:xfrm>
+            <a:off x="457200" y="6419088"/>
+            <a:ext cx="8229600" cy="365760"/>
+          </a:xfrm>
+          <a:prstGeom prst="rect">
+            <a:avLst/>
+          </a:prstGeom>
+          <a:noFill/>
+        </p:spPr>
+        <p:txBody>
+          <a:bodyPr wrap="square">
+            <a:spAutoFit/>
+          </a:bodyPr>
+          <a:lstStyle/>
+          <a:p>
+            <a:r>
+              <a:rPr sz="900" b="0" i="0">
+                <a:solidFill>
+                  <a:srgbClr val="64748B"/>
+                </a:solidFill>
+                <a:latin typeface="Montserrat"/>
+              </a:rPr>
+              <a:t>Curso Gas B · Tema 06 · Instaladores y empresas instaladoras</a:t>
+            </a:r>
+          </a:p>
+        </p:txBody>
+      </p:sp>
+      <p:sp>
+        <p:nvSpPr>
+          <p:cNvPr id="5" name="TextBox 4"/>
+          <p:cNvSpPr txBox="1"/>
+          <p:nvPr/>
+        </p:nvSpPr>
+        <p:spPr>
+          <a:xfrm>
+            <a:off x="822960" y="457200"/>
+            <a:ext cx="10058400" cy="365760"/>
+          </a:xfrm>
+          <a:prstGeom prst="rect">
+            <a:avLst/>
+          </a:prstGeom>
+          <a:noFill/>
+        </p:spPr>
+        <p:txBody>
+          <a:bodyPr wrap="square">
+            <a:spAutoFit/>
+          </a:bodyPr>
+          <a:lstStyle/>
+          <a:p>
+            <a:r>
+              <a:rPr sz="1300" b="1" i="0">
+                <a:solidFill>
+                  <a:srgbClr val="E8801A"/>
+                </a:solidFill>
+                <a:latin typeface="Montserrat"/>
+              </a:rPr>
+              <a:t>TRAMPA CLÁSICA</a:t>
+            </a:r>
+          </a:p>
+        </p:txBody>
+      </p:sp>
+      <p:sp>
+        <p:nvSpPr>
+          <p:cNvPr id="6" name="TextBox 5"/>
+          <p:cNvSpPr txBox="1"/>
+          <p:nvPr/>
+        </p:nvSpPr>
+        <p:spPr>
+          <a:xfrm>
+            <a:off x="822960" y="868680"/>
+            <a:ext cx="10515600" cy="914400"/>
+          </a:xfrm>
+          <a:prstGeom prst="rect">
+            <a:avLst/>
+          </a:prstGeom>
+          <a:noFill/>
+        </p:spPr>
+        <p:txBody>
+          <a:bodyPr wrap="square">
+            <a:spAutoFit/>
+          </a:bodyPr>
+          <a:lstStyle/>
+          <a:p>
+            <a:r>
+              <a:rPr sz="2800" b="1" i="0">
+                <a:solidFill>
+                  <a:srgbClr val="1E2761"/>
+                </a:solidFill>
+                <a:latin typeface="Montserrat"/>
+              </a:rPr>
+              <a:t>Tipos de aparato ≠ categorías</a:t>
+            </a:r>
+          </a:p>
+        </p:txBody>
+      </p:sp>
+      <p:sp>
+        <p:nvSpPr>
+          <p:cNvPr id="7" name="Rounded Rectangle 6"/>
+          <p:cNvSpPr/>
+          <p:nvPr/>
+        </p:nvSpPr>
+        <p:spPr>
+          <a:xfrm>
+            <a:off x="868680" y="1627632"/>
+            <a:ext cx="2011680" cy="73152"/>
+          </a:xfrm>
+          <a:prstGeom prst="roundRect">
+            <a:avLst/>
+          </a:prstGeom>
+          <a:solidFill>
+            <a:srgbClr val="E8801A"/>
+          </a:solidFill>
+          <a:ln>
+            <a:noFill/>
+          </a:ln>
+          <a:effectLst/>
+        </p:spPr>
+        <p:style>
+          <a:lnRef idx="1">
+            <a:schemeClr val="accent1"/>
+          </a:lnRef>
+          <a:fillRef idx="3">
+            <a:schemeClr val="accent1"/>
+          </a:fillRef>
+          <a:effectRef idx="2">
+            <a:schemeClr val="accent1"/>
+          </a:effectRef>
+          <a:fontRef idx="minor">
+            <a:schemeClr val="lt1"/>
+          </a:fontRef>
+        </p:style>
+        <p:txBody>
+          <a:bodyPr rtlCol="0" anchor="ctr"/>
+          <a:lstStyle/>
+          <a:p>
+            <a:pPr algn="ctr"/>
+          </a:p>
+        </p:txBody>
+      </p:sp>
+      <p:sp>
+        <p:nvSpPr>
+          <p:cNvPr id="8" name="TextBox 7"/>
+          <p:cNvSpPr txBox="1"/>
+          <p:nvPr/>
+        </p:nvSpPr>
+        <p:spPr>
+          <a:xfrm>
+            <a:off x="822960" y="1965960"/>
+            <a:ext cx="4983480" cy="4206240"/>
+          </a:xfrm>
+          <a:prstGeom prst="rect">
+            <a:avLst/>
+          </a:prstGeom>
+          <a:noFill/>
+        </p:spPr>
+        <p:txBody>
+          <a:bodyPr wrap="square">
+            <a:spAutoFit/>
+          </a:bodyPr>
+          <a:lstStyle/>
+          <a:p>
+            <a:pPr>
+              <a:spcAft>
+                <a:spcPts val="1100"/>
+              </a:spcAft>
+            </a:pPr>
+            <a:r>
+              <a:rPr sz="1600" b="1" i="0">
+                <a:solidFill>
+                  <a:srgbClr val="E8801A"/>
+                </a:solidFill>
+                <a:latin typeface="Montserrat"/>
+              </a:rPr>
+              <a:t>▸  </a:t>
+            </a:r>
+            <a:r>
+              <a:rPr sz="1600" b="0" i="0">
+                <a:solidFill>
+                  <a:srgbClr val="1B2330"/>
+                </a:solidFill>
+                <a:latin typeface="Montserrat"/>
+              </a:rPr>
+              <a:t>Tipo A: no conducido (humos al local)</a:t>
+            </a:r>
+          </a:p>
+          <a:p>
+            <a:pPr>
+              <a:spcAft>
+                <a:spcPts val="1100"/>
+              </a:spcAft>
+            </a:pPr>
+            <a:r>
+              <a:rPr sz="1600" b="1" i="0">
+                <a:solidFill>
+                  <a:srgbClr val="E8801A"/>
+                </a:solidFill>
+                <a:latin typeface="Montserrat"/>
+              </a:rPr>
+              <a:t>▸  </a:t>
+            </a:r>
+            <a:r>
+              <a:rPr sz="1600" b="0" i="0">
+                <a:solidFill>
+                  <a:srgbClr val="1B2330"/>
+                </a:solidFill>
+                <a:latin typeface="Montserrat"/>
+              </a:rPr>
+              <a:t>Tipo B: conducido, toma aire del local</a:t>
+            </a:r>
+          </a:p>
+          <a:p>
+            <a:pPr>
+              <a:spcAft>
+                <a:spcPts val="1100"/>
+              </a:spcAft>
+            </a:pPr>
+            <a:r>
+              <a:rPr sz="1600" b="1" i="0">
+                <a:solidFill>
+                  <a:srgbClr val="E8801A"/>
+                </a:solidFill>
+                <a:latin typeface="Montserrat"/>
+              </a:rPr>
+              <a:t>▸  </a:t>
+            </a:r>
+            <a:r>
+              <a:rPr sz="1600" b="0" i="0">
+                <a:solidFill>
+                  <a:srgbClr val="1B2330"/>
+                </a:solidFill>
+                <a:latin typeface="Montserrat"/>
+              </a:rPr>
+              <a:t>Tipo C: estanco, circuito con el exterior</a:t>
+            </a:r>
+          </a:p>
+          <a:p>
+            <a:pPr>
+              <a:spcAft>
+                <a:spcPts val="1100"/>
+              </a:spcAft>
+            </a:pPr>
+            <a:r>
+              <a:rPr sz="1600" b="1" i="0">
+                <a:solidFill>
+                  <a:srgbClr val="E8801A"/>
+                </a:solidFill>
+                <a:latin typeface="Montserrat"/>
+              </a:rPr>
+              <a:t>▸  </a:t>
+            </a:r>
+            <a:r>
+              <a:rPr sz="1600" b="0" i="0">
+                <a:solidFill>
+                  <a:srgbClr val="1B2330"/>
+                </a:solidFill>
+                <a:latin typeface="Montserrat"/>
+              </a:rPr>
+              <a:t>No son las categorías del instalador</a:t>
+            </a:r>
+          </a:p>
+        </p:txBody>
+      </p:sp>
+      <p:sp>
+        <p:nvSpPr>
+          <p:cNvPr id="9" name="imgph" descr="IMGQ:sealed balanced flue gas boiler on wall"/>
+          <p:cNvSpPr/>
+          <p:nvPr/>
+        </p:nvSpPr>
+        <p:spPr>
+          <a:xfrm>
+            <a:off x="5806440" y="1051560"/>
+            <a:ext cx="5298947" cy="4629150"/>
+          </a:xfrm>
+          <a:prstGeom prst="roundRect">
+            <a:avLst/>
+          </a:prstGeom>
+          <a:solidFill>
+            <a:srgbClr val="F3F6FB"/>
+          </a:solidFill>
+          <a:ln w="12700">
+            <a:solidFill>
+              <a:srgbClr val="C7D2E6"/>
+            </a:solidFill>
+          </a:ln>
+          <a:effectLst/>
+        </p:spPr>
+        <p:style>
+          <a:lnRef idx="1">
+            <a:schemeClr val="accent1"/>
+          </a:lnRef>
+          <a:fillRef idx="3">
+            <a:schemeClr val="accent1"/>
+          </a:fillRef>
+          <a:effectRef idx="2">
+            <a:schemeClr val="accent1"/>
+          </a:effectRef>
+          <a:fontRef idx="minor">
+            <a:schemeClr val="lt1"/>
+          </a:fontRef>
+        </p:style>
+        <p:txBody>
+          <a:bodyPr rtlCol="0" anchor="ctr"/>
+          <a:lstStyle/>
+          <a:p>
+            <a:pPr algn="ctr"/>
+          </a:p>
+        </p:txBody>
+      </p:sp>
+      <p:sp>
+        <p:nvSpPr>
+          <p:cNvPr id="10" name="TextBox 9"/>
+          <p:cNvSpPr txBox="1"/>
+          <p:nvPr/>
+        </p:nvSpPr>
+        <p:spPr>
+          <a:xfrm>
+            <a:off x="6080760" y="2726055"/>
+            <a:ext cx="4750307" cy="1280160"/>
+          </a:xfrm>
+          <a:prstGeom prst="rect">
+            <a:avLst/>
+          </a:prstGeom>
+          <a:noFill/>
+        </p:spPr>
+        <p:txBody>
+          <a:bodyPr wrap="square">
+            <a:spAutoFit/>
+          </a:bodyPr>
+          <a:lstStyle/>
+          <a:p>
+            <a:pPr algn="ctr"/>
+            <a:r>
+              <a:rPr sz="1400" b="1" i="0">
+                <a:solidFill>
+                  <a:srgbClr val="64748B"/>
+                </a:solidFill>
+                <a:latin typeface="Montserrat"/>
+              </a:rPr>
+              <a:t>IMAGEN REALISTA</a:t>
+            </a:r>
+          </a:p>
+          <a:p>
+            <a:pPr algn="ctr"/>
+            <a:r>
+              <a:rPr sz="1100" b="0" i="1">
+                <a:solidFill>
+                  <a:srgbClr val="64748B"/>
+                </a:solidFill>
+                <a:latin typeface="Montserrat"/>
+              </a:rPr>
+              <a:t>sealed balanced flue gas boiler on wall</a:t>
+            </a:r>
+          </a:p>
+        </p:txBody>
+      </p:sp>
+    </p:spTree>
+  </p:cSld>
+  <p:clrMapOvr>
+    <a:masterClrMapping/>
+  </p:clrMapOvr>
+</p:sld>
+</file>
+
+<file path=ppt/slides/slide16.xml><?xml version="1.0" encoding="utf-8"?>
+<p:sld xmlns:a="http://schemas.openxmlformats.org/drawingml/2006/main" xmlns:p="http://schemas.openxmlformats.org/presentationml/2006/main" xmlns:r="http://schemas.openxmlformats.org/officeDocument/2006/relationships">
+  <p:cSld>
+    <p:spTree>
+      <p:nvGrpSpPr>
+        <p:cNvPr id="1" name=""/>
+        <p:cNvGrpSpPr/>
+        <p:nvPr/>
+      </p:nvGrpSpPr>
+      <p:grpSpPr/>
+      <p:sp>
+        <p:nvSpPr>
+          <p:cNvPr id="2" name="Rectangle 1"/>
+          <p:cNvSpPr/>
+          <p:nvPr/>
+        </p:nvSpPr>
+        <p:spPr>
+          <a:xfrm>
+            <a:off x="0" y="0"/>
+            <a:ext cx="12191695" cy="6858000"/>
+          </a:xfrm>
+          <a:prstGeom prst="rect">
+            <a:avLst/>
+          </a:prstGeom>
+          <a:solidFill>
             <a:srgbClr val="1E2761"/>
           </a:solidFill>
           <a:ln>
@@ -6906,7 +7696,7 @@
             <a:r>
               <a:rPr sz="1400" b="1" i="0">
                 <a:solidFill>
-                  <a:srgbClr val="CADCFC"/>
+                  <a:srgbClr val="F4A24C"/>
                 </a:solidFill>
                 <a:latin typeface="Montserrat"/>
               </a:rPr>
@@ -6917,13 +7707,57 @@
       </p:sp>
       <p:sp>
         <p:nvSpPr>
-          <p:cNvPr id="4" name="TextBox 3"/>
+          <p:cNvPr id="4" name="Rounded Rectangle 3"/>
+          <p:cNvSpPr/>
+          <p:nvPr/>
+        </p:nvSpPr>
+        <p:spPr>
+          <a:xfrm>
+            <a:off x="868680" y="1051560"/>
+            <a:ext cx="1463040" cy="82296"/>
+          </a:xfrm>
+          <a:prstGeom prst="roundRect">
+            <a:avLst/>
+          </a:prstGeom>
+          <a:solidFill>
+            <a:srgbClr val="E8801A"/>
+          </a:solidFill>
+          <a:ln>
+            <a:noFill/>
+          </a:ln>
+          <a:effectLst/>
+        </p:spPr>
+        <p:style>
+          <a:lnRef idx="1">
+            <a:schemeClr val="accent1"/>
+          </a:lnRef>
+          <a:fillRef idx="3">
+            <a:schemeClr val="accent1"/>
+          </a:fillRef>
+          <a:effectRef idx="2">
+            <a:schemeClr val="accent1"/>
+          </a:effectRef>
+          <a:fontRef idx="minor">
+            <a:schemeClr val="lt1"/>
+          </a:fontRef>
+        </p:style>
+        <p:txBody>
+          <a:bodyPr rtlCol="0" anchor="ctr"/>
+          <a:lstStyle/>
+          <a:p>
+            <a:pPr algn="ctr"/>
+          </a:p>
+        </p:txBody>
+      </p:sp>
+      <p:sp>
+        <p:nvSpPr>
+          <p:cNvPr id="5" name="TextBox 4"/>
           <p:cNvSpPr txBox="1"/>
           <p:nvPr/>
         </p:nvSpPr>
         <p:spPr>
           <a:xfrm>
-            <a:off x="822960" y="1143000"/>
+            <a:off x="822960" y="1234440"/>
             <a:ext cx="10515600" cy="1097280"/>
           </a:xfrm>
           <a:prstGeom prst="rect">
@@ -6951,14 +7785,14 @@
       </p:sp>
       <p:sp>
         <p:nvSpPr>
-          <p:cNvPr id="5" name="TextBox 4"/>
+          <p:cNvPr id="6" name="TextBox 5"/>
           <p:cNvSpPr txBox="1"/>
           <p:nvPr/>
         </p:nvSpPr>
         <p:spPr>
           <a:xfrm>
-            <a:off x="822960" y="2514600"/>
-            <a:ext cx="10515600" cy="2834640"/>
+            <a:off x="822960" y="2606040"/>
+            <a:ext cx="10515600" cy="2743200"/>
           </a:xfrm>
           <a:prstGeom prst="rect">
             <a:avLst/>
@@ -6979,7 +7813,7 @@
             <a:r>
               <a:rPr sz="2000" b="1" i="0">
                 <a:solidFill>
-                  <a:srgbClr val="CADCFC"/>
+                  <a:srgbClr val="F4A24C"/>
                 </a:solidFill>
                 <a:latin typeface="Montserrat"/>
               </a:rPr>
@@ -7004,7 +7838,7 @@
             <a:r>
               <a:rPr sz="2000" b="1" i="0">
                 <a:solidFill>
-                  <a:srgbClr val="CADCFC"/>
+                  <a:srgbClr val="F4A24C"/>
                 </a:solidFill>
                 <a:latin typeface="Montserrat"/>
               </a:rPr>
@@ -7029,7 +7863,7 @@
             <a:r>
               <a:rPr sz="2000" b="1" i="0">
                 <a:solidFill>
-                  <a:srgbClr val="CADCFC"/>
+                  <a:srgbClr val="F4A24C"/>
                 </a:solidFill>
                 <a:latin typeface="Montserrat"/>
               </a:rPr>
@@ -7054,7 +7888,7 @@
             <a:r>
               <a:rPr sz="2000" b="1" i="0">
                 <a:solidFill>
-                  <a:srgbClr val="CADCFC"/>
+                  <a:srgbClr val="F4A24C"/>
                 </a:solidFill>
                 <a:latin typeface="Montserrat"/>
               </a:rPr>
@@ -7074,20 +7908,20 @@
       </p:sp>
       <p:sp>
         <p:nvSpPr>
-          <p:cNvPr id="6" name="Rounded Rectangle 5"/>
+          <p:cNvPr id="7" name="Rounded Rectangle 6"/>
           <p:cNvSpPr/>
           <p:nvPr/>
         </p:nvSpPr>
         <p:spPr>
           <a:xfrm>
             <a:off x="822960" y="5532120"/>
-            <a:ext cx="10515600" cy="777240"/>
+            <a:ext cx="10515600" cy="822960"/>
           </a:xfrm>
           <a:prstGeom prst="roundRect">
             <a:avLst/>
           </a:prstGeom>
           <a:solidFill>
-            <a:srgbClr val="2E3A80"/>
+            <a:srgbClr val="E8801A"/>
           </a:solidFill>
           <a:ln>
             <a:noFill/>
@@ -7118,13 +7952,13 @@
       </p:sp>
       <p:sp>
         <p:nvSpPr>
-          <p:cNvPr id="7" name="TextBox 6"/>
+          <p:cNvPr id="8" name="TextBox 7"/>
           <p:cNvSpPr txBox="1"/>
           <p:nvPr/>
         </p:nvSpPr>
         <p:spPr>
           <a:xfrm>
-            <a:off x="1051560" y="5605272"/>
+            <a:off x="1051560" y="5623560"/>
             <a:ext cx="10058400" cy="640080"/>
           </a:xfrm>
           <a:prstGeom prst="rect">
@@ -7141,7 +7975,7 @@
             <a:r>
               <a:rPr sz="1500" b="1" i="1">
                 <a:solidFill>
-                  <a:srgbClr val="CADCFC"/>
+                  <a:srgbClr val="1E2761"/>
                 </a:solidFill>
                 <a:latin typeface="Montserrat"/>
               </a:rPr>
@@ -7242,7 +8076,7 @@
                 </a:solidFill>
                 <a:latin typeface="Montserrat"/>
               </a:rPr>
-              <a:t>002 / 015</a:t>
+              <a:t>002 / 016</a:t>
             </a:r>
           </a:p>
         </p:txBody>
@@ -7306,7 +8140,7 @@
             <a:r>
               <a:rPr sz="2700" b="1" i="0">
                 <a:solidFill>
-                  <a:srgbClr val="1E2761"/>
+                  <a:srgbClr val="E8801A"/>
                 </a:solidFill>
                 <a:latin typeface="Montserrat"/>
               </a:rPr>
@@ -7318,6 +8152,50 @@
       <p:sp>
         <p:nvSpPr>
           <p:cNvPr id="6" name="Rounded Rectangle 5"/>
+          <p:cNvSpPr/>
+          <p:nvPr/>
+        </p:nvSpPr>
+        <p:spPr>
+          <a:xfrm>
+            <a:off x="868680" y="1234440"/>
+            <a:ext cx="1463040" cy="73152"/>
+          </a:xfrm>
+          <a:prstGeom prst="roundRect">
+            <a:avLst/>
+          </a:prstGeom>
+          <a:solidFill>
+            <a:srgbClr val="1E2761"/>
+          </a:solidFill>
+          <a:ln>
+            <a:noFill/>
+          </a:ln>
+          <a:effectLst/>
+        </p:spPr>
+        <p:style>
+          <a:lnRef idx="1">
+            <a:schemeClr val="accent1"/>
+          </a:lnRef>
+          <a:fillRef idx="3">
+            <a:schemeClr val="accent1"/>
+          </a:fillRef>
+          <a:effectRef idx="2">
+            <a:schemeClr val="accent1"/>
+          </a:effectRef>
+          <a:fontRef idx="minor">
+            <a:schemeClr val="lt1"/>
+          </a:fontRef>
+        </p:style>
+        <p:txBody>
+          <a:bodyPr rtlCol="0" anchor="ctr"/>
+          <a:lstStyle/>
+          <a:p>
+            <a:pPr algn="ctr"/>
+          </a:p>
+        </p:txBody>
+      </p:sp>
+      <p:sp>
+        <p:nvSpPr>
+          <p:cNvPr id="7" name="Rounded Rectangle 6"/>
           <p:cNvSpPr/>
           <p:nvPr/>
         </p:nvSpPr>
@@ -7363,7 +8241,7 @@
       </p:sp>
       <p:sp>
         <p:nvSpPr>
-          <p:cNvPr id="7" name="TextBox 6"/>
+          <p:cNvPr id="8" name="TextBox 7"/>
           <p:cNvSpPr txBox="1"/>
           <p:nvPr/>
         </p:nvSpPr>
@@ -7398,7 +8276,7 @@
       </p:sp>
       <p:sp>
         <p:nvSpPr>
-          <p:cNvPr id="8" name="TextBox 7"/>
+          <p:cNvPr id="9" name="TextBox 8"/>
           <p:cNvSpPr txBox="1"/>
           <p:nvPr/>
         </p:nvSpPr>
@@ -7433,7 +8311,7 @@
       </p:sp>
       <p:sp>
         <p:nvSpPr>
-          <p:cNvPr id="9" name="Rounded Rectangle 8"/>
+          <p:cNvPr id="10" name="Rounded Rectangle 9"/>
           <p:cNvSpPr/>
           <p:nvPr/>
         </p:nvSpPr>
@@ -7479,7 +8357,7 @@
       </p:sp>
       <p:sp>
         <p:nvSpPr>
-          <p:cNvPr id="10" name="TextBox 9"/>
+          <p:cNvPr id="11" name="TextBox 10"/>
           <p:cNvSpPr txBox="1"/>
           <p:nvPr/>
         </p:nvSpPr>
@@ -7514,7 +8392,7 @@
       </p:sp>
       <p:sp>
         <p:nvSpPr>
-          <p:cNvPr id="11" name="TextBox 10"/>
+          <p:cNvPr id="12" name="TextBox 11"/>
           <p:cNvSpPr txBox="1"/>
           <p:nvPr/>
         </p:nvSpPr>
@@ -7549,7 +8427,7 @@
       </p:sp>
       <p:sp>
         <p:nvSpPr>
-          <p:cNvPr id="12" name="Rounded Rectangle 11"/>
+          <p:cNvPr id="13" name="Rounded Rectangle 12"/>
           <p:cNvSpPr/>
           <p:nvPr/>
         </p:nvSpPr>
@@ -7595,7 +8473,7 @@
       </p:sp>
       <p:sp>
         <p:nvSpPr>
-          <p:cNvPr id="13" name="TextBox 12"/>
+          <p:cNvPr id="14" name="TextBox 13"/>
           <p:cNvSpPr txBox="1"/>
           <p:nvPr/>
         </p:nvSpPr>
@@ -7630,7 +8508,7 @@
       </p:sp>
       <p:sp>
         <p:nvSpPr>
-          <p:cNvPr id="14" name="TextBox 13"/>
+          <p:cNvPr id="15" name="TextBox 14"/>
           <p:cNvSpPr txBox="1"/>
           <p:nvPr/>
         </p:nvSpPr>
@@ -7755,7 +8633,7 @@
                 </a:solidFill>
                 <a:latin typeface="Montserrat"/>
               </a:rPr>
-              <a:t>003 / 015</a:t>
+              <a:t>003 / 016</a:t>
             </a:r>
           </a:p>
         </p:txBody>
@@ -7802,7 +8680,7 @@
         </p:nvSpPr>
         <p:spPr>
           <a:xfrm>
-            <a:off x="822960" y="457200"/>
+            <a:off x="822960" y="502920"/>
             <a:ext cx="8229600" cy="365760"/>
           </a:xfrm>
           <a:prstGeom prst="rect">
@@ -7817,13 +8695,13 @@
           <a:lstStyle/>
           <a:p>
             <a:r>
-              <a:rPr sz="1200" b="1" i="0">
-                <a:solidFill>
-                  <a:srgbClr val="64748B"/>
-                </a:solidFill>
-                <a:latin typeface="Montserrat"/>
-              </a:rPr>
-              <a:t>LOS DOS ANEXOS</a:t>
+              <a:rPr sz="1300" b="1" i="0">
+                <a:solidFill>
+                  <a:srgbClr val="E8801A"/>
+                </a:solidFill>
+                <a:latin typeface="Montserrat"/>
+              </a:rPr>
+              <a:t>PARTES DE ESTE VÍDEO</a:t>
             </a:r>
           </a:p>
         </p:txBody>
@@ -7836,7 +8714,7 @@
         </p:nvSpPr>
         <p:spPr>
           <a:xfrm>
-            <a:off x="822960" y="868680"/>
+            <a:off x="822960" y="914400"/>
             <a:ext cx="10515600" cy="914400"/>
           </a:xfrm>
           <a:prstGeom prst="rect">
@@ -7857,155 +8735,30 @@
                 </a:solidFill>
                 <a:latin typeface="Montserrat"/>
               </a:rPr>
-              <a:t>Para qué sirve cada anexo</a:t>
-            </a:r>
-          </a:p>
-        </p:txBody>
-      </p:sp>
-      <p:sp>
-        <p:nvSpPr>
-          <p:cNvPr id="7" name="TextBox 6"/>
-          <p:cNvSpPr txBox="1"/>
-          <p:nvPr/>
-        </p:nvSpPr>
-        <p:spPr>
-          <a:xfrm>
-            <a:off x="822960" y="1920240"/>
-            <a:ext cx="4983480" cy="4206240"/>
-          </a:xfrm>
-          <a:prstGeom prst="rect">
-            <a:avLst/>
-          </a:prstGeom>
-          <a:noFill/>
-        </p:spPr>
-        <p:txBody>
-          <a:bodyPr wrap="square">
-            <a:spAutoFit/>
-          </a:bodyPr>
-          <a:lstStyle/>
-          <a:p>
-            <a:pPr>
-              <a:spcAft>
-                <a:spcPts val="1000"/>
-              </a:spcAft>
-            </a:pPr>
-            <a:r>
-              <a:rPr sz="1600" b="1" i="0">
-                <a:solidFill>
-                  <a:srgbClr val="2E3A80"/>
-                </a:solidFill>
-                <a:latin typeface="Montserrat"/>
-              </a:rPr>
-              <a:t>•  </a:t>
-            </a:r>
-            <a:r>
-              <a:rPr sz="1600" b="0" i="0">
-                <a:solidFill>
-                  <a:srgbClr val="1B2330"/>
-                </a:solidFill>
-                <a:latin typeface="Montserrat"/>
-              </a:rPr>
-              <a:t>Anexo 1: conocimientos mínimos por categoría</a:t>
-            </a:r>
-          </a:p>
-          <a:p>
-            <a:pPr>
-              <a:spcAft>
-                <a:spcPts val="1000"/>
-              </a:spcAft>
-            </a:pPr>
-            <a:r>
-              <a:rPr sz="1600" b="1" i="0">
-                <a:solidFill>
-                  <a:srgbClr val="2E3A80"/>
-                </a:solidFill>
-                <a:latin typeface="Montserrat"/>
-              </a:rPr>
-              <a:t>•  </a:t>
-            </a:r>
-            <a:r>
-              <a:rPr sz="1600" b="0" i="0">
-                <a:solidFill>
-                  <a:srgbClr val="1B2330"/>
-                </a:solidFill>
-                <a:latin typeface="Montserrat"/>
-              </a:rPr>
-              <a:t>Es la referencia del examen</a:t>
-            </a:r>
-          </a:p>
-          <a:p>
-            <a:pPr>
-              <a:spcAft>
-                <a:spcPts val="1000"/>
-              </a:spcAft>
-            </a:pPr>
-            <a:r>
-              <a:rPr sz="1600" b="1" i="0">
-                <a:solidFill>
-                  <a:srgbClr val="2E3A80"/>
-                </a:solidFill>
-                <a:latin typeface="Montserrat"/>
-              </a:rPr>
-              <a:t>•  </a:t>
-            </a:r>
-            <a:r>
-              <a:rPr sz="1600" b="0" i="0">
-                <a:solidFill>
-                  <a:srgbClr val="1B2330"/>
-                </a:solidFill>
-                <a:latin typeface="Montserrat"/>
-              </a:rPr>
-              <a:t>Anexo 2: conocimientos expertos de aparatos</a:t>
-            </a:r>
-          </a:p>
-          <a:p>
-            <a:pPr>
-              <a:spcAft>
-                <a:spcPts val="1000"/>
-              </a:spcAft>
-            </a:pPr>
-            <a:r>
-              <a:rPr sz="1600" b="1" i="0">
-                <a:solidFill>
-                  <a:srgbClr val="2E3A80"/>
-                </a:solidFill>
-                <a:latin typeface="Montserrat"/>
-              </a:rPr>
-              <a:t>•  </a:t>
-            </a:r>
-            <a:r>
-              <a:rPr sz="1600" b="0" i="0">
-                <a:solidFill>
-                  <a:srgbClr val="1B2330"/>
-                </a:solidFill>
-                <a:latin typeface="Montserrat"/>
-              </a:rPr>
-              <a:t>Para los casos gordos</a:t>
-            </a:r>
-          </a:p>
-        </p:txBody>
-      </p:sp>
-      <p:sp>
-        <p:nvSpPr>
-          <p:cNvPr id="8" name="imgph" descr="IMGQ:open technical manual book pages"/>
+              <a:t>En este vídeo</a:t>
+            </a:r>
+          </a:p>
+        </p:txBody>
+      </p:sp>
+      <p:sp>
+        <p:nvSpPr>
+          <p:cNvPr id="7" name="Rounded Rectangle 6"/>
           <p:cNvSpPr/>
           <p:nvPr/>
         </p:nvSpPr>
         <p:spPr>
           <a:xfrm>
-            <a:off x="5806440" y="1051560"/>
-            <a:ext cx="5298947" cy="4629150"/>
+            <a:off x="868680" y="1673352"/>
+            <a:ext cx="2011680" cy="73152"/>
           </a:xfrm>
           <a:prstGeom prst="roundRect">
             <a:avLst/>
           </a:prstGeom>
           <a:solidFill>
-            <a:srgbClr val="F3F6FB"/>
+            <a:srgbClr val="E8801A"/>
           </a:solidFill>
-          <a:ln w="12700">
-            <a:solidFill>
-              <a:srgbClr val="C7D2E6"/>
-            </a:solidFill>
+          <a:ln>
+            <a:noFill/>
           </a:ln>
           <a:effectLst/>
         </p:spPr>
@@ -8033,14 +8786,14 @@
       </p:sp>
       <p:sp>
         <p:nvSpPr>
-          <p:cNvPr id="9" name="TextBox 8"/>
+          <p:cNvPr id="8" name="TextBox 7"/>
           <p:cNvSpPr txBox="1"/>
           <p:nvPr/>
         </p:nvSpPr>
         <p:spPr>
           <a:xfrm>
-            <a:off x="6080760" y="2726055"/>
-            <a:ext cx="4750307" cy="1280160"/>
+            <a:off x="822960" y="2103120"/>
+            <a:ext cx="10515600" cy="4023360"/>
           </a:xfrm>
           <a:prstGeom prst="rect">
             <a:avLst/>
@@ -8053,27 +8806,153 @@
           </a:bodyPr>
           <a:lstStyle/>
           <a:p>
-            <a:pPr algn="ctr"/>
-            <a:r>
-              <a:rPr sz="1400" b="1" i="0">
-                <a:solidFill>
-                  <a:srgbClr val="64748B"/>
-                </a:solidFill>
-                <a:latin typeface="Montserrat"/>
-              </a:rPr>
-              <a:t>IMAGEN REALISTA</a:t>
-            </a:r>
-          </a:p>
-          <a:p>
-            <a:pPr algn="ctr"/>
-            <a:r>
-              <a:rPr sz="1100" b="0" i="1">
-                <a:solidFill>
-                  <a:srgbClr val="64748B"/>
-                </a:solidFill>
-                <a:latin typeface="Montserrat"/>
-              </a:rPr>
-              <a:t>open technical manual book pages</a:t>
+            <a:pPr>
+              <a:spcAft>
+                <a:spcPts val="900"/>
+              </a:spcAft>
+            </a:pPr>
+            <a:r>
+              <a:rPr sz="1800" b="1" i="0">
+                <a:solidFill>
+                  <a:srgbClr val="E8801A"/>
+                </a:solidFill>
+                <a:latin typeface="Montserrat"/>
+              </a:rPr>
+              <a:t>01   </a:t>
+            </a:r>
+            <a:r>
+              <a:rPr sz="1700" b="0" i="0">
+                <a:solidFill>
+                  <a:srgbClr val="1B2330"/>
+                </a:solidFill>
+                <a:latin typeface="Montserrat"/>
+              </a:rPr>
+              <a:t>Los dos anexos</a:t>
+            </a:r>
+          </a:p>
+          <a:p>
+            <a:pPr>
+              <a:spcAft>
+                <a:spcPts val="900"/>
+              </a:spcAft>
+            </a:pPr>
+            <a:r>
+              <a:rPr sz="1800" b="1" i="0">
+                <a:solidFill>
+                  <a:srgbClr val="E8801A"/>
+                </a:solidFill>
+                <a:latin typeface="Montserrat"/>
+              </a:rPr>
+              <a:t>02   </a:t>
+            </a:r>
+            <a:r>
+              <a:rPr sz="1700" b="0" i="0">
+                <a:solidFill>
+                  <a:srgbClr val="1B2330"/>
+                </a:solidFill>
+                <a:latin typeface="Montserrat"/>
+              </a:rPr>
+              <a:t>La lógica del temario</a:t>
+            </a:r>
+          </a:p>
+          <a:p>
+            <a:pPr>
+              <a:spcAft>
+                <a:spcPts val="900"/>
+              </a:spcAft>
+            </a:pPr>
+            <a:r>
+              <a:rPr sz="1800" b="1" i="0">
+                <a:solidFill>
+                  <a:srgbClr val="E8801A"/>
+                </a:solidFill>
+                <a:latin typeface="Montserrat"/>
+              </a:rPr>
+              <a:t>03   </a:t>
+            </a:r>
+            <a:r>
+              <a:rPr sz="1700" b="0" i="0">
+                <a:solidFill>
+                  <a:srgbClr val="1B2330"/>
+                </a:solidFill>
+                <a:latin typeface="Montserrat"/>
+              </a:rPr>
+              <a:t>Anexo 1</a:t>
+            </a:r>
+          </a:p>
+          <a:p>
+            <a:pPr>
+              <a:spcAft>
+                <a:spcPts val="900"/>
+              </a:spcAft>
+            </a:pPr>
+            <a:r>
+              <a:rPr sz="1800" b="1" i="0">
+                <a:solidFill>
+                  <a:srgbClr val="E8801A"/>
+                </a:solidFill>
+                <a:latin typeface="Montserrat"/>
+              </a:rPr>
+              <a:t>04   </a:t>
+            </a:r>
+            <a:r>
+              <a:rPr sz="1700" b="0" i="0">
+                <a:solidFill>
+                  <a:srgbClr val="1B2330"/>
+                </a:solidFill>
+                <a:latin typeface="Montserrat"/>
+              </a:rPr>
+              <a:t>Normas de examen</a:t>
+            </a:r>
+          </a:p>
+          <a:p>
+            <a:pPr>
+              <a:spcAft>
+                <a:spcPts val="900"/>
+              </a:spcAft>
+            </a:pPr>
+            <a:r>
+              <a:rPr sz="1800" b="1" i="0">
+                <a:solidFill>
+                  <a:srgbClr val="E8801A"/>
+                </a:solidFill>
+                <a:latin typeface="Montserrat"/>
+              </a:rPr>
+              <a:t>05   </a:t>
+            </a:r>
+            <a:r>
+              <a:rPr sz="1700" b="0" i="0">
+                <a:solidFill>
+                  <a:srgbClr val="1B2330"/>
+                </a:solidFill>
+                <a:latin typeface="Montserrat"/>
+              </a:rPr>
+              <a:t>Anexo 2</a:t>
+            </a:r>
+          </a:p>
+          <a:p>
+            <a:pPr>
+              <a:spcAft>
+                <a:spcPts val="900"/>
+              </a:spcAft>
+            </a:pPr>
+            <a:r>
+              <a:rPr sz="1800" b="1" i="0">
+                <a:solidFill>
+                  <a:srgbClr val="E8801A"/>
+                </a:solidFill>
+                <a:latin typeface="Montserrat"/>
+              </a:rPr>
+              <a:t>06   </a:t>
+            </a:r>
+            <a:r>
+              <a:rPr sz="1700" b="0" i="0">
+                <a:solidFill>
+                  <a:srgbClr val="1B2330"/>
+                </a:solidFill>
+                <a:latin typeface="Montserrat"/>
+              </a:rPr>
+              <a:t>Trampa clásica</a:t>
             </a:r>
           </a:p>
         </p:txBody>
@@ -8170,7 +9049,7 @@
                 </a:solidFill>
                 <a:latin typeface="Montserrat"/>
               </a:rPr>
-              <a:t>004 / 015</a:t>
+              <a:t>004 / 016</a:t>
             </a:r>
           </a:p>
         </p:txBody>
@@ -8218,7 +9097,7 @@
         <p:spPr>
           <a:xfrm>
             <a:off x="822960" y="457200"/>
-            <a:ext cx="8229600" cy="365760"/>
+            <a:ext cx="10058400" cy="365760"/>
           </a:xfrm>
           <a:prstGeom prst="rect">
             <a:avLst/>
@@ -8232,13 +9111,13 @@
           <a:lstStyle/>
           <a:p>
             <a:r>
-              <a:rPr sz="1200" b="1" i="0">
-                <a:solidFill>
-                  <a:srgbClr val="64748B"/>
-                </a:solidFill>
-                <a:latin typeface="Montserrat"/>
-              </a:rPr>
-              <a:t>LA LÓGICA DEL TEMARIO</a:t>
+              <a:rPr sz="1300" b="1" i="0">
+                <a:solidFill>
+                  <a:srgbClr val="E8801A"/>
+                </a:solidFill>
+                <a:latin typeface="Montserrat"/>
+              </a:rPr>
+              <a:t>LOS DOS ANEXOS</a:t>
             </a:r>
           </a:p>
         </p:txBody>
@@ -8266,26 +9145,70 @@
           <a:lstStyle/>
           <a:p>
             <a:r>
-              <a:rPr sz="2700" b="1" i="0">
+              <a:rPr sz="2800" b="1" i="0">
                 <a:solidFill>
                   <a:srgbClr val="1E2761"/>
                 </a:solidFill>
                 <a:latin typeface="Montserrat"/>
               </a:rPr>
-              <a:t>Muñecas rusas: A incluye a B</a:t>
-            </a:r>
-          </a:p>
-        </p:txBody>
-      </p:sp>
-      <p:sp>
-        <p:nvSpPr>
-          <p:cNvPr id="7" name="TextBox 6"/>
+              <a:t>Para qué sirve cada anexo</a:t>
+            </a:r>
+          </a:p>
+        </p:txBody>
+      </p:sp>
+      <p:sp>
+        <p:nvSpPr>
+          <p:cNvPr id="7" name="Rounded Rectangle 6"/>
+          <p:cNvSpPr/>
+          <p:nvPr/>
+        </p:nvSpPr>
+        <p:spPr>
+          <a:xfrm>
+            <a:off x="868680" y="1627632"/>
+            <a:ext cx="2011680" cy="73152"/>
+          </a:xfrm>
+          <a:prstGeom prst="roundRect">
+            <a:avLst/>
+          </a:prstGeom>
+          <a:solidFill>
+            <a:srgbClr val="E8801A"/>
+          </a:solidFill>
+          <a:ln>
+            <a:noFill/>
+          </a:ln>
+          <a:effectLst/>
+        </p:spPr>
+        <p:style>
+          <a:lnRef idx="1">
+            <a:schemeClr val="accent1"/>
+          </a:lnRef>
+          <a:fillRef idx="3">
+            <a:schemeClr val="accent1"/>
+          </a:fillRef>
+          <a:effectRef idx="2">
+            <a:schemeClr val="accent1"/>
+          </a:effectRef>
+          <a:fontRef idx="minor">
+            <a:schemeClr val="lt1"/>
+          </a:fontRef>
+        </p:style>
+        <p:txBody>
+          <a:bodyPr rtlCol="0" anchor="ctr"/>
+          <a:lstStyle/>
+          <a:p>
+            <a:pPr algn="ctr"/>
+          </a:p>
+        </p:txBody>
+      </p:sp>
+      <p:sp>
+        <p:nvSpPr>
+          <p:cNvPr id="8" name="TextBox 7"/>
           <p:cNvSpPr txBox="1"/>
           <p:nvPr/>
         </p:nvSpPr>
         <p:spPr>
           <a:xfrm>
-            <a:off x="822960" y="1920240"/>
+            <a:off x="822960" y="1965960"/>
             <a:ext cx="4983480" cy="4206240"/>
           </a:xfrm>
           <a:prstGeom prst="rect">
@@ -8301,17 +9224,17 @@
           <a:p>
             <a:pPr>
               <a:spcAft>
-                <a:spcPts val="1000"/>
+                <a:spcPts val="1100"/>
               </a:spcAft>
             </a:pPr>
             <a:r>
               <a:rPr sz="1600" b="1" i="0">
                 <a:solidFill>
-                  <a:srgbClr val="2E3A80"/>
-                </a:solidFill>
-                <a:latin typeface="Montserrat"/>
-              </a:rPr>
-              <a:t>•  </a:t>
+                  <a:srgbClr val="E8801A"/>
+                </a:solidFill>
+                <a:latin typeface="Montserrat"/>
+              </a:rPr>
+              <a:t>▸  </a:t>
             </a:r>
             <a:r>
               <a:rPr sz="1600" b="0" i="0">
@@ -8320,23 +9243,23 @@
                 </a:solidFill>
                 <a:latin typeface="Montserrat"/>
               </a:rPr>
-              <a:t>A = temario de B + extras</a:t>
+              <a:t>Anexo 1: conocimientos mínimos por categoría</a:t>
             </a:r>
           </a:p>
           <a:p>
             <a:pPr>
               <a:spcAft>
-                <a:spcPts val="1000"/>
+                <a:spcPts val="1100"/>
               </a:spcAft>
             </a:pPr>
             <a:r>
               <a:rPr sz="1600" b="1" i="0">
                 <a:solidFill>
-                  <a:srgbClr val="2E3A80"/>
-                </a:solidFill>
-                <a:latin typeface="Montserrat"/>
-              </a:rPr>
-              <a:t>•  </a:t>
+                  <a:srgbClr val="E8801A"/>
+                </a:solidFill>
+                <a:latin typeface="Montserrat"/>
+              </a:rPr>
+              <a:t>▸  </a:t>
             </a:r>
             <a:r>
               <a:rPr sz="1600" b="0" i="0">
@@ -8345,23 +9268,23 @@
                 </a:solidFill>
                 <a:latin typeface="Montserrat"/>
               </a:rPr>
-              <a:t>B = A menos algunas cosas</a:t>
+              <a:t>Es la referencia del examen</a:t>
             </a:r>
           </a:p>
           <a:p>
             <a:pPr>
               <a:spcAft>
-                <a:spcPts val="1000"/>
+                <a:spcPts val="1100"/>
               </a:spcAft>
             </a:pPr>
             <a:r>
               <a:rPr sz="1600" b="1" i="0">
                 <a:solidFill>
-                  <a:srgbClr val="2E3A80"/>
-                </a:solidFill>
-                <a:latin typeface="Montserrat"/>
-              </a:rPr>
-              <a:t>•  </a:t>
+                  <a:srgbClr val="E8801A"/>
+                </a:solidFill>
+                <a:latin typeface="Montserrat"/>
+              </a:rPr>
+              <a:t>▸  </a:t>
             </a:r>
             <a:r>
               <a:rPr sz="1600" b="0" i="0">
@@ -8370,23 +9293,23 @@
                 </a:solidFill>
                 <a:latin typeface="Montserrat"/>
               </a:rPr>
-              <a:t>C = B menos otras tantas</a:t>
+              <a:t>Anexo 2: conocimientos expertos de aparatos</a:t>
             </a:r>
           </a:p>
           <a:p>
             <a:pPr>
               <a:spcAft>
-                <a:spcPts val="1000"/>
+                <a:spcPts val="1100"/>
               </a:spcAft>
             </a:pPr>
             <a:r>
               <a:rPr sz="1600" b="1" i="0">
                 <a:solidFill>
-                  <a:srgbClr val="2E3A80"/>
-                </a:solidFill>
-                <a:latin typeface="Montserrat"/>
-              </a:rPr>
-              <a:t>•  </a:t>
+                  <a:srgbClr val="E8801A"/>
+                </a:solidFill>
+                <a:latin typeface="Montserrat"/>
+              </a:rPr>
+              <a:t>▸  </a:t>
             </a:r>
             <a:r>
               <a:rPr sz="1600" b="0" i="0">
@@ -8395,14 +9318,14 @@
                 </a:solidFill>
                 <a:latin typeface="Montserrat"/>
               </a:rPr>
-              <a:t>Más categoría, más temario</a:t>
-            </a:r>
-          </a:p>
-        </p:txBody>
-      </p:sp>
-      <p:sp>
-        <p:nvSpPr>
-          <p:cNvPr id="8" name="imgph" descr="IMGQ:russian nesting dolls set"/>
+              <a:t>Para los casos gordos</a:t>
+            </a:r>
+          </a:p>
+        </p:txBody>
+      </p:sp>
+      <p:sp>
+        <p:nvSpPr>
+          <p:cNvPr id="9" name="imgph" descr="IMGQ:open technical manual book pages"/>
           <p:cNvSpPr/>
           <p:nvPr/>
         </p:nvSpPr>
@@ -8448,7 +9371,7 @@
       </p:sp>
       <p:sp>
         <p:nvSpPr>
-          <p:cNvPr id="9" name="TextBox 8"/>
+          <p:cNvPr id="10" name="TextBox 9"/>
           <p:cNvSpPr txBox="1"/>
           <p:nvPr/>
         </p:nvSpPr>
@@ -8488,7 +9411,7 @@
                 </a:solidFill>
                 <a:latin typeface="Montserrat"/>
               </a:rPr>
-              <a:t>russian nesting dolls set</a:t>
+              <a:t>open technical manual book pages</a:t>
             </a:r>
           </a:p>
         </p:txBody>
@@ -8585,7 +9508,7 @@
                 </a:solidFill>
                 <a:latin typeface="Montserrat"/>
               </a:rPr>
-              <a:t>005 / 015</a:t>
+              <a:t>005 / 016</a:t>
             </a:r>
           </a:p>
         </p:txBody>
@@ -8633,7 +9556,7 @@
         <p:spPr>
           <a:xfrm>
             <a:off x="822960" y="457200"/>
-            <a:ext cx="8229600" cy="365760"/>
+            <a:ext cx="10058400" cy="365760"/>
           </a:xfrm>
           <a:prstGeom prst="rect">
             <a:avLst/>
@@ -8647,13 +9570,13 @@
           <a:lstStyle/>
           <a:p>
             <a:r>
-              <a:rPr sz="1200" b="1" i="0">
-                <a:solidFill>
-                  <a:srgbClr val="64748B"/>
-                </a:solidFill>
-                <a:latin typeface="Montserrat"/>
-              </a:rPr>
-              <a:t>ANEXO 1 · CATEGORÍA A</a:t>
+              <a:rPr sz="1300" b="1" i="0">
+                <a:solidFill>
+                  <a:srgbClr val="E8801A"/>
+                </a:solidFill>
+                <a:latin typeface="Montserrat"/>
+              </a:rPr>
+              <a:t>LA LÓGICA DEL TEMARIO</a:t>
             </a:r>
           </a:p>
         </p:txBody>
@@ -8681,26 +9604,70 @@
           <a:lstStyle/>
           <a:p>
             <a:r>
-              <a:rPr sz="2700" b="1" i="0">
+              <a:rPr sz="2800" b="1" i="0">
                 <a:solidFill>
                   <a:srgbClr val="1E2761"/>
                 </a:solidFill>
                 <a:latin typeface="Montserrat"/>
               </a:rPr>
-              <a:t>Lo que añade la categoría A</a:t>
-            </a:r>
-          </a:p>
-        </p:txBody>
-      </p:sp>
-      <p:sp>
-        <p:nvSpPr>
-          <p:cNvPr id="7" name="TextBox 6"/>
+              <a:t>Muñecas rusas: A incluye a B</a:t>
+            </a:r>
+          </a:p>
+        </p:txBody>
+      </p:sp>
+      <p:sp>
+        <p:nvSpPr>
+          <p:cNvPr id="7" name="Rounded Rectangle 6"/>
+          <p:cNvSpPr/>
+          <p:nvPr/>
+        </p:nvSpPr>
+        <p:spPr>
+          <a:xfrm>
+            <a:off x="868680" y="1627632"/>
+            <a:ext cx="2011680" cy="73152"/>
+          </a:xfrm>
+          <a:prstGeom prst="roundRect">
+            <a:avLst/>
+          </a:prstGeom>
+          <a:solidFill>
+            <a:srgbClr val="E8801A"/>
+          </a:solidFill>
+          <a:ln>
+            <a:noFill/>
+          </a:ln>
+          <a:effectLst/>
+        </p:spPr>
+        <p:style>
+          <a:lnRef idx="1">
+            <a:schemeClr val="accent1"/>
+          </a:lnRef>
+          <a:fillRef idx="3">
+            <a:schemeClr val="accent1"/>
+          </a:fillRef>
+          <a:effectRef idx="2">
+            <a:schemeClr val="accent1"/>
+          </a:effectRef>
+          <a:fontRef idx="minor">
+            <a:schemeClr val="lt1"/>
+          </a:fontRef>
+        </p:style>
+        <p:txBody>
+          <a:bodyPr rtlCol="0" anchor="ctr"/>
+          <a:lstStyle/>
+          <a:p>
+            <a:pPr algn="ctr"/>
+          </a:p>
+        </p:txBody>
+      </p:sp>
+      <p:sp>
+        <p:nvSpPr>
+          <p:cNvPr id="8" name="TextBox 7"/>
           <p:cNvSpPr txBox="1"/>
           <p:nvPr/>
         </p:nvSpPr>
         <p:spPr>
           <a:xfrm>
-            <a:off x="822960" y="1920240"/>
+            <a:off x="822960" y="1965960"/>
             <a:ext cx="4983480" cy="4206240"/>
           </a:xfrm>
           <a:prstGeom prst="rect">
@@ -8716,17 +9683,17 @@
           <a:p>
             <a:pPr>
               <a:spcAft>
-                <a:spcPts val="1000"/>
+                <a:spcPts val="1100"/>
               </a:spcAft>
             </a:pPr>
             <a:r>
               <a:rPr sz="1600" b="1" i="0">
                 <a:solidFill>
-                  <a:srgbClr val="2E3A80"/>
-                </a:solidFill>
-                <a:latin typeface="Montserrat"/>
-              </a:rPr>
-              <a:t>•  </a:t>
+                  <a:srgbClr val="E8801A"/>
+                </a:solidFill>
+                <a:latin typeface="Montserrat"/>
+              </a:rPr>
+              <a:t>▸  </a:t>
             </a:r>
             <a:r>
               <a:rPr sz="1600" b="0" i="0">
@@ -8735,23 +9702,23 @@
                 </a:solidFill>
                 <a:latin typeface="Montserrat"/>
               </a:rPr>
-              <a:t>Polietileno y sus soldaduras</a:t>
+              <a:t>A = temario de B + extras</a:t>
             </a:r>
           </a:p>
           <a:p>
             <a:pPr>
               <a:spcAft>
-                <a:spcPts val="1000"/>
+                <a:spcPts val="1100"/>
               </a:spcAft>
             </a:pPr>
             <a:r>
               <a:rPr sz="1600" b="1" i="0">
                 <a:solidFill>
-                  <a:srgbClr val="2E3A80"/>
-                </a:solidFill>
-                <a:latin typeface="Montserrat"/>
-              </a:rPr>
-              <a:t>•  </a:t>
+                  <a:srgbClr val="E8801A"/>
+                </a:solidFill>
+                <a:latin typeface="Montserrat"/>
+              </a:rPr>
+              <a:t>▸  </a:t>
             </a:r>
             <a:r>
               <a:rPr sz="1600" b="0" i="0">
@@ -8760,23 +9727,23 @@
                 </a:solidFill>
                 <a:latin typeface="Montserrat"/>
               </a:rPr>
-              <a:t>Corrosión y protección catódica</a:t>
+              <a:t>B = A menos algunas cosas</a:t>
             </a:r>
           </a:p>
           <a:p>
             <a:pPr>
               <a:spcAft>
-                <a:spcPts val="1000"/>
+                <a:spcPts val="1100"/>
               </a:spcAft>
             </a:pPr>
             <a:r>
               <a:rPr sz="1600" b="1" i="0">
                 <a:solidFill>
-                  <a:srgbClr val="2E3A80"/>
-                </a:solidFill>
-                <a:latin typeface="Montserrat"/>
-              </a:rPr>
-              <a:t>•  </a:t>
+                  <a:srgbClr val="E8801A"/>
+                </a:solidFill>
+                <a:latin typeface="Montserrat"/>
+              </a:rPr>
+              <a:t>▸  </a:t>
             </a:r>
             <a:r>
               <a:rPr sz="1600" b="0" i="0">
@@ -8785,23 +9752,23 @@
                 </a:solidFill>
                 <a:latin typeface="Montserrat"/>
               </a:rPr>
-              <a:t>Depósitos fijos de GLP y zanjas</a:t>
+              <a:t>C = B menos otras tantas</a:t>
             </a:r>
           </a:p>
           <a:p>
             <a:pPr>
               <a:spcAft>
-                <a:spcPts val="1000"/>
+                <a:spcPts val="1100"/>
               </a:spcAft>
             </a:pPr>
             <a:r>
               <a:rPr sz="1600" b="1" i="0">
                 <a:solidFill>
-                  <a:srgbClr val="2E3A80"/>
-                </a:solidFill>
-                <a:latin typeface="Montserrat"/>
-              </a:rPr>
-              <a:t>•  </a:t>
+                  <a:srgbClr val="E8801A"/>
+                </a:solidFill>
+                <a:latin typeface="Montserrat"/>
+              </a:rPr>
+              <a:t>▸  </a:t>
             </a:r>
             <a:r>
               <a:rPr sz="1600" b="0" i="0">
@@ -8810,14 +9777,14 @@
                 </a:solidFill>
                 <a:latin typeface="Montserrat"/>
               </a:rPr>
-              <a:t>Todo lo enterrado y a granel</a:t>
-            </a:r>
-          </a:p>
-        </p:txBody>
-      </p:sp>
-      <p:sp>
-        <p:nvSpPr>
-          <p:cNvPr id="8" name="imgph" descr="IMGQ:underground gas pipeline installation trench"/>
+              <a:t>Más categoría, más temario</a:t>
+            </a:r>
+          </a:p>
+        </p:txBody>
+      </p:sp>
+      <p:sp>
+        <p:nvSpPr>
+          <p:cNvPr id="9" name="imgph" descr="IMGQ:russian nesting dolls set"/>
           <p:cNvSpPr/>
           <p:nvPr/>
         </p:nvSpPr>
@@ -8863,7 +9830,7 @@
       </p:sp>
       <p:sp>
         <p:nvSpPr>
-          <p:cNvPr id="9" name="TextBox 8"/>
+          <p:cNvPr id="10" name="TextBox 9"/>
           <p:cNvSpPr txBox="1"/>
           <p:nvPr/>
         </p:nvSpPr>
@@ -8903,7 +9870,7 @@
                 </a:solidFill>
                 <a:latin typeface="Montserrat"/>
               </a:rPr>
-              <a:t>underground gas pipeline installation trench</a:t>
+              <a:t>russian nesting dolls set</a:t>
             </a:r>
           </a:p>
         </p:txBody>
@@ -9000,7 +9967,7 @@
                 </a:solidFill>
                 <a:latin typeface="Montserrat"/>
               </a:rPr>
-              <a:t>006 / 015</a:t>
+              <a:t>006 / 016</a:t>
             </a:r>
           </a:p>
         </p:txBody>
@@ -9048,7 +10015,7 @@
         <p:spPr>
           <a:xfrm>
             <a:off x="822960" y="457200"/>
-            <a:ext cx="8229600" cy="365760"/>
+            <a:ext cx="10058400" cy="365760"/>
           </a:xfrm>
           <a:prstGeom prst="rect">
             <a:avLst/>
@@ -9062,13 +10029,13 @@
           <a:lstStyle/>
           <a:p>
             <a:r>
-              <a:rPr sz="1200" b="1" i="0">
-                <a:solidFill>
-                  <a:srgbClr val="64748B"/>
-                </a:solidFill>
-                <a:latin typeface="Montserrat"/>
-              </a:rPr>
-              <a:t>ANEXO 1 · REGLAMENTACIÓN A</a:t>
+              <a:rPr sz="1300" b="1" i="0">
+                <a:solidFill>
+                  <a:srgbClr val="E8801A"/>
+                </a:solidFill>
+                <a:latin typeface="Montserrat"/>
+              </a:rPr>
+              <a:t>ANEXO 1 · CATEGORÍA A</a:t>
             </a:r>
           </a:p>
         </p:txBody>
@@ -9096,26 +10063,70 @@
           <a:lstStyle/>
           <a:p>
             <a:r>
-              <a:rPr sz="2700" b="1" i="0">
+              <a:rPr sz="2800" b="1" i="0">
                 <a:solidFill>
                   <a:srgbClr val="1E2761"/>
                 </a:solidFill>
                 <a:latin typeface="Montserrat"/>
               </a:rPr>
-              <a:t>La reglamentación de la A</a:t>
-            </a:r>
-          </a:p>
-        </p:txBody>
-      </p:sp>
-      <p:sp>
-        <p:nvSpPr>
-          <p:cNvPr id="7" name="TextBox 6"/>
+              <a:t>Lo que añade la categoría A</a:t>
+            </a:r>
+          </a:p>
+        </p:txBody>
+      </p:sp>
+      <p:sp>
+        <p:nvSpPr>
+          <p:cNvPr id="7" name="Rounded Rectangle 6"/>
+          <p:cNvSpPr/>
+          <p:nvPr/>
+        </p:nvSpPr>
+        <p:spPr>
+          <a:xfrm>
+            <a:off x="868680" y="1627632"/>
+            <a:ext cx="2011680" cy="73152"/>
+          </a:xfrm>
+          <a:prstGeom prst="roundRect">
+            <a:avLst/>
+          </a:prstGeom>
+          <a:solidFill>
+            <a:srgbClr val="E8801A"/>
+          </a:solidFill>
+          <a:ln>
+            <a:noFill/>
+          </a:ln>
+          <a:effectLst/>
+        </p:spPr>
+        <p:style>
+          <a:lnRef idx="1">
+            <a:schemeClr val="accent1"/>
+          </a:lnRef>
+          <a:fillRef idx="3">
+            <a:schemeClr val="accent1"/>
+          </a:fillRef>
+          <a:effectRef idx="2">
+            <a:schemeClr val="accent1"/>
+          </a:effectRef>
+          <a:fontRef idx="minor">
+            <a:schemeClr val="lt1"/>
+          </a:fontRef>
+        </p:style>
+        <p:txBody>
+          <a:bodyPr rtlCol="0" anchor="ctr"/>
+          <a:lstStyle/>
+          <a:p>
+            <a:pPr algn="ctr"/>
+          </a:p>
+        </p:txBody>
+      </p:sp>
+      <p:sp>
+        <p:nvSpPr>
+          <p:cNvPr id="8" name="TextBox 7"/>
           <p:cNvSpPr txBox="1"/>
           <p:nvPr/>
         </p:nvSpPr>
         <p:spPr>
           <a:xfrm>
-            <a:off x="822960" y="1920240"/>
+            <a:off x="822960" y="1965960"/>
             <a:ext cx="4983480" cy="4206240"/>
           </a:xfrm>
           <a:prstGeom prst="rect">
@@ -9131,17 +10142,17 @@
           <a:p>
             <a:pPr>
               <a:spcAft>
-                <a:spcPts val="1000"/>
+                <a:spcPts val="1100"/>
               </a:spcAft>
             </a:pPr>
             <a:r>
               <a:rPr sz="1600" b="1" i="0">
                 <a:solidFill>
-                  <a:srgbClr val="2E3A80"/>
-                </a:solidFill>
-                <a:latin typeface="Montserrat"/>
-              </a:rPr>
-              <a:t>•  </a:t>
+                  <a:srgbClr val="E8801A"/>
+                </a:solidFill>
+                <a:latin typeface="Montserrat"/>
+              </a:rPr>
+              <a:t>▸  </a:t>
             </a:r>
             <a:r>
               <a:rPr sz="1600" b="0" i="0">
@@ -9150,23 +10161,23 @@
                 </a:solidFill>
                 <a:latin typeface="Montserrat"/>
               </a:rPr>
-              <a:t>Calidad y seguridad: AENOR y ENAC</a:t>
+              <a:t>Polietileno y sus soldaduras</a:t>
             </a:r>
           </a:p>
           <a:p>
             <a:pPr>
               <a:spcAft>
-                <a:spcPts val="1000"/>
+                <a:spcPts val="1100"/>
               </a:spcAft>
             </a:pPr>
             <a:r>
               <a:rPr sz="1600" b="1" i="0">
                 <a:solidFill>
-                  <a:srgbClr val="2E3A80"/>
-                </a:solidFill>
-                <a:latin typeface="Montserrat"/>
-              </a:rPr>
-              <a:t>•  </a:t>
+                  <a:srgbClr val="E8801A"/>
+                </a:solidFill>
+                <a:latin typeface="Montserrat"/>
+              </a:rPr>
+              <a:t>▸  </a:t>
             </a:r>
             <a:r>
               <a:rPr sz="1600" b="0" i="0">
@@ -9175,23 +10186,23 @@
                 </a:solidFill>
                 <a:latin typeface="Montserrat"/>
               </a:rPr>
-              <a:t>La ley del sector de hidrocarburos</a:t>
+              <a:t>Corrosión y protección catódica</a:t>
             </a:r>
           </a:p>
           <a:p>
             <a:pPr>
               <a:spcAft>
-                <a:spcPts val="1000"/>
+                <a:spcPts val="1100"/>
               </a:spcAft>
             </a:pPr>
             <a:r>
               <a:rPr sz="1600" b="1" i="0">
                 <a:solidFill>
-                  <a:srgbClr val="2E3A80"/>
-                </a:solidFill>
-                <a:latin typeface="Montserrat"/>
-              </a:rPr>
-              <a:t>•  </a:t>
+                  <a:srgbClr val="E8801A"/>
+                </a:solidFill>
+                <a:latin typeface="Montserrat"/>
+              </a:rPr>
+              <a:t>▸  </a:t>
             </a:r>
             <a:r>
               <a:rPr sz="1600" b="0" i="0">
@@ -9200,23 +10211,23 @@
                 </a:solidFill>
                 <a:latin typeface="Montserrat"/>
               </a:rPr>
-              <a:t>El Reglamento y todas sus ITC</a:t>
+              <a:t>Depósitos fijos de GLP y zanjas</a:t>
             </a:r>
           </a:p>
           <a:p>
             <a:pPr>
               <a:spcAft>
-                <a:spcPts val="1000"/>
+                <a:spcPts val="1100"/>
               </a:spcAft>
             </a:pPr>
             <a:r>
               <a:rPr sz="1600" b="1" i="0">
                 <a:solidFill>
-                  <a:srgbClr val="2E3A80"/>
-                </a:solidFill>
-                <a:latin typeface="Montserrat"/>
-              </a:rPr>
-              <a:t>•  </a:t>
+                  <a:srgbClr val="E8801A"/>
+                </a:solidFill>
+                <a:latin typeface="Montserrat"/>
+              </a:rPr>
+              <a:t>▸  </a:t>
             </a:r>
             <a:r>
               <a:rPr sz="1600" b="0" i="0">
@@ -9225,14 +10236,14 @@
                 </a:solidFill>
                 <a:latin typeface="Montserrat"/>
               </a:rPr>
-              <a:t>Normas UNE 60670 y 60601</a:t>
-            </a:r>
-          </a:p>
-        </p:txBody>
-      </p:sp>
-      <p:sp>
-        <p:nvSpPr>
-          <p:cNvPr id="8" name="imgph" descr="IMGQ:shelf full of legal regulation books"/>
+              <a:t>Todo lo enterrado y a granel</a:t>
+            </a:r>
+          </a:p>
+        </p:txBody>
+      </p:sp>
+      <p:sp>
+        <p:nvSpPr>
+          <p:cNvPr id="9" name="imgph" descr="IMGQ:underground gas pipeline installation trench"/>
           <p:cNvSpPr/>
           <p:nvPr/>
         </p:nvSpPr>
@@ -9278,7 +10289,7 @@
       </p:sp>
       <p:sp>
         <p:nvSpPr>
-          <p:cNvPr id="9" name="TextBox 8"/>
+          <p:cNvPr id="10" name="TextBox 9"/>
           <p:cNvSpPr txBox="1"/>
           <p:nvPr/>
         </p:nvSpPr>
@@ -9318,7 +10329,7 @@
                 </a:solidFill>
                 <a:latin typeface="Montserrat"/>
               </a:rPr>
-              <a:t>shelf full of legal regulation books</a:t>
+              <a:t>underground gas pipeline installation trench</a:t>
             </a:r>
           </a:p>
         </p:txBody>
@@ -9415,7 +10426,7 @@
                 </a:solidFill>
                 <a:latin typeface="Montserrat"/>
               </a:rPr>
-              <a:t>007 / 015</a:t>
+              <a:t>007 / 016</a:t>
             </a:r>
           </a:p>
         </p:txBody>
@@ -9463,7 +10474,7 @@
         <p:spPr>
           <a:xfrm>
             <a:off x="822960" y="457200"/>
-            <a:ext cx="8229600" cy="365760"/>
+            <a:ext cx="10058400" cy="365760"/>
           </a:xfrm>
           <a:prstGeom prst="rect">
             <a:avLst/>
@@ -9477,13 +10488,13 @@
           <a:lstStyle/>
           <a:p>
             <a:r>
-              <a:rPr sz="1200" b="1" i="0">
-                <a:solidFill>
-                  <a:srgbClr val="64748B"/>
-                </a:solidFill>
-                <a:latin typeface="Montserrat"/>
-              </a:rPr>
-              <a:t>ANEXO 1 · CATEGORÍA B</a:t>
+              <a:rPr sz="1300" b="1" i="0">
+                <a:solidFill>
+                  <a:srgbClr val="E8801A"/>
+                </a:solidFill>
+                <a:latin typeface="Montserrat"/>
+              </a:rPr>
+              <a:t>ANEXO 1 · REGLAMENTACIÓN A</a:t>
             </a:r>
           </a:p>
         </p:txBody>
@@ -9511,26 +10522,70 @@
           <a:lstStyle/>
           <a:p>
             <a:r>
-              <a:rPr sz="2700" b="1" i="0">
+              <a:rPr sz="2800" b="1" i="0">
                 <a:solidFill>
                   <a:srgbClr val="1E2761"/>
                 </a:solidFill>
                 <a:latin typeface="Montserrat"/>
               </a:rPr>
-              <a:t>El grueso del temario es la B</a:t>
-            </a:r>
-          </a:p>
-        </p:txBody>
-      </p:sp>
-      <p:sp>
-        <p:nvSpPr>
-          <p:cNvPr id="7" name="TextBox 6"/>
+              <a:t>La reglamentación de la A</a:t>
+            </a:r>
+          </a:p>
+        </p:txBody>
+      </p:sp>
+      <p:sp>
+        <p:nvSpPr>
+          <p:cNvPr id="7" name="Rounded Rectangle 6"/>
+          <p:cNvSpPr/>
+          <p:nvPr/>
+        </p:nvSpPr>
+        <p:spPr>
+          <a:xfrm>
+            <a:off x="868680" y="1627632"/>
+            <a:ext cx="2011680" cy="73152"/>
+          </a:xfrm>
+          <a:prstGeom prst="roundRect">
+            <a:avLst/>
+          </a:prstGeom>
+          <a:solidFill>
+            <a:srgbClr val="E8801A"/>
+          </a:solidFill>
+          <a:ln>
+            <a:noFill/>
+          </a:ln>
+          <a:effectLst/>
+        </p:spPr>
+        <p:style>
+          <a:lnRef idx="1">
+            <a:schemeClr val="accent1"/>
+          </a:lnRef>
+          <a:fillRef idx="3">
+            <a:schemeClr val="accent1"/>
+          </a:fillRef>
+          <a:effectRef idx="2">
+            <a:schemeClr val="accent1"/>
+          </a:effectRef>
+          <a:fontRef idx="minor">
+            <a:schemeClr val="lt1"/>
+          </a:fontRef>
+        </p:style>
+        <p:txBody>
+          <a:bodyPr rtlCol="0" anchor="ctr"/>
+          <a:lstStyle/>
+          <a:p>
+            <a:pPr algn="ctr"/>
+          </a:p>
+        </p:txBody>
+      </p:sp>
+      <p:sp>
+        <p:nvSpPr>
+          <p:cNvPr id="8" name="TextBox 7"/>
           <p:cNvSpPr txBox="1"/>
           <p:nvPr/>
         </p:nvSpPr>
         <p:spPr>
           <a:xfrm>
-            <a:off x="822960" y="1920240"/>
+            <a:off x="822960" y="1965960"/>
             <a:ext cx="4983480" cy="4206240"/>
           </a:xfrm>
           <a:prstGeom prst="rect">
@@ -9546,17 +10601,17 @@
           <a:p>
             <a:pPr>
               <a:spcAft>
-                <a:spcPts val="1000"/>
+                <a:spcPts val="1100"/>
               </a:spcAft>
             </a:pPr>
             <a:r>
               <a:rPr sz="1600" b="1" i="0">
                 <a:solidFill>
-                  <a:srgbClr val="2E3A80"/>
-                </a:solidFill>
-                <a:latin typeface="Montserrat"/>
-              </a:rPr>
-              <a:t>•  </a:t>
+                  <a:srgbClr val="E8801A"/>
+                </a:solidFill>
+                <a:latin typeface="Montserrat"/>
+              </a:rPr>
+              <a:t>▸  </a:t>
             </a:r>
             <a:r>
               <a:rPr sz="1600" b="0" i="0">
@@ -9565,23 +10620,23 @@
                 </a:solidFill>
                 <a:latin typeface="Montserrat"/>
               </a:rPr>
-              <a:t>Matemáticas, física y química de base</a:t>
+              <a:t>Calidad y seguridad: AENOR y ENAC</a:t>
             </a:r>
           </a:p>
           <a:p>
             <a:pPr>
               <a:spcAft>
-                <a:spcPts val="1000"/>
+                <a:spcPts val="1100"/>
               </a:spcAft>
             </a:pPr>
             <a:r>
               <a:rPr sz="1600" b="1" i="0">
                 <a:solidFill>
-                  <a:srgbClr val="2E3A80"/>
-                </a:solidFill>
-                <a:latin typeface="Montserrat"/>
-              </a:rPr>
-              <a:t>•  </a:t>
+                  <a:srgbClr val="E8801A"/>
+                </a:solidFill>
+                <a:latin typeface="Montserrat"/>
+              </a:rPr>
+              <a:t>▸  </a:t>
             </a:r>
             <a:r>
               <a:rPr sz="1600" b="0" i="0">
@@ -9590,23 +10645,23 @@
                 </a:solidFill>
                 <a:latin typeface="Montserrat"/>
               </a:rPr>
-              <a:t>Materiales, uniones y soldaduras</a:t>
+              <a:t>La ley del sector de hidrocarburos</a:t>
             </a:r>
           </a:p>
           <a:p>
             <a:pPr>
               <a:spcAft>
-                <a:spcPts val="1000"/>
+                <a:spcPts val="1100"/>
               </a:spcAft>
             </a:pPr>
             <a:r>
               <a:rPr sz="1600" b="1" i="0">
                 <a:solidFill>
-                  <a:srgbClr val="2E3A80"/>
-                </a:solidFill>
-                <a:latin typeface="Montserrat"/>
-              </a:rPr>
-              <a:t>•  </a:t>
+                  <a:srgbClr val="E8801A"/>
+                </a:solidFill>
+                <a:latin typeface="Montserrat"/>
+              </a:rPr>
+              <a:t>▸  </a:t>
             </a:r>
             <a:r>
               <a:rPr sz="1600" b="0" i="0">
@@ -9615,23 +10670,23 @@
                 </a:solidFill>
                 <a:latin typeface="Montserrat"/>
               </a:rPr>
-              <a:t>Quemadores, seguridad y encendido</a:t>
+              <a:t>El Reglamento y todas sus ITC</a:t>
             </a:r>
           </a:p>
           <a:p>
             <a:pPr>
               <a:spcAft>
-                <a:spcPts val="1000"/>
+                <a:spcPts val="1100"/>
               </a:spcAft>
             </a:pPr>
             <a:r>
               <a:rPr sz="1600" b="1" i="0">
                 <a:solidFill>
-                  <a:srgbClr val="2E3A80"/>
-                </a:solidFill>
-                <a:latin typeface="Montserrat"/>
-              </a:rPr>
-              <a:t>•  </a:t>
+                  <a:srgbClr val="E8801A"/>
+                </a:solidFill>
+                <a:latin typeface="Montserrat"/>
+              </a:rPr>
+              <a:t>▸  </a:t>
             </a:r>
             <a:r>
               <a:rPr sz="1600" b="0" i="0">
@@ -9640,14 +10695,14 @@
                 </a:solidFill>
                 <a:latin typeface="Montserrat"/>
               </a:rPr>
-              <a:t>Aparatos y cálculo de instalaciones</a:t>
-            </a:r>
-          </a:p>
-        </p:txBody>
-      </p:sp>
-      <p:sp>
-        <p:nvSpPr>
-          <p:cNvPr id="8" name="imgph" descr="IMGQ:student studying technical drawings at desk"/>
+              <a:t>Normas UNE 60670 y 60601</a:t>
+            </a:r>
+          </a:p>
+        </p:txBody>
+      </p:sp>
+      <p:sp>
+        <p:nvSpPr>
+          <p:cNvPr id="9" name="imgph" descr="IMGQ:shelf full of legal regulation books"/>
           <p:cNvSpPr/>
           <p:nvPr/>
         </p:nvSpPr>
@@ -9693,7 +10748,7 @@
       </p:sp>
       <p:sp>
         <p:nvSpPr>
-          <p:cNvPr id="9" name="TextBox 8"/>
+          <p:cNvPr id="10" name="TextBox 9"/>
           <p:cNvSpPr txBox="1"/>
           <p:nvPr/>
         </p:nvSpPr>
@@ -9733,7 +10788,7 @@
                 </a:solidFill>
                 <a:latin typeface="Montserrat"/>
               </a:rPr>
-              <a:t>student studying technical drawings at desk</a:t>
+              <a:t>shelf full of legal regulation books</a:t>
             </a:r>
           </a:p>
         </p:txBody>
@@ -9830,7 +10885,7 @@
                 </a:solidFill>
                 <a:latin typeface="Montserrat"/>
               </a:rPr>
-              <a:t>008 / 015</a:t>
+              <a:t>008 / 016</a:t>
             </a:r>
           </a:p>
         </p:txBody>
@@ -9878,7 +10933,7 @@
         <p:spPr>
           <a:xfrm>
             <a:off x="822960" y="457200"/>
-            <a:ext cx="8229600" cy="365760"/>
+            <a:ext cx="10058400" cy="365760"/>
           </a:xfrm>
           <a:prstGeom prst="rect">
             <a:avLst/>
@@ -9892,13 +10947,13 @@
           <a:lstStyle/>
           <a:p>
             <a:r>
-              <a:rPr sz="1200" b="1" i="0">
-                <a:solidFill>
-                  <a:srgbClr val="64748B"/>
-                </a:solidFill>
-                <a:latin typeface="Montserrat"/>
-              </a:rPr>
-              <a:t>ANEXO 1 · REGLAMENTACIÓN B</a:t>
+              <a:rPr sz="1300" b="1" i="0">
+                <a:solidFill>
+                  <a:srgbClr val="E8801A"/>
+                </a:solidFill>
+                <a:latin typeface="Montserrat"/>
+              </a:rPr>
+              <a:t>ANEXO 1 · CATEGORÍA B</a:t>
             </a:r>
           </a:p>
         </p:txBody>
@@ -9926,26 +10981,70 @@
           <a:lstStyle/>
           <a:p>
             <a:r>
-              <a:rPr sz="2700" b="1" i="0">
+              <a:rPr sz="2800" b="1" i="0">
                 <a:solidFill>
                   <a:srgbClr val="1E2761"/>
                 </a:solidFill>
                 <a:latin typeface="Montserrat"/>
               </a:rPr>
-              <a:t>La B es la A menos tres piezas</a:t>
-            </a:r>
-          </a:p>
-        </p:txBody>
-      </p:sp>
-      <p:sp>
-        <p:nvSpPr>
-          <p:cNvPr id="7" name="TextBox 6"/>
+              <a:t>El grueso del temario es la B</a:t>
+            </a:r>
+          </a:p>
+        </p:txBody>
+      </p:sp>
+      <p:sp>
+        <p:nvSpPr>
+          <p:cNvPr id="7" name="Rounded Rectangle 6"/>
+          <p:cNvSpPr/>
+          <p:nvPr/>
+        </p:nvSpPr>
+        <p:spPr>
+          <a:xfrm>
+            <a:off x="868680" y="1627632"/>
+            <a:ext cx="2011680" cy="73152"/>
+          </a:xfrm>
+          <a:prstGeom prst="roundRect">
+            <a:avLst/>
+          </a:prstGeom>
+          <a:solidFill>
+            <a:srgbClr val="E8801A"/>
+          </a:solidFill>
+          <a:ln>
+            <a:noFill/>
+          </a:ln>
+          <a:effectLst/>
+        </p:spPr>
+        <p:style>
+          <a:lnRef idx="1">
+            <a:schemeClr val="accent1"/>
+          </a:lnRef>
+          <a:fillRef idx="3">
+            <a:schemeClr val="accent1"/>
+          </a:fillRef>
+          <a:effectRef idx="2">
+            <a:schemeClr val="accent1"/>
+          </a:effectRef>
+          <a:fontRef idx="minor">
+            <a:schemeClr val="lt1"/>
+          </a:fontRef>
+        </p:style>
+        <p:txBody>
+          <a:bodyPr rtlCol="0" anchor="ctr"/>
+          <a:lstStyle/>
+          <a:p>
+            <a:pPr algn="ctr"/>
+          </a:p>
+        </p:txBody>
+      </p:sp>
+      <p:sp>
+        <p:nvSpPr>
+          <p:cNvPr id="8" name="TextBox 7"/>
           <p:cNvSpPr txBox="1"/>
           <p:nvPr/>
         </p:nvSpPr>
         <p:spPr>
           <a:xfrm>
-            <a:off x="822960" y="1920240"/>
+            <a:off x="822960" y="1965960"/>
             <a:ext cx="4983480" cy="4206240"/>
           </a:xfrm>
           <a:prstGeom prst="rect">
@@ -9961,17 +11060,17 @@
           <a:p>
             <a:pPr>
               <a:spcAft>
-                <a:spcPts val="1000"/>
+                <a:spcPts val="1100"/>
               </a:spcAft>
             </a:pPr>
             <a:r>
               <a:rPr sz="1600" b="1" i="0">
                 <a:solidFill>
-                  <a:srgbClr val="2E3A80"/>
-                </a:solidFill>
-                <a:latin typeface="Montserrat"/>
-              </a:rPr>
-              <a:t>•  </a:t>
+                  <a:srgbClr val="E8801A"/>
+                </a:solidFill>
+                <a:latin typeface="Montserrat"/>
+              </a:rPr>
+              <a:t>▸  </a:t>
             </a:r>
             <a:r>
               <a:rPr sz="1600" b="0" i="0">
@@ -9980,23 +11079,23 @@
                 </a:solidFill>
                 <a:latin typeface="Montserrat"/>
               </a:rPr>
-              <a:t>Fuera: gas natural a gran escala</a:t>
+              <a:t>Matemáticas, física y química de base</a:t>
             </a:r>
           </a:p>
           <a:p>
             <a:pPr>
               <a:spcAft>
-                <a:spcPts val="1000"/>
+                <a:spcPts val="1100"/>
               </a:spcAft>
             </a:pPr>
             <a:r>
               <a:rPr sz="1600" b="1" i="0">
                 <a:solidFill>
-                  <a:srgbClr val="2E3A80"/>
-                </a:solidFill>
-                <a:latin typeface="Montserrat"/>
-              </a:rPr>
-              <a:t>•  </a:t>
+                  <a:srgbClr val="E8801A"/>
+                </a:solidFill>
+                <a:latin typeface="Montserrat"/>
+              </a:rPr>
+              <a:t>▸  </a:t>
             </a:r>
             <a:r>
               <a:rPr sz="1600" b="0" i="0">
@@ -10005,23 +11104,23 @@
                 </a:solidFill>
                 <a:latin typeface="Montserrat"/>
               </a:rPr>
-              <a:t>Fuera: ITC-ICG 01, 03 y 05</a:t>
+              <a:t>Materiales, uniones y soldaduras</a:t>
             </a:r>
           </a:p>
           <a:p>
             <a:pPr>
               <a:spcAft>
-                <a:spcPts val="1000"/>
+                <a:spcPts val="1100"/>
               </a:spcAft>
             </a:pPr>
             <a:r>
               <a:rPr sz="1600" b="1" i="0">
                 <a:solidFill>
-                  <a:srgbClr val="2E3A80"/>
-                </a:solidFill>
-                <a:latin typeface="Montserrat"/>
-              </a:rPr>
-              <a:t>•  </a:t>
+                  <a:srgbClr val="E8801A"/>
+                </a:solidFill>
+                <a:latin typeface="Montserrat"/>
+              </a:rPr>
+              <a:t>▸  </a:t>
             </a:r>
             <a:r>
               <a:rPr sz="1600" b="0" i="0">
@@ -10030,14 +11129,39 @@
                 </a:solidFill>
                 <a:latin typeface="Montserrat"/>
               </a:rPr>
-              <a:t>Distribución, depósitos fijos y estaciones</a:t>
-            </a:r>
-          </a:p>
-        </p:txBody>
-      </p:sp>
-      <p:sp>
-        <p:nvSpPr>
-          <p:cNvPr id="8" name="imgph" descr="IMGQ:gas distribution station equipment"/>
+              <a:t>Quemadores, seguridad y encendido</a:t>
+            </a:r>
+          </a:p>
+          <a:p>
+            <a:pPr>
+              <a:spcAft>
+                <a:spcPts val="1100"/>
+              </a:spcAft>
+            </a:pPr>
+            <a:r>
+              <a:rPr sz="1600" b="1" i="0">
+                <a:solidFill>
+                  <a:srgbClr val="E8801A"/>
+                </a:solidFill>
+                <a:latin typeface="Montserrat"/>
+              </a:rPr>
+              <a:t>▸  </a:t>
+            </a:r>
+            <a:r>
+              <a:rPr sz="1600" b="0" i="0">
+                <a:solidFill>
+                  <a:srgbClr val="1B2330"/>
+                </a:solidFill>
+                <a:latin typeface="Montserrat"/>
+              </a:rPr>
+              <a:t>Aparatos y cálculo de instalaciones</a:t>
+            </a:r>
+          </a:p>
+        </p:txBody>
+      </p:sp>
+      <p:sp>
+        <p:nvSpPr>
+          <p:cNvPr id="9" name="imgph" descr="IMGQ:student studying technical drawings at desk"/>
           <p:cNvSpPr/>
           <p:nvPr/>
         </p:nvSpPr>
@@ -10083,7 +11207,7 @@
       </p:sp>
       <p:sp>
         <p:nvSpPr>
-          <p:cNvPr id="9" name="TextBox 8"/>
+          <p:cNvPr id="10" name="TextBox 9"/>
           <p:cNvSpPr txBox="1"/>
           <p:nvPr/>
         </p:nvSpPr>
@@ -10123,7 +11247,7 @@
                 </a:solidFill>
                 <a:latin typeface="Montserrat"/>
               </a:rPr>
-              <a:t>gas distribution station equipment</a:t>
+              <a:t>student studying technical drawings at desk</a:t>
             </a:r>
           </a:p>
         </p:txBody>
@@ -10220,7 +11344,7 @@
                 </a:solidFill>
                 <a:latin typeface="Montserrat"/>
               </a:rPr>
-              <a:t>009 / 015</a:t>
+              <a:t>009 / 016</a:t>
             </a:r>
           </a:p>
         </p:txBody>
@@ -10268,7 +11392,7 @@
         <p:spPr>
           <a:xfrm>
             <a:off x="822960" y="457200"/>
-            <a:ext cx="8229600" cy="365760"/>
+            <a:ext cx="10058400" cy="365760"/>
           </a:xfrm>
           <a:prstGeom prst="rect">
             <a:avLst/>
@@ -10282,13 +11406,13 @@
           <a:lstStyle/>
           <a:p>
             <a:r>
-              <a:rPr sz="1200" b="1" i="0">
-                <a:solidFill>
-                  <a:srgbClr val="64748B"/>
-                </a:solidFill>
-                <a:latin typeface="Montserrat"/>
-              </a:rPr>
-              <a:t>ANEXO 1 · CATEGORÍA C</a:t>
+              <a:rPr sz="1300" b="1" i="0">
+                <a:solidFill>
+                  <a:srgbClr val="E8801A"/>
+                </a:solidFill>
+                <a:latin typeface="Montserrat"/>
+              </a:rPr>
+              <a:t>ANEXO 1 · REGLAMENTACIÓN B</a:t>
             </a:r>
           </a:p>
         </p:txBody>
@@ -10316,26 +11440,70 @@
           <a:lstStyle/>
           <a:p>
             <a:r>
-              <a:rPr sz="2700" b="1" i="0">
+              <a:rPr sz="2800" b="1" i="0">
                 <a:solidFill>
                   <a:srgbClr val="1E2761"/>
                 </a:solidFill>
                 <a:latin typeface="Montserrat"/>
               </a:rPr>
-              <a:t>La C: el temario más recortado</a:t>
-            </a:r>
-          </a:p>
-        </p:txBody>
-      </p:sp>
-      <p:sp>
-        <p:nvSpPr>
-          <p:cNvPr id="7" name="TextBox 6"/>
+              <a:t>La B es la A menos tres piezas</a:t>
+            </a:r>
+          </a:p>
+        </p:txBody>
+      </p:sp>
+      <p:sp>
+        <p:nvSpPr>
+          <p:cNvPr id="7" name="Rounded Rectangle 6"/>
+          <p:cNvSpPr/>
+          <p:nvPr/>
+        </p:nvSpPr>
+        <p:spPr>
+          <a:xfrm>
+            <a:off x="868680" y="1627632"/>
+            <a:ext cx="2011680" cy="73152"/>
+          </a:xfrm>
+          <a:prstGeom prst="roundRect">
+            <a:avLst/>
+          </a:prstGeom>
+          <a:solidFill>
+            <a:srgbClr val="E8801A"/>
+          </a:solidFill>
+          <a:ln>
+            <a:noFill/>
+          </a:ln>
+          <a:effectLst/>
+        </p:spPr>
+        <p:style>
+          <a:lnRef idx="1">
+            <a:schemeClr val="accent1"/>
+          </a:lnRef>
+          <a:fillRef idx="3">
+            <a:schemeClr val="accent1"/>
+          </a:fillRef>
+          <a:effectRef idx="2">
+            <a:schemeClr val="accent1"/>
+          </a:effectRef>
+          <a:fontRef idx="minor">
+            <a:schemeClr val="lt1"/>
+          </a:fontRef>
+        </p:style>
+        <p:txBody>
+          <a:bodyPr rtlCol="0" anchor="ctr"/>
+          <a:lstStyle/>
+          <a:p>
+            <a:pPr algn="ctr"/>
+          </a:p>
+        </p:txBody>
+      </p:sp>
+      <p:sp>
+        <p:nvSpPr>
+          <p:cNvPr id="8" name="TextBox 7"/>
           <p:cNvSpPr txBox="1"/>
           <p:nvPr/>
         </p:nvSpPr>
         <p:spPr>
           <a:xfrm>
-            <a:off x="822960" y="1920240"/>
+            <a:off x="822960" y="1965960"/>
             <a:ext cx="4983480" cy="4206240"/>
           </a:xfrm>
           <a:prstGeom prst="rect">
@@ -10351,17 +11519,17 @@
           <a:p>
             <a:pPr>
               <a:spcAft>
-                <a:spcPts val="1000"/>
+                <a:spcPts val="1100"/>
               </a:spcAft>
             </a:pPr>
             <a:r>
               <a:rPr sz="1600" b="1" i="0">
                 <a:solidFill>
-                  <a:srgbClr val="2E3A80"/>
-                </a:solidFill>
-                <a:latin typeface="Montserrat"/>
-              </a:rPr>
-              <a:t>•  </a:t>
+                  <a:srgbClr val="E8801A"/>
+                </a:solidFill>
+                <a:latin typeface="Montserrat"/>
+              </a:rPr>
+              <a:t>▸  </a:t>
             </a:r>
             <a:r>
               <a:rPr sz="1600" b="0" i="0">
@@ -10370,23 +11538,23 @@
                 </a:solidFill>
                 <a:latin typeface="Montserrat"/>
               </a:rPr>
-              <a:t>Matemáticas y física reducidas</a:t>
+              <a:t>Fuera: gas natural a gran escala</a:t>
             </a:r>
           </a:p>
           <a:p>
             <a:pPr>
               <a:spcAft>
-                <a:spcPts val="1000"/>
+                <a:spcPts val="1100"/>
               </a:spcAft>
             </a:pPr>
             <a:r>
               <a:rPr sz="1600" b="1" i="0">
                 <a:solidFill>
-                  <a:srgbClr val="2E3A80"/>
-                </a:solidFill>
-                <a:latin typeface="Montserrat"/>
-              </a:rPr>
-              <a:t>•  </a:t>
+                  <a:srgbClr val="E8801A"/>
+                </a:solidFill>
+                <a:latin typeface="Montserrat"/>
+              </a:rPr>
+              <a:t>▸  </a:t>
             </a:r>
             <a:r>
               <a:rPr sz="1600" b="0" i="0">
@@ -10395,23 +11563,23 @@
                 </a:solidFill>
                 <a:latin typeface="Montserrat"/>
               </a:rPr>
-              <a:t>Sin adaptación a otras familias de gas</a:t>
+              <a:t>Fuera: ITC-ICG 01, 03 y 05</a:t>
             </a:r>
           </a:p>
           <a:p>
             <a:pPr>
               <a:spcAft>
-                <a:spcPts val="1000"/>
+                <a:spcPts val="1100"/>
               </a:spcAft>
             </a:pPr>
             <a:r>
               <a:rPr sz="1600" b="1" i="0">
                 <a:solidFill>
-                  <a:srgbClr val="2E3A80"/>
-                </a:solidFill>
-                <a:latin typeface="Montserrat"/>
-              </a:rPr>
-              <a:t>•  </a:t>
+                  <a:srgbClr val="E8801A"/>
+                </a:solidFill>
+                <a:latin typeface="Montserrat"/>
+              </a:rPr>
+              <a:t>▸  </a:t>
             </a:r>
             <a:r>
               <a:rPr sz="1600" b="0" i="0">
@@ -10420,39 +11588,14 @@
                 </a:solidFill>
                 <a:latin typeface="Montserrat"/>
               </a:rPr>
-              <a:t>Sin depósitos móviles grandes</a:t>
-            </a:r>
-          </a:p>
-          <a:p>
-            <a:pPr>
-              <a:spcAft>
-                <a:spcPts val="1000"/>
-              </a:spcAft>
-            </a:pPr>
-            <a:r>
-              <a:rPr sz="1600" b="1" i="0">
-                <a:solidFill>
-                  <a:srgbClr val="2E3A80"/>
-                </a:solidFill>
-                <a:latin typeface="Montserrat"/>
-              </a:rPr>
-              <a:t>•  </a:t>
-            </a:r>
-            <a:r>
-              <a:rPr sz="1600" b="0" i="0">
-                <a:solidFill>
-                  <a:srgbClr val="1B2330"/>
-                </a:solidFill>
-                <a:latin typeface="Montserrat"/>
-              </a:rPr>
-              <a:t>Solo lo de la vivienda</a:t>
-            </a:r>
-          </a:p>
-        </p:txBody>
-      </p:sp>
-      <p:sp>
-        <p:nvSpPr>
-          <p:cNvPr id="8" name="imgph" descr="IMGQ:simple home gas water heater"/>
+              <a:t>Distribución, depósitos fijos y estaciones</a:t>
+            </a:r>
+          </a:p>
+        </p:txBody>
+      </p:sp>
+      <p:sp>
+        <p:nvSpPr>
+          <p:cNvPr id="9" name="imgph" descr="IMGQ:gas distribution station equipment"/>
           <p:cNvSpPr/>
           <p:nvPr/>
         </p:nvSpPr>
@@ -10498,7 +11641,7 @@
       </p:sp>
       <p:sp>
         <p:nvSpPr>
-          <p:cNvPr id="9" name="TextBox 8"/>
+          <p:cNvPr id="10" name="TextBox 9"/>
           <p:cNvSpPr txBox="1"/>
           <p:nvPr/>
         </p:nvSpPr>
@@ -10538,7 +11681,7 @@
                 </a:solidFill>
                 <a:latin typeface="Montserrat"/>
               </a:rPr>
-              <a:t>simple home gas water heater</a:t>
+              <a:t>gas distribution station equipment</a:t>
             </a:r>
           </a:p>
         </p:txBody>

--- a/Curso Gas B/06 - ITC-ICG 09 - Instaladores y empresas instaladoras/06 - ITC-ICG 09 - Instaladores y empresas instaladoras - Vídeo 3.pptx
+++ b/Curso Gas B/06 - ITC-ICG 09 - Instaladores y empresas instaladoras/06 - ITC-ICG 09 - Instaladores y empresas instaladoras - Vídeo 3.pptx
@@ -21,6 +21,10 @@
     <p:sldId id="269" r:id="rId21"/>
     <p:sldId id="270" r:id="rId22"/>
     <p:sldId id="271" r:id="rId23"/>
+    <p:sldId id="272" r:id="rId24"/>
+    <p:sldId id="273" r:id="rId25"/>
+    <p:sldId id="274" r:id="rId26"/>
+    <p:sldId id="275" r:id="rId27"/>
   </p:sldIdLst>
   <p:sldSz cx="12191695" cy="6858000" type="screen4x3"/>
   <p:notesSz cx="6858000" cy="9144000"/>
@@ -892,12 +896,12 @@
           <a:lstStyle/>
           <a:p>
             <a:r>
-              <a:t>N1: ¿El anexo dos es solo teoría de aparatos?</a:t>
-            </a:r>
-          </a:p>
-          <a:p>
-            <a:r>
-              <a:t>N2: Es mucho más útil de lo que parece: es un manual de averías puesto en forma de temario. Mira lo que hay dentro. Análisis de los productos de la combustión y el monóxido de carbono ambiente, o sea, cómo medir si un aparato quema bien o está soltando gases peligrosos. El rendimiento y los inquemados, para saber cuánta energía se pierde. Los dispositivos de seguridad, como el cortatiro, el termopar o el antidesbordamiento de humos, que son las piezas que apagan el aparato cuando algo va mal. Y, lo más jugoso, las averías más frecuentes de calentadores y calderas: el vaso de expansión descargado, el presostato, la válvula de tres vías, el purgador. Esto es lo que separa a quien cambia una pieza a ciegas de quien diagnostica de verdad por qué una caldera se apaga, ennegrece la pared o no da agua caliente. Por eso el anexo dos, más que temario, es oficio.</a:t>
+              <a:t>N1: Regla fina de este vídeo. Para el cambio de familia de gas, ¿cuánto anexo dos te piden y quién puede hacerlo?</a:t>
+            </a:r>
+          </a:p>
+          <a:p>
+            <a:r>
+              <a:t>N2: Acuérdate del apartado que marca la diferencia y de que la ce se queda fuera de cambiar el gas. Junta esas dos pistas.</a:t>
             </a:r>
           </a:p>
         </p:txBody>
@@ -967,12 +971,12 @@
           <a:lstStyle/>
           <a:p>
             <a:r>
-              <a:t>N1: Espera, ¿los tipos de aparato A, B y C son mis categorías?</a:t>
-            </a:r>
-          </a:p>
-          <a:p>
-            <a:r>
-              <a:t>N2: No, y esta es la trampa clásica del tema, así que fíjate bien. En el anexo dos aparecen los aparatos clasificados en tipo a, tipo be y tipo ce, pero esto no tiene nada que ver con las categorías del instalador. Aquí, las letras van por cómo evacúa el aparato los humos de la combustión. El tipo a es el no conducido: suelta los humos directamente al local donde está, como una cocina de gas. El tipo be es el conducido: coge el aire del local pero saca los humos fuera por un conducto, como muchos calentadores antiguos. Y el tipo ce es el estanco: coge el aire de fuera y expulsa los humos fuera, en un circuito cerrado que no toca el aire de la casa, como las calderas modernas de pared. Son dos clasificaciones distintas que, por mala suerte, usan las mismas letras. En obra importa mucho: un aparato tipo a en un local sin ventilación es un riesgo directo de monóxido de carbono. No confundas el tipo del aparato con la categoría de tu carné.</a:t>
+              <a:t>N1: ¿Por qué el completo y solo la a y la be?</a:t>
+            </a:r>
+          </a:p>
+          <a:p>
+            <a:r>
+              <a:t>N2: Porque el cuatro punto dos, cambiar de familia de gas, necesita el apartado dieciocho, el de adaptación de aparatos a otras familias, y ese solo está en el anexo completo. Y como la ce trabaja con instalaciones que no cambian de familia de gas, esa operación le está vetada: solo la a y la be. El truco: el cuatro punto uno, arrancar los grandes, se queda en el uno al diecisiete; el cambio de gas se lo lleva todo.</a:t>
             </a:r>
           </a:p>
         </p:txBody>
@@ -1042,22 +1046,237 @@
           <a:lstStyle/>
           <a:p>
             <a:r>
-              <a:t>N1: Último cierre. ¿Qué me llevo de los anexos y del tema entero?</a:t>
-            </a:r>
-          </a:p>
-          <a:p>
-            <a:r>
-              <a:t>N2: Te llevas el temario ordenado y, sobre todo, entendido. Primero, el anexo uno es la referencia del examen de tu comunidad, y funciona por capas de muñeca rusa: la a incluye a la be, la be incluye a la ce; cuanta más categoría, más temario, siempre acompañando al alcance de cada carné. Segundo, dos normas UNE que resuelven preguntas: la de instalaciones receptoras hasta cinco bar la estudian las tres categorías, y la de salas de máquinas solo la a y la be. Tercero, el anexo dos es el manual de los aparatos y sus averías, con su regla de reparto: del uno al diecisiete para arrancar los grandes, y completo, con el dieciocho, para el cambio de gas, que es solo de la a y la be. Y cuarto, la trampa que no puedes fallar: los tipos de aparato a, be y ce van por cómo evacúan los humos, y no son las categorías del instalador.</a:t>
-            </a:r>
-          </a:p>
-          <a:p>
-            <a:r>
-              <a:t>N1: ¿Y con esto ya está el tema?</a:t>
-            </a:r>
-          </a:p>
-          <a:p>
-            <a:r>
-              <a:t>N2: Con esto cierras la ITC nueve de punta a punta. Piensa en el camino: empezaste sin saber qué era una categoría, luego aprendiste qué puede tocar cada instalador, después cómo se monta y se sostiene una empresa, y ahora dominas el temario oficial y la lógica que lo ordena. En el examen, este tema se pregunta muchísimo, y casi siempre con las mismas trampas, las que ya sabes ver: categorías por presión, cifras del seguro, plazos, y los tipos de aparato frente a las categorías. En la obra, es lo que decide qué trabajos son tuyos, qué papeles firmas y con qué respaldo. Has pasado de no saber nada a poder explicárselo a otro. Eso es ser gasista. Enhorabuena: has cerrado el tema seis.</a:t>
+              <a:t>N1: ¿El anexo dos es solo teoría de aparatos?</a:t>
+            </a:r>
+          </a:p>
+          <a:p>
+            <a:r>
+              <a:t>N2: Es mucho más útil de lo que parece: es un manual de averías puesto en forma de temario. Mira lo que hay dentro. Análisis de los productos de la combustión y el monóxido de carbono ambiente, o sea, cómo medir si un aparato quema bien o está soltando gases peligrosos. El rendimiento y los inquemados, para saber cuánta energía se pierde. Los dispositivos de seguridad, como el cortatiro, el termopar o el antidesbordamiento de humos, que son las piezas que apagan el aparato cuando algo va mal. Y, lo más jugoso, las averías más frecuentes de calentadores y calderas: el vaso de expansión descargado, el presostato, la válvula de tres vías, el purgador. Esto es lo que separa a quien cambia una pieza a ciegas de quien diagnostica de verdad por qué una caldera se apaga, ennegrece la pared o no da agua caliente. Por eso el anexo dos, más que temario, es oficio.</a:t>
+            </a:r>
+          </a:p>
+        </p:txBody>
+      </p:sp>
+      <p:sp>
+        <p:nvSpPr>
+          <p:cNvPr id="4" name="Slide Number Placeholder 3"/>
+          <p:cNvSpPr>
+            <a:spLocks noGrp="1"/>
+          </p:cNvSpPr>
+          <p:nvPr>
+            <p:ph type="sldNum" idx="5" sz="quarter"/>
+          </p:nvPr>
+        </p:nvSpPr>
+        <p:spPr/>
+      </p:sp>
+    </p:spTree>
+  </p:cSld>
+  <p:clrMapOvr>
+    <a:masterClrMapping/>
+  </p:clrMapOvr>
+</p:notes>
+</file>
+
+<file path=ppt/notesSlides/notesSlide17.xml><?xml version="1.0" encoding="utf-8"?>
+<p:notes xmlns:a="http://schemas.openxmlformats.org/drawingml/2006/main" xmlns:p="http://schemas.openxmlformats.org/presentationml/2006/main" xmlns:r="http://schemas.openxmlformats.org/officeDocument/2006/relationships">
+  <p:cSld>
+    <p:spTree>
+      <p:nvGrpSpPr>
+        <p:cNvPr id="1" name=""/>
+        <p:cNvGrpSpPr/>
+        <p:nvPr/>
+      </p:nvGrpSpPr>
+      <p:grpSpPr>
+        <a:xfrm>
+          <a:off x="0" y="0"/>
+          <a:ext cx="0" cy="0"/>
+          <a:chOff x="0" y="0"/>
+          <a:chExt cx="0" cy="0"/>
+        </a:xfrm>
+      </p:grpSpPr>
+      <p:sp>
+        <p:nvSpPr>
+          <p:cNvPr id="2" name="Slide Image Placeholder 1"/>
+          <p:cNvSpPr>
+            <a:spLocks noGrp="1"/>
+          </p:cNvSpPr>
+          <p:nvPr>
+            <p:ph type="sldImg" idx="2"/>
+          </p:nvPr>
+        </p:nvSpPr>
+        <p:spPr/>
+      </p:sp>
+      <p:sp>
+        <p:nvSpPr>
+          <p:cNvPr id="3" name="Notes Placeholder 2"/>
+          <p:cNvSpPr>
+            <a:spLocks noGrp="1"/>
+          </p:cNvSpPr>
+          <p:nvPr>
+            <p:ph type="body" idx="3" sz="quarter"/>
+          </p:nvPr>
+        </p:nvSpPr>
+        <p:spPr/>
+        <p:txBody>
+          <a:bodyPr/>
+          <a:lstStyle/>
+          <a:p>
+            <a:r>
+              <a:t>N1: Espera, ¿los tipos de aparato A, B y C son mis categorías?</a:t>
+            </a:r>
+          </a:p>
+          <a:p>
+            <a:r>
+              <a:t>N2: No, y esta es la trampa clásica del tema, así que fíjate bien. En el anexo dos aparecen los aparatos clasificados en tipo a, tipo be y tipo ce, pero esto no tiene nada que ver con las categorías del instalador. Aquí, las letras van por cómo evacúa el aparato los humos de la combustión. El tipo a es el no conducido: suelta los humos directamente al local donde está, como una cocina de gas. El tipo be es el conducido: coge el aire del local pero saca los humos fuera por un conducto, como muchos calentadores antiguos. Y el tipo ce es el estanco: coge el aire de fuera y expulsa los humos fuera, en un circuito cerrado que no toca el aire de la casa, como las calderas modernas de pared. Son dos clasificaciones distintas que, por mala suerte, usan las mismas letras. En obra importa mucho: un aparato tipo a en un local sin ventilación es un riesgo directo de monóxido de carbono. No confundas el tipo del aparato con la categoría de tu carné.</a:t>
+            </a:r>
+          </a:p>
+        </p:txBody>
+      </p:sp>
+      <p:sp>
+        <p:nvSpPr>
+          <p:cNvPr id="4" name="Slide Number Placeholder 3"/>
+          <p:cNvSpPr>
+            <a:spLocks noGrp="1"/>
+          </p:cNvSpPr>
+          <p:nvPr>
+            <p:ph type="sldNum" idx="5" sz="quarter"/>
+          </p:nvPr>
+        </p:nvSpPr>
+        <p:spPr/>
+      </p:sp>
+    </p:spTree>
+  </p:cSld>
+  <p:clrMapOvr>
+    <a:masterClrMapping/>
+  </p:clrMapOvr>
+</p:notes>
+</file>
+
+<file path=ppt/notesSlides/notesSlide18.xml><?xml version="1.0" encoding="utf-8"?>
+<p:notes xmlns:a="http://schemas.openxmlformats.org/drawingml/2006/main" xmlns:p="http://schemas.openxmlformats.org/presentationml/2006/main" xmlns:r="http://schemas.openxmlformats.org/officeDocument/2006/relationships">
+  <p:cSld>
+    <p:spTree>
+      <p:nvGrpSpPr>
+        <p:cNvPr id="1" name=""/>
+        <p:cNvGrpSpPr/>
+        <p:nvPr/>
+      </p:nvGrpSpPr>
+      <p:grpSpPr>
+        <a:xfrm>
+          <a:off x="0" y="0"/>
+          <a:ext cx="0" cy="0"/>
+          <a:chOff x="0" y="0"/>
+          <a:chExt cx="0" cy="0"/>
+        </a:xfrm>
+      </p:grpSpPr>
+      <p:sp>
+        <p:nvSpPr>
+          <p:cNvPr id="2" name="Slide Image Placeholder 1"/>
+          <p:cNvSpPr>
+            <a:spLocks noGrp="1"/>
+          </p:cNvSpPr>
+          <p:nvPr>
+            <p:ph type="sldImg" idx="2"/>
+          </p:nvPr>
+        </p:nvSpPr>
+        <p:spPr/>
+      </p:sp>
+      <p:sp>
+        <p:nvSpPr>
+          <p:cNvPr id="3" name="Notes Placeholder 2"/>
+          <p:cNvSpPr>
+            <a:spLocks noGrp="1"/>
+          </p:cNvSpPr>
+          <p:nvPr>
+            <p:ph type="body" idx="3" sz="quarter"/>
+          </p:nvPr>
+        </p:nvSpPr>
+        <p:spPr/>
+        <p:txBody>
+          <a:bodyPr/>
+          <a:lstStyle/>
+          <a:p>
+            <a:r>
+              <a:t>N1: Y cerramos con la trampa clásica del tema. En el anexo dos, un aparato de tipo a, ¿qué es?</a:t>
+            </a:r>
+          </a:p>
+          <a:p>
+            <a:r>
+              <a:t>N2: Ojo, que no te hablo de tu carné. Aquí las letras van por cómo saca el aparato los humos. Piensa en una cocina de gas sin campana.</a:t>
+            </a:r>
+          </a:p>
+        </p:txBody>
+      </p:sp>
+      <p:sp>
+        <p:nvSpPr>
+          <p:cNvPr id="4" name="Slide Number Placeholder 3"/>
+          <p:cNvSpPr>
+            <a:spLocks noGrp="1"/>
+          </p:cNvSpPr>
+          <p:nvPr>
+            <p:ph type="sldNum" idx="5" sz="quarter"/>
+          </p:nvPr>
+        </p:nvSpPr>
+        <p:spPr/>
+      </p:sp>
+    </p:spTree>
+  </p:cSld>
+  <p:clrMapOvr>
+    <a:masterClrMapping/>
+  </p:clrMapOvr>
+</p:notes>
+</file>
+
+<file path=ppt/notesSlides/notesSlide19.xml><?xml version="1.0" encoding="utf-8"?>
+<p:notes xmlns:a="http://schemas.openxmlformats.org/drawingml/2006/main" xmlns:p="http://schemas.openxmlformats.org/presentationml/2006/main" xmlns:r="http://schemas.openxmlformats.org/officeDocument/2006/relationships">
+  <p:cSld>
+    <p:spTree>
+      <p:nvGrpSpPr>
+        <p:cNvPr id="1" name=""/>
+        <p:cNvGrpSpPr/>
+        <p:nvPr/>
+      </p:nvGrpSpPr>
+      <p:grpSpPr>
+        <a:xfrm>
+          <a:off x="0" y="0"/>
+          <a:ext cx="0" cy="0"/>
+          <a:chOff x="0" y="0"/>
+          <a:chExt cx="0" cy="0"/>
+        </a:xfrm>
+      </p:grpSpPr>
+      <p:sp>
+        <p:nvSpPr>
+          <p:cNvPr id="2" name="Slide Image Placeholder 1"/>
+          <p:cNvSpPr>
+            <a:spLocks noGrp="1"/>
+          </p:cNvSpPr>
+          <p:nvPr>
+            <p:ph type="sldImg" idx="2"/>
+          </p:nvPr>
+        </p:nvSpPr>
+        <p:spPr/>
+      </p:sp>
+      <p:sp>
+        <p:nvSpPr>
+          <p:cNvPr id="3" name="Notes Placeholder 2"/>
+          <p:cNvSpPr>
+            <a:spLocks noGrp="1"/>
+          </p:cNvSpPr>
+          <p:nvPr>
+            <p:ph type="body" idx="3" sz="quarter"/>
+          </p:nvPr>
+        </p:nvSpPr>
+        <p:spPr/>
+        <p:txBody>
+          <a:bodyPr/>
+          <a:lstStyle/>
+          <a:p>
+            <a:r>
+              <a:t>N1: ¿Por qué no conducido y no la categoría del instalador?</a:t>
+            </a:r>
+          </a:p>
+          <a:p>
+            <a:r>
+              <a:t>N2: Porque en el anexo dos las letras de los aparatos van por cómo evacúan los humos: el tipo a los suelta al local, el tipo be los saca fuera pero coge el aire de dentro, y el tipo ce es estanco, en circuito cerrado con el exterior. Son dos clasificaciones distintas que usan las mismas letras. El truco para no caer: si te hablan de humos y evacuación, es el tipo del aparato; si te hablan de presión y alcance, es la categoría del carné.</a:t>
             </a:r>
           </a:p>
         </p:txBody>
@@ -1133,6 +1352,91 @@
           <a:p>
             <a:r>
               <a:t>N2: Porque son el mapa del vídeo. Dos anexos: el uno, conocimientos mínimos por categoría; el dos, conocimientos avanzados sobre aparatos. Tres categorías, la a, la be y la ce, cada una con su propio nivel de temario, de más a menos. Y dieciocho apartados, que es el índice del anexo dos, el de los aparatos. Ese número, dieciocho, lo vamos a usar al final para una regla muy concreta: quién tiene que estudiarse los dieciocho enteros y quién solo hasta el diecisiete. Quédate con la foto y avanzamos.</a:t>
+            </a:r>
+          </a:p>
+        </p:txBody>
+      </p:sp>
+      <p:sp>
+        <p:nvSpPr>
+          <p:cNvPr id="4" name="Slide Number Placeholder 3"/>
+          <p:cNvSpPr>
+            <a:spLocks noGrp="1"/>
+          </p:cNvSpPr>
+          <p:nvPr>
+            <p:ph type="sldNum" idx="5" sz="quarter"/>
+          </p:nvPr>
+        </p:nvSpPr>
+        <p:spPr/>
+      </p:sp>
+    </p:spTree>
+  </p:cSld>
+  <p:clrMapOvr>
+    <a:masterClrMapping/>
+  </p:clrMapOvr>
+</p:notes>
+</file>
+
+<file path=ppt/notesSlides/notesSlide20.xml><?xml version="1.0" encoding="utf-8"?>
+<p:notes xmlns:a="http://schemas.openxmlformats.org/drawingml/2006/main" xmlns:p="http://schemas.openxmlformats.org/presentationml/2006/main" xmlns:r="http://schemas.openxmlformats.org/officeDocument/2006/relationships">
+  <p:cSld>
+    <p:spTree>
+      <p:nvGrpSpPr>
+        <p:cNvPr id="1" name=""/>
+        <p:cNvGrpSpPr/>
+        <p:nvPr/>
+      </p:nvGrpSpPr>
+      <p:grpSpPr>
+        <a:xfrm>
+          <a:off x="0" y="0"/>
+          <a:ext cx="0" cy="0"/>
+          <a:chOff x="0" y="0"/>
+          <a:chExt cx="0" cy="0"/>
+        </a:xfrm>
+      </p:grpSpPr>
+      <p:sp>
+        <p:nvSpPr>
+          <p:cNvPr id="2" name="Slide Image Placeholder 1"/>
+          <p:cNvSpPr>
+            <a:spLocks noGrp="1"/>
+          </p:cNvSpPr>
+          <p:nvPr>
+            <p:ph type="sldImg" idx="2"/>
+          </p:nvPr>
+        </p:nvSpPr>
+        <p:spPr/>
+      </p:sp>
+      <p:sp>
+        <p:nvSpPr>
+          <p:cNvPr id="3" name="Notes Placeholder 2"/>
+          <p:cNvSpPr>
+            <a:spLocks noGrp="1"/>
+          </p:cNvSpPr>
+          <p:nvPr>
+            <p:ph type="body" idx="3" sz="quarter"/>
+          </p:nvPr>
+        </p:nvSpPr>
+        <p:spPr/>
+        <p:txBody>
+          <a:bodyPr/>
+          <a:lstStyle/>
+          <a:p>
+            <a:r>
+              <a:t>N1: Último cierre. ¿Qué me llevo de los anexos y del tema entero?</a:t>
+            </a:r>
+          </a:p>
+          <a:p>
+            <a:r>
+              <a:t>N2: Te llevas el temario ordenado y, sobre todo, entendido. Primero, el anexo uno es la referencia del examen de tu comunidad, y funciona por capas de muñeca rusa: la a incluye a la be, la be incluye a la ce; cuanta más categoría, más temario, siempre acompañando al alcance de cada carné. Segundo, dos normas UNE que resuelven preguntas: la de instalaciones receptoras hasta cinco bar la estudian las tres categorías, y la de salas de máquinas solo la a y la be. Tercero, el anexo dos es el manual de los aparatos y sus averías, con su regla de reparto: del uno al diecisiete para arrancar los grandes, y completo, con el dieciocho, para el cambio de gas, que es solo de la a y la be. Y cuarto, la trampa que no puedes fallar: los tipos de aparato a, be y ce van por cómo evacúan los humos, y no son las categorías del instalador.</a:t>
+            </a:r>
+          </a:p>
+          <a:p>
+            <a:r>
+              <a:t>N1: ¿Y con esto ya está el tema?</a:t>
+            </a:r>
+          </a:p>
+          <a:p>
+            <a:r>
+              <a:t>N2: Con esto cierras la ITC nueve de punta a punta. Piensa en el camino: empezaste sin saber qué era una categoría, luego aprendiste qué puede tocar cada instalador, después cómo se monta y se sostiene una empresa, y ahora dominas el temario oficial y la lógica que lo ordena. En el examen, este tema se pregunta muchísimo, y casi siempre con las mismas trampas, las que ya sabes ver: categorías por presión, cifras del seguro, plazos, y los tipos de aparato frente a las categorías. En la obra, es lo que decide qué trabajos son tuyos, qué papeles firmas y con qué respaldo. Has pasado de no saber nada a poder explicárselo a otro. Eso es ser gasista. Enhorabuena: has cerrado el tema seis.</a:t>
             </a:r>
           </a:p>
         </p:txBody>
@@ -4734,7 +5038,7 @@
       </p:sp>
       <p:sp>
         <p:nvSpPr>
-          <p:cNvPr id="4" name="Rounded Rectangle 3"/>
+          <p:cNvPr id="4" name="Rectangle 3"/>
           <p:cNvSpPr/>
           <p:nvPr/>
         </p:nvSpPr>
@@ -4743,7 +5047,7 @@
             <a:off x="868680" y="2057400"/>
             <a:ext cx="1463040" cy="82296"/>
           </a:xfrm>
-          <a:prstGeom prst="roundRect">
+          <a:prstGeom prst="rect">
             <a:avLst/>
           </a:prstGeom>
           <a:solidFill>
@@ -4860,6 +5164,18 @@
   <p:clrMapOvr>
     <a:masterClrMapping/>
   </p:clrMapOvr>
+  <mc:AlternateContent xmlns:mc="http://schemas.openxmlformats.org/markup-compatibility/2006">
+    <mc:Choice xmlns:p14="http://schemas.microsoft.com/office/powerpoint/2010/main" Requires="p14">
+      <p:transition spd="med" p14:dur="700">
+        <p14:cube dir="l"/>
+      </p:transition>
+    </mc:Choice>
+    <mc:Fallback>
+      <p:transition spd="med">
+        <p:push dir="l"/>
+      </p:transition>
+    </mc:Fallback>
+  </mc:AlternateContent>
 </p:sld>
 </file>
 
@@ -4947,7 +5263,7 @@
                 </a:solidFill>
                 <a:latin typeface="Montserrat"/>
               </a:rPr>
-              <a:t>010 / 016</a:t>
+              <a:t>010 / 020</a:t>
             </a:r>
           </a:p>
         </p:txBody>
@@ -5056,7 +5372,7 @@
       </p:sp>
       <p:sp>
         <p:nvSpPr>
-          <p:cNvPr id="7" name="Rounded Rectangle 6"/>
+          <p:cNvPr id="7" name="Rectangle 6"/>
           <p:cNvSpPr/>
           <p:nvPr/>
         </p:nvSpPr>
@@ -5065,7 +5381,7 @@
             <a:off x="868680" y="1627632"/>
             <a:ext cx="2011680" cy="73152"/>
           </a:xfrm>
-          <a:prstGeom prst="roundRect">
+          <a:prstGeom prst="rect">
             <a:avLst/>
           </a:prstGeom>
           <a:solidFill>
@@ -5107,7 +5423,7 @@
         <p:spPr>
           <a:xfrm>
             <a:off x="822960" y="1965960"/>
-            <a:ext cx="4983480" cy="4206240"/>
+            <a:ext cx="5029200" cy="4206240"/>
           </a:xfrm>
           <a:prstGeom prst="rect">
             <a:avLst/>
@@ -5229,8 +5545,8 @@
         </p:nvSpPr>
         <p:spPr>
           <a:xfrm>
-            <a:off x="5806440" y="1051560"/>
-            <a:ext cx="5298947" cy="4629150"/>
+            <a:off x="6080760" y="1965960"/>
+            <a:ext cx="5303520" cy="4572000"/>
           </a:xfrm>
           <a:prstGeom prst="roundRect">
             <a:avLst/>
@@ -5275,8 +5591,8 @@
         </p:nvSpPr>
         <p:spPr>
           <a:xfrm>
-            <a:off x="6080760" y="2726055"/>
-            <a:ext cx="4750307" cy="1280160"/>
+            <a:off x="6355080" y="3611880"/>
+            <a:ext cx="4754880" cy="1280160"/>
           </a:xfrm>
           <a:prstGeom prst="rect">
             <a:avLst/>
@@ -5297,7 +5613,7 @@
                 </a:solidFill>
                 <a:latin typeface="Montserrat"/>
               </a:rPr>
-              <a:t>IMAGEN REALISTA</a:t>
+              <a:t>IMAGEN</a:t>
             </a:r>
           </a:p>
           <a:p>
@@ -5319,6 +5635,18 @@
   <p:clrMapOvr>
     <a:masterClrMapping/>
   </p:clrMapOvr>
+  <mc:AlternateContent xmlns:mc="http://schemas.openxmlformats.org/markup-compatibility/2006">
+    <mc:Choice xmlns:p14="http://schemas.microsoft.com/office/powerpoint/2010/main" Requires="p14">
+      <p:transition spd="med" p14:dur="700">
+        <p14:cube dir="r"/>
+      </p:transition>
+    </mc:Choice>
+    <mc:Fallback>
+      <p:transition spd="med">
+        <p:push dir="r"/>
+      </p:transition>
+    </mc:Fallback>
+  </mc:AlternateContent>
 </p:sld>
 </file>
 
@@ -5406,7 +5734,7 @@
                 </a:solidFill>
                 <a:latin typeface="Montserrat"/>
               </a:rPr>
-              <a:t>011 / 016</a:t>
+              <a:t>011 / 020</a:t>
             </a:r>
           </a:p>
         </p:txBody>
@@ -5515,7 +5843,7 @@
       </p:sp>
       <p:sp>
         <p:nvSpPr>
-          <p:cNvPr id="7" name="Rounded Rectangle 6"/>
+          <p:cNvPr id="7" name="Rectangle 6"/>
           <p:cNvSpPr/>
           <p:nvPr/>
         </p:nvSpPr>
@@ -5524,7 +5852,7 @@
             <a:off x="868680" y="1627632"/>
             <a:ext cx="2011680" cy="73152"/>
           </a:xfrm>
-          <a:prstGeom prst="roundRect">
+          <a:prstGeom prst="rect">
             <a:avLst/>
           </a:prstGeom>
           <a:solidFill>
@@ -5565,8 +5893,8 @@
         </p:nvSpPr>
         <p:spPr>
           <a:xfrm>
-            <a:off x="822960" y="1965960"/>
-            <a:ext cx="4983480" cy="4206240"/>
+            <a:off x="6355080" y="1965960"/>
+            <a:ext cx="5029200" cy="4206240"/>
           </a:xfrm>
           <a:prstGeom prst="rect">
             <a:avLst/>
@@ -5688,8 +6016,8 @@
         </p:nvSpPr>
         <p:spPr>
           <a:xfrm>
-            <a:off x="5806440" y="1051560"/>
-            <a:ext cx="5298947" cy="4629150"/>
+            <a:off x="822960" y="1965960"/>
+            <a:ext cx="5303520" cy="4572000"/>
           </a:xfrm>
           <a:prstGeom prst="roundRect">
             <a:avLst/>
@@ -5734,8 +6062,8 @@
         </p:nvSpPr>
         <p:spPr>
           <a:xfrm>
-            <a:off x="6080760" y="2726055"/>
-            <a:ext cx="4750307" cy="1280160"/>
+            <a:off x="1097280" y="3611880"/>
+            <a:ext cx="4754880" cy="1280160"/>
           </a:xfrm>
           <a:prstGeom prst="rect">
             <a:avLst/>
@@ -5756,7 +6084,7 @@
                 </a:solidFill>
                 <a:latin typeface="Montserrat"/>
               </a:rPr>
-              <a:t>IMAGEN REALISTA</a:t>
+              <a:t>IMAGEN</a:t>
             </a:r>
           </a:p>
           <a:p>
@@ -5778,6 +6106,18 @@
   <p:clrMapOvr>
     <a:masterClrMapping/>
   </p:clrMapOvr>
+  <mc:AlternateContent xmlns:mc="http://schemas.openxmlformats.org/markup-compatibility/2006">
+    <mc:Choice xmlns:p14="http://schemas.microsoft.com/office/powerpoint/2010/main" Requires="p14">
+      <p:transition spd="med" p14:dur="700">
+        <p14:cube dir="l"/>
+      </p:transition>
+    </mc:Choice>
+    <mc:Fallback>
+      <p:transition spd="med">
+        <p:push dir="l"/>
+      </p:transition>
+    </mc:Fallback>
+  </mc:AlternateContent>
 </p:sld>
 </file>
 
@@ -5865,7 +6205,7 @@
                 </a:solidFill>
                 <a:latin typeface="Montserrat"/>
               </a:rPr>
-              <a:t>012 / 016</a:t>
+              <a:t>012 / 020</a:t>
             </a:r>
           </a:p>
         </p:txBody>
@@ -5974,7 +6314,7 @@
       </p:sp>
       <p:sp>
         <p:nvSpPr>
-          <p:cNvPr id="7" name="Rounded Rectangle 6"/>
+          <p:cNvPr id="7" name="Rectangle 6"/>
           <p:cNvSpPr/>
           <p:nvPr/>
         </p:nvSpPr>
@@ -5983,7 +6323,7 @@
             <a:off x="868680" y="1627632"/>
             <a:ext cx="2011680" cy="73152"/>
           </a:xfrm>
-          <a:prstGeom prst="roundRect">
+          <a:prstGeom prst="rect">
             <a:avLst/>
           </a:prstGeom>
           <a:solidFill>
@@ -6025,7 +6365,7 @@
         <p:spPr>
           <a:xfrm>
             <a:off x="822960" y="1965960"/>
-            <a:ext cx="4983480" cy="4206240"/>
+            <a:ext cx="5029200" cy="4206240"/>
           </a:xfrm>
           <a:prstGeom prst="rect">
             <a:avLst/>
@@ -6147,8 +6487,8 @@
         </p:nvSpPr>
         <p:spPr>
           <a:xfrm>
-            <a:off x="5806440" y="1051560"/>
-            <a:ext cx="5298947" cy="4629150"/>
+            <a:off x="6080760" y="1965960"/>
+            <a:ext cx="5303520" cy="4572000"/>
           </a:xfrm>
           <a:prstGeom prst="roundRect">
             <a:avLst/>
@@ -6193,8 +6533,8 @@
         </p:nvSpPr>
         <p:spPr>
           <a:xfrm>
-            <a:off x="6080760" y="2726055"/>
-            <a:ext cx="4750307" cy="1280160"/>
+            <a:off x="6355080" y="3611880"/>
+            <a:ext cx="4754880" cy="1280160"/>
           </a:xfrm>
           <a:prstGeom prst="rect">
             <a:avLst/>
@@ -6215,7 +6555,7 @@
                 </a:solidFill>
                 <a:latin typeface="Montserrat"/>
               </a:rPr>
-              <a:t>IMAGEN REALISTA</a:t>
+              <a:t>IMAGEN</a:t>
             </a:r>
           </a:p>
           <a:p>
@@ -6237,6 +6577,18 @@
   <p:clrMapOvr>
     <a:masterClrMapping/>
   </p:clrMapOvr>
+  <mc:AlternateContent xmlns:mc="http://schemas.openxmlformats.org/markup-compatibility/2006">
+    <mc:Choice xmlns:p14="http://schemas.microsoft.com/office/powerpoint/2010/main" Requires="p14">
+      <p:transition spd="med" p14:dur="700">
+        <p14:cube dir="r"/>
+      </p:transition>
+    </mc:Choice>
+    <mc:Fallback>
+      <p:transition spd="med">
+        <p:push dir="r"/>
+      </p:transition>
+    </mc:Fallback>
+  </mc:AlternateContent>
 </p:sld>
 </file>
 
@@ -6324,7 +6676,7 @@
                 </a:solidFill>
                 <a:latin typeface="Montserrat"/>
               </a:rPr>
-              <a:t>013 / 016</a:t>
+              <a:t>013 / 020</a:t>
             </a:r>
           </a:p>
         </p:txBody>
@@ -6433,7 +6785,7 @@
       </p:sp>
       <p:sp>
         <p:nvSpPr>
-          <p:cNvPr id="7" name="Rounded Rectangle 6"/>
+          <p:cNvPr id="7" name="Rectangle 6"/>
           <p:cNvSpPr/>
           <p:nvPr/>
         </p:nvSpPr>
@@ -6442,7 +6794,7 @@
             <a:off x="868680" y="1627632"/>
             <a:ext cx="2011680" cy="73152"/>
           </a:xfrm>
-          <a:prstGeom prst="roundRect">
+          <a:prstGeom prst="rect">
             <a:avLst/>
           </a:prstGeom>
           <a:solidFill>
@@ -6483,8 +6835,8 @@
         </p:nvSpPr>
         <p:spPr>
           <a:xfrm>
-            <a:off x="822960" y="1965960"/>
-            <a:ext cx="4983480" cy="4206240"/>
+            <a:off x="6355080" y="1965960"/>
+            <a:ext cx="5029200" cy="4206240"/>
           </a:xfrm>
           <a:prstGeom prst="rect">
             <a:avLst/>
@@ -6606,8 +6958,8 @@
         </p:nvSpPr>
         <p:spPr>
           <a:xfrm>
-            <a:off x="5806440" y="1051560"/>
-            <a:ext cx="5298947" cy="4629150"/>
+            <a:off x="822960" y="1965960"/>
+            <a:ext cx="5303520" cy="4572000"/>
           </a:xfrm>
           <a:prstGeom prst="roundRect">
             <a:avLst/>
@@ -6652,8 +7004,8 @@
         </p:nvSpPr>
         <p:spPr>
           <a:xfrm>
-            <a:off x="6080760" y="2726055"/>
-            <a:ext cx="4750307" cy="1280160"/>
+            <a:off x="1097280" y="3611880"/>
+            <a:ext cx="4754880" cy="1280160"/>
           </a:xfrm>
           <a:prstGeom prst="rect">
             <a:avLst/>
@@ -6674,7 +7026,7 @@
                 </a:solidFill>
                 <a:latin typeface="Montserrat"/>
               </a:rPr>
-              <a:t>IMAGEN REALISTA</a:t>
+              <a:t>IMAGEN</a:t>
             </a:r>
           </a:p>
           <a:p>
@@ -6696,6 +7048,18 @@
   <p:clrMapOvr>
     <a:masterClrMapping/>
   </p:clrMapOvr>
+  <mc:AlternateContent xmlns:mc="http://schemas.openxmlformats.org/markup-compatibility/2006">
+    <mc:Choice xmlns:p14="http://schemas.microsoft.com/office/powerpoint/2010/main" Requires="p14">
+      <p:transition spd="med" p14:dur="700">
+        <p14:cube dir="l"/>
+      </p:transition>
+    </mc:Choice>
+    <mc:Fallback>
+      <p:transition spd="med">
+        <p:push dir="l"/>
+      </p:transition>
+    </mc:Fallback>
+  </mc:AlternateContent>
 </p:sld>
 </file>
 
@@ -6783,7 +7147,7 @@
                 </a:solidFill>
                 <a:latin typeface="Montserrat"/>
               </a:rPr>
-              <a:t>014 / 016</a:t>
+              <a:t>014 / 020</a:t>
             </a:r>
           </a:p>
         </p:txBody>
@@ -6824,84 +7188,16 @@
       </p:sp>
       <p:sp>
         <p:nvSpPr>
-          <p:cNvPr id="5" name="TextBox 4"/>
-          <p:cNvSpPr txBox="1"/>
-          <p:nvPr/>
-        </p:nvSpPr>
-        <p:spPr>
-          <a:xfrm>
-            <a:off x="822960" y="457200"/>
-            <a:ext cx="10058400" cy="365760"/>
-          </a:xfrm>
-          <a:prstGeom prst="rect">
-            <a:avLst/>
-          </a:prstGeom>
-          <a:noFill/>
-        </p:spPr>
-        <p:txBody>
-          <a:bodyPr wrap="square">
-            <a:spAutoFit/>
-          </a:bodyPr>
-          <a:lstStyle/>
-          <a:p>
-            <a:r>
-              <a:rPr sz="1300" b="1" i="0">
-                <a:solidFill>
-                  <a:srgbClr val="E8801A"/>
-                </a:solidFill>
-                <a:latin typeface="Montserrat"/>
-              </a:rPr>
-              <a:t>ANEXO 2 · EN LA PRÁCTICA</a:t>
-            </a:r>
-          </a:p>
-        </p:txBody>
-      </p:sp>
-      <p:sp>
-        <p:nvSpPr>
-          <p:cNvPr id="6" name="TextBox 5"/>
-          <p:cNvSpPr txBox="1"/>
-          <p:nvPr/>
-        </p:nvSpPr>
-        <p:spPr>
-          <a:xfrm>
-            <a:off x="822960" y="868680"/>
-            <a:ext cx="10515600" cy="914400"/>
-          </a:xfrm>
-          <a:prstGeom prst="rect">
-            <a:avLst/>
-          </a:prstGeom>
-          <a:noFill/>
-        </p:spPr>
-        <p:txBody>
-          <a:bodyPr wrap="square">
-            <a:spAutoFit/>
-          </a:bodyPr>
-          <a:lstStyle/>
-          <a:p>
-            <a:r>
-              <a:rPr sz="2800" b="1" i="0">
-                <a:solidFill>
-                  <a:srgbClr val="1E2761"/>
-                </a:solidFill>
-                <a:latin typeface="Montserrat"/>
-              </a:rPr>
-              <a:t>El anexo 2 es un manual de averías</a:t>
-            </a:r>
-          </a:p>
-        </p:txBody>
-      </p:sp>
-      <p:sp>
-        <p:nvSpPr>
-          <p:cNvPr id="7" name="Rounded Rectangle 6"/>
+          <p:cNvPr id="5" name="Rectangle 4"/>
           <p:cNvSpPr/>
           <p:nvPr/>
         </p:nvSpPr>
         <p:spPr>
           <a:xfrm>
-            <a:off x="868680" y="1627632"/>
-            <a:ext cx="2011680" cy="73152"/>
-          </a:xfrm>
-          <a:prstGeom prst="roundRect">
+            <a:off x="0" y="0"/>
+            <a:ext cx="12191695" cy="1143000"/>
+          </a:xfrm>
+          <a:prstGeom prst="rect">
             <a:avLst/>
           </a:prstGeom>
           <a:solidFill>
@@ -6936,14 +7232,14 @@
       </p:sp>
       <p:sp>
         <p:nvSpPr>
-          <p:cNvPr id="8" name="TextBox 7"/>
+          <p:cNvPr id="6" name="TextBox 5"/>
           <p:cNvSpPr txBox="1"/>
           <p:nvPr/>
         </p:nvSpPr>
         <p:spPr>
           <a:xfrm>
-            <a:off x="822960" y="1965960"/>
-            <a:ext cx="4983480" cy="4206240"/>
+            <a:off x="822960" y="274320"/>
+            <a:ext cx="10515600" cy="640080"/>
           </a:xfrm>
           <a:prstGeom prst="rect">
             <a:avLst/>
@@ -6956,117 +7252,62 @@
           </a:bodyPr>
           <a:lstStyle/>
           <a:p>
-            <a:pPr>
-              <a:spcAft>
-                <a:spcPts val="1100"/>
-              </a:spcAft>
-            </a:pPr>
-            <a:r>
-              <a:rPr sz="1600" b="1" i="0">
-                <a:solidFill>
-                  <a:srgbClr val="E8801A"/>
-                </a:solidFill>
-                <a:latin typeface="Montserrat"/>
-              </a:rPr>
-              <a:t>▸  </a:t>
-            </a:r>
-            <a:r>
-              <a:rPr sz="1600" b="0" i="0">
-                <a:solidFill>
-                  <a:srgbClr val="1B2330"/>
-                </a:solidFill>
-                <a:latin typeface="Montserrat"/>
-              </a:rPr>
-              <a:t>Análisis de humos y CO ambiente</a:t>
-            </a:r>
-          </a:p>
-          <a:p>
-            <a:pPr>
-              <a:spcAft>
-                <a:spcPts val="1100"/>
-              </a:spcAft>
-            </a:pPr>
-            <a:r>
-              <a:rPr sz="1600" b="1" i="0">
-                <a:solidFill>
-                  <a:srgbClr val="E8801A"/>
-                </a:solidFill>
-                <a:latin typeface="Montserrat"/>
-              </a:rPr>
-              <a:t>▸  </a:t>
-            </a:r>
-            <a:r>
-              <a:rPr sz="1600" b="0" i="0">
-                <a:solidFill>
-                  <a:srgbClr val="1B2330"/>
-                </a:solidFill>
-                <a:latin typeface="Montserrat"/>
-              </a:rPr>
-              <a:t>Rendimiento e inquemados</a:t>
-            </a:r>
-          </a:p>
-          <a:p>
-            <a:pPr>
-              <a:spcAft>
-                <a:spcPts val="1100"/>
-              </a:spcAft>
-            </a:pPr>
-            <a:r>
-              <a:rPr sz="1600" b="1" i="0">
-                <a:solidFill>
-                  <a:srgbClr val="E8801A"/>
-                </a:solidFill>
-                <a:latin typeface="Montserrat"/>
-              </a:rPr>
-              <a:t>▸  </a:t>
-            </a:r>
-            <a:r>
-              <a:rPr sz="1600" b="0" i="0">
-                <a:solidFill>
-                  <a:srgbClr val="1B2330"/>
-                </a:solidFill>
-                <a:latin typeface="Montserrat"/>
-              </a:rPr>
-              <a:t>Seguridad: cortatiro y termopar</a:t>
-            </a:r>
-          </a:p>
-          <a:p>
-            <a:pPr>
-              <a:spcAft>
-                <a:spcPts val="1100"/>
-              </a:spcAft>
-            </a:pPr>
-            <a:r>
-              <a:rPr sz="1600" b="1" i="0">
-                <a:solidFill>
-                  <a:srgbClr val="E8801A"/>
-                </a:solidFill>
-                <a:latin typeface="Montserrat"/>
-              </a:rPr>
-              <a:t>▸  </a:t>
-            </a:r>
-            <a:r>
-              <a:rPr sz="1600" b="0" i="0">
-                <a:solidFill>
-                  <a:srgbClr val="1B2330"/>
-                </a:solidFill>
-                <a:latin typeface="Montserrat"/>
-              </a:rPr>
-              <a:t>Averías de calentadores y calderas</a:t>
-            </a:r>
-          </a:p>
-        </p:txBody>
-      </p:sp>
-      <p:sp>
-        <p:nvSpPr>
-          <p:cNvPr id="9" name="imgph" descr="IMGQ:technician measuring boiler flue gases with analyzer"/>
+            <a:r>
+              <a:rPr sz="2400" b="1" i="0">
+                <a:solidFill>
+                  <a:srgbClr val="FFFFFF"/>
+                </a:solidFill>
+                <a:latin typeface="Montserrat"/>
+              </a:rPr>
+              <a:t>⚡  PREGUNTA RÁPIDA</a:t>
+            </a:r>
+          </a:p>
+        </p:txBody>
+      </p:sp>
+      <p:sp>
+        <p:nvSpPr>
+          <p:cNvPr id="7" name="TextBox 6"/>
+          <p:cNvSpPr txBox="1"/>
+          <p:nvPr/>
+        </p:nvSpPr>
+        <p:spPr>
+          <a:xfrm>
+            <a:off x="822960" y="1508760"/>
+            <a:ext cx="10515600" cy="1371600"/>
+          </a:xfrm>
+          <a:prstGeom prst="rect">
+            <a:avLst/>
+          </a:prstGeom>
+          <a:noFill/>
+        </p:spPr>
+        <p:txBody>
+          <a:bodyPr wrap="square">
+            <a:spAutoFit/>
+          </a:bodyPr>
+          <a:lstStyle/>
+          <a:p>
+            <a:r>
+              <a:rPr sz="2400" b="1" i="0">
+                <a:solidFill>
+                  <a:srgbClr val="1E2761"/>
+                </a:solidFill>
+                <a:latin typeface="Montserrat"/>
+              </a:rPr>
+              <a:t>Para adecuar un aparato por cambio de familia de gas (4.2), ¿qué parte del anexo 2 se exige y a qué categorías?</a:t>
+            </a:r>
+          </a:p>
+        </p:txBody>
+      </p:sp>
+      <p:sp>
+        <p:nvSpPr>
+          <p:cNvPr id="8" name="Rounded Rectangle 7"/>
           <p:cNvSpPr/>
           <p:nvPr/>
         </p:nvSpPr>
         <p:spPr>
           <a:xfrm>
-            <a:off x="5806440" y="1051560"/>
-            <a:ext cx="5298947" cy="4629150"/>
+            <a:off x="822960" y="3291840"/>
+            <a:ext cx="4983480" cy="1143000"/>
           </a:xfrm>
           <a:prstGeom prst="roundRect">
             <a:avLst/>
@@ -7105,14 +7346,58 @@
       </p:sp>
       <p:sp>
         <p:nvSpPr>
+          <p:cNvPr id="9" name="Rectangle 8"/>
+          <p:cNvSpPr/>
+          <p:nvPr/>
+        </p:nvSpPr>
+        <p:spPr>
+          <a:xfrm>
+            <a:off x="822960" y="3291840"/>
+            <a:ext cx="640080" cy="1143000"/>
+          </a:xfrm>
+          <a:prstGeom prst="rect">
+            <a:avLst/>
+          </a:prstGeom>
+          <a:solidFill>
+            <a:srgbClr val="1E2761"/>
+          </a:solidFill>
+          <a:ln>
+            <a:noFill/>
+          </a:ln>
+          <a:effectLst/>
+        </p:spPr>
+        <p:style>
+          <a:lnRef idx="1">
+            <a:schemeClr val="accent1"/>
+          </a:lnRef>
+          <a:fillRef idx="3">
+            <a:schemeClr val="accent1"/>
+          </a:fillRef>
+          <a:effectRef idx="2">
+            <a:schemeClr val="accent1"/>
+          </a:effectRef>
+          <a:fontRef idx="minor">
+            <a:schemeClr val="lt1"/>
+          </a:fontRef>
+        </p:style>
+        <p:txBody>
+          <a:bodyPr rtlCol="0" anchor="ctr"/>
+          <a:lstStyle/>
+          <a:p>
+            <a:pPr algn="ctr"/>
+          </a:p>
+        </p:txBody>
+      </p:sp>
+      <p:sp>
+        <p:nvSpPr>
           <p:cNvPr id="10" name="TextBox 9"/>
           <p:cNvSpPr txBox="1"/>
           <p:nvPr/>
         </p:nvSpPr>
         <p:spPr>
           <a:xfrm>
-            <a:off x="6080760" y="2726055"/>
-            <a:ext cx="4750307" cy="1280160"/>
+            <a:off x="822960" y="3611880"/>
+            <a:ext cx="640080" cy="548640"/>
           </a:xfrm>
           <a:prstGeom prst="rect">
             <a:avLst/>
@@ -7127,25 +7412,524 @@
           <a:p>
             <a:pPr algn="ctr"/>
             <a:r>
-              <a:rPr sz="1400" b="1" i="0">
-                <a:solidFill>
-                  <a:srgbClr val="64748B"/>
-                </a:solidFill>
-                <a:latin typeface="Montserrat"/>
-              </a:rPr>
-              <a:t>IMAGEN REALISTA</a:t>
-            </a:r>
-          </a:p>
+              <a:rPr sz="2200" b="1" i="0">
+                <a:solidFill>
+                  <a:srgbClr val="FFFFFF"/>
+                </a:solidFill>
+                <a:latin typeface="Montserrat"/>
+              </a:rPr>
+              <a:t>A</a:t>
+            </a:r>
+          </a:p>
+        </p:txBody>
+      </p:sp>
+      <p:sp>
+        <p:nvSpPr>
+          <p:cNvPr id="11" name="TextBox 10"/>
+          <p:cNvSpPr txBox="1"/>
+          <p:nvPr/>
+        </p:nvSpPr>
+        <p:spPr>
+          <a:xfrm>
+            <a:off x="1600200" y="3474720"/>
+            <a:ext cx="4114800" cy="868680"/>
+          </a:xfrm>
+          <a:prstGeom prst="rect">
+            <a:avLst/>
+          </a:prstGeom>
+          <a:noFill/>
+        </p:spPr>
+        <p:txBody>
+          <a:bodyPr wrap="square">
+            <a:spAutoFit/>
+          </a:bodyPr>
+          <a:lstStyle/>
+          <a:p>
+            <a:r>
+              <a:rPr sz="1400" b="0" i="0">
+                <a:solidFill>
+                  <a:srgbClr val="1B2330"/>
+                </a:solidFill>
+                <a:latin typeface="Montserrat"/>
+              </a:rPr>
+              <a:t>El anexo 2 completo (1 a 18), solo A y B</a:t>
+            </a:r>
+          </a:p>
+        </p:txBody>
+      </p:sp>
+      <p:sp>
+        <p:nvSpPr>
+          <p:cNvPr id="12" name="Rounded Rectangle 11"/>
+          <p:cNvSpPr/>
+          <p:nvPr/>
+        </p:nvSpPr>
+        <p:spPr>
+          <a:xfrm>
+            <a:off x="6355080" y="3291840"/>
+            <a:ext cx="4983480" cy="1143000"/>
+          </a:xfrm>
+          <a:prstGeom prst="roundRect">
+            <a:avLst/>
+          </a:prstGeom>
+          <a:solidFill>
+            <a:srgbClr val="F3F6FB"/>
+          </a:solidFill>
+          <a:ln w="12700">
+            <a:solidFill>
+              <a:srgbClr val="C7D2E6"/>
+            </a:solidFill>
+          </a:ln>
+          <a:effectLst/>
+        </p:spPr>
+        <p:style>
+          <a:lnRef idx="1">
+            <a:schemeClr val="accent1"/>
+          </a:lnRef>
+          <a:fillRef idx="3">
+            <a:schemeClr val="accent1"/>
+          </a:fillRef>
+          <a:effectRef idx="2">
+            <a:schemeClr val="accent1"/>
+          </a:effectRef>
+          <a:fontRef idx="minor">
+            <a:schemeClr val="lt1"/>
+          </a:fontRef>
+        </p:style>
+        <p:txBody>
+          <a:bodyPr rtlCol="0" anchor="ctr"/>
+          <a:lstStyle/>
           <a:p>
             <a:pPr algn="ctr"/>
-            <a:r>
-              <a:rPr sz="1100" b="0" i="1">
-                <a:solidFill>
-                  <a:srgbClr val="64748B"/>
-                </a:solidFill>
-                <a:latin typeface="Montserrat"/>
-              </a:rPr>
-              <a:t>technician measuring boiler flue gases with analyzer</a:t>
+          </a:p>
+        </p:txBody>
+      </p:sp>
+      <p:sp>
+        <p:nvSpPr>
+          <p:cNvPr id="13" name="Rectangle 12"/>
+          <p:cNvSpPr/>
+          <p:nvPr/>
+        </p:nvSpPr>
+        <p:spPr>
+          <a:xfrm>
+            <a:off x="6355080" y="3291840"/>
+            <a:ext cx="640080" cy="1143000"/>
+          </a:xfrm>
+          <a:prstGeom prst="rect">
+            <a:avLst/>
+          </a:prstGeom>
+          <a:solidFill>
+            <a:srgbClr val="1E2761"/>
+          </a:solidFill>
+          <a:ln>
+            <a:noFill/>
+          </a:ln>
+          <a:effectLst/>
+        </p:spPr>
+        <p:style>
+          <a:lnRef idx="1">
+            <a:schemeClr val="accent1"/>
+          </a:lnRef>
+          <a:fillRef idx="3">
+            <a:schemeClr val="accent1"/>
+          </a:fillRef>
+          <a:effectRef idx="2">
+            <a:schemeClr val="accent1"/>
+          </a:effectRef>
+          <a:fontRef idx="minor">
+            <a:schemeClr val="lt1"/>
+          </a:fontRef>
+        </p:style>
+        <p:txBody>
+          <a:bodyPr rtlCol="0" anchor="ctr"/>
+          <a:lstStyle/>
+          <a:p>
+            <a:pPr algn="ctr"/>
+          </a:p>
+        </p:txBody>
+      </p:sp>
+      <p:sp>
+        <p:nvSpPr>
+          <p:cNvPr id="14" name="TextBox 13"/>
+          <p:cNvSpPr txBox="1"/>
+          <p:nvPr/>
+        </p:nvSpPr>
+        <p:spPr>
+          <a:xfrm>
+            <a:off x="6355080" y="3611880"/>
+            <a:ext cx="640080" cy="548640"/>
+          </a:xfrm>
+          <a:prstGeom prst="rect">
+            <a:avLst/>
+          </a:prstGeom>
+          <a:noFill/>
+        </p:spPr>
+        <p:txBody>
+          <a:bodyPr wrap="square">
+            <a:spAutoFit/>
+          </a:bodyPr>
+          <a:lstStyle/>
+          <a:p>
+            <a:pPr algn="ctr"/>
+            <a:r>
+              <a:rPr sz="2200" b="1" i="0">
+                <a:solidFill>
+                  <a:srgbClr val="FFFFFF"/>
+                </a:solidFill>
+                <a:latin typeface="Montserrat"/>
+              </a:rPr>
+              <a:t>B</a:t>
+            </a:r>
+          </a:p>
+        </p:txBody>
+      </p:sp>
+      <p:sp>
+        <p:nvSpPr>
+          <p:cNvPr id="15" name="TextBox 14"/>
+          <p:cNvSpPr txBox="1"/>
+          <p:nvPr/>
+        </p:nvSpPr>
+        <p:spPr>
+          <a:xfrm>
+            <a:off x="7132320" y="3474720"/>
+            <a:ext cx="4114800" cy="868680"/>
+          </a:xfrm>
+          <a:prstGeom prst="rect">
+            <a:avLst/>
+          </a:prstGeom>
+          <a:noFill/>
+        </p:spPr>
+        <p:txBody>
+          <a:bodyPr wrap="square">
+            <a:spAutoFit/>
+          </a:bodyPr>
+          <a:lstStyle/>
+          <a:p>
+            <a:r>
+              <a:rPr sz="1400" b="0" i="0">
+                <a:solidFill>
+                  <a:srgbClr val="1B2330"/>
+                </a:solidFill>
+                <a:latin typeface="Montserrat"/>
+              </a:rPr>
+              <a:t>Los apartados 1 a 17, solo A y B</a:t>
+            </a:r>
+          </a:p>
+        </p:txBody>
+      </p:sp>
+      <p:sp>
+        <p:nvSpPr>
+          <p:cNvPr id="16" name="Rounded Rectangle 15"/>
+          <p:cNvSpPr/>
+          <p:nvPr/>
+        </p:nvSpPr>
+        <p:spPr>
+          <a:xfrm>
+            <a:off x="822960" y="4617720"/>
+            <a:ext cx="4983480" cy="1143000"/>
+          </a:xfrm>
+          <a:prstGeom prst="roundRect">
+            <a:avLst/>
+          </a:prstGeom>
+          <a:solidFill>
+            <a:srgbClr val="F3F6FB"/>
+          </a:solidFill>
+          <a:ln w="12700">
+            <a:solidFill>
+              <a:srgbClr val="C7D2E6"/>
+            </a:solidFill>
+          </a:ln>
+          <a:effectLst/>
+        </p:spPr>
+        <p:style>
+          <a:lnRef idx="1">
+            <a:schemeClr val="accent1"/>
+          </a:lnRef>
+          <a:fillRef idx="3">
+            <a:schemeClr val="accent1"/>
+          </a:fillRef>
+          <a:effectRef idx="2">
+            <a:schemeClr val="accent1"/>
+          </a:effectRef>
+          <a:fontRef idx="minor">
+            <a:schemeClr val="lt1"/>
+          </a:fontRef>
+        </p:style>
+        <p:txBody>
+          <a:bodyPr rtlCol="0" anchor="ctr"/>
+          <a:lstStyle/>
+          <a:p>
+            <a:pPr algn="ctr"/>
+          </a:p>
+        </p:txBody>
+      </p:sp>
+      <p:sp>
+        <p:nvSpPr>
+          <p:cNvPr id="17" name="Rectangle 16"/>
+          <p:cNvSpPr/>
+          <p:nvPr/>
+        </p:nvSpPr>
+        <p:spPr>
+          <a:xfrm>
+            <a:off x="822960" y="4617720"/>
+            <a:ext cx="640080" cy="1143000"/>
+          </a:xfrm>
+          <a:prstGeom prst="rect">
+            <a:avLst/>
+          </a:prstGeom>
+          <a:solidFill>
+            <a:srgbClr val="1E2761"/>
+          </a:solidFill>
+          <a:ln>
+            <a:noFill/>
+          </a:ln>
+          <a:effectLst/>
+        </p:spPr>
+        <p:style>
+          <a:lnRef idx="1">
+            <a:schemeClr val="accent1"/>
+          </a:lnRef>
+          <a:fillRef idx="3">
+            <a:schemeClr val="accent1"/>
+          </a:fillRef>
+          <a:effectRef idx="2">
+            <a:schemeClr val="accent1"/>
+          </a:effectRef>
+          <a:fontRef idx="minor">
+            <a:schemeClr val="lt1"/>
+          </a:fontRef>
+        </p:style>
+        <p:txBody>
+          <a:bodyPr rtlCol="0" anchor="ctr"/>
+          <a:lstStyle/>
+          <a:p>
+            <a:pPr algn="ctr"/>
+          </a:p>
+        </p:txBody>
+      </p:sp>
+      <p:sp>
+        <p:nvSpPr>
+          <p:cNvPr id="18" name="TextBox 17"/>
+          <p:cNvSpPr txBox="1"/>
+          <p:nvPr/>
+        </p:nvSpPr>
+        <p:spPr>
+          <a:xfrm>
+            <a:off x="822960" y="4937760"/>
+            <a:ext cx="640080" cy="548640"/>
+          </a:xfrm>
+          <a:prstGeom prst="rect">
+            <a:avLst/>
+          </a:prstGeom>
+          <a:noFill/>
+        </p:spPr>
+        <p:txBody>
+          <a:bodyPr wrap="square">
+            <a:spAutoFit/>
+          </a:bodyPr>
+          <a:lstStyle/>
+          <a:p>
+            <a:pPr algn="ctr"/>
+            <a:r>
+              <a:rPr sz="2200" b="1" i="0">
+                <a:solidFill>
+                  <a:srgbClr val="FFFFFF"/>
+                </a:solidFill>
+                <a:latin typeface="Montserrat"/>
+              </a:rPr>
+              <a:t>C</a:t>
+            </a:r>
+          </a:p>
+        </p:txBody>
+      </p:sp>
+      <p:sp>
+        <p:nvSpPr>
+          <p:cNvPr id="19" name="TextBox 18"/>
+          <p:cNvSpPr txBox="1"/>
+          <p:nvPr/>
+        </p:nvSpPr>
+        <p:spPr>
+          <a:xfrm>
+            <a:off x="1600200" y="4800600"/>
+            <a:ext cx="4114800" cy="868680"/>
+          </a:xfrm>
+          <a:prstGeom prst="rect">
+            <a:avLst/>
+          </a:prstGeom>
+          <a:noFill/>
+        </p:spPr>
+        <p:txBody>
+          <a:bodyPr wrap="square">
+            <a:spAutoFit/>
+          </a:bodyPr>
+          <a:lstStyle/>
+          <a:p>
+            <a:r>
+              <a:rPr sz="1400" b="0" i="0">
+                <a:solidFill>
+                  <a:srgbClr val="1B2330"/>
+                </a:solidFill>
+                <a:latin typeface="Montserrat"/>
+              </a:rPr>
+              <a:t>El anexo 2 completo, las tres categorías</a:t>
+            </a:r>
+          </a:p>
+        </p:txBody>
+      </p:sp>
+      <p:sp>
+        <p:nvSpPr>
+          <p:cNvPr id="20" name="Rounded Rectangle 19"/>
+          <p:cNvSpPr/>
+          <p:nvPr/>
+        </p:nvSpPr>
+        <p:spPr>
+          <a:xfrm>
+            <a:off x="6355080" y="4617720"/>
+            <a:ext cx="4983480" cy="1143000"/>
+          </a:xfrm>
+          <a:prstGeom prst="roundRect">
+            <a:avLst/>
+          </a:prstGeom>
+          <a:solidFill>
+            <a:srgbClr val="F3F6FB"/>
+          </a:solidFill>
+          <a:ln w="12700">
+            <a:solidFill>
+              <a:srgbClr val="C7D2E6"/>
+            </a:solidFill>
+          </a:ln>
+          <a:effectLst/>
+        </p:spPr>
+        <p:style>
+          <a:lnRef idx="1">
+            <a:schemeClr val="accent1"/>
+          </a:lnRef>
+          <a:fillRef idx="3">
+            <a:schemeClr val="accent1"/>
+          </a:fillRef>
+          <a:effectRef idx="2">
+            <a:schemeClr val="accent1"/>
+          </a:effectRef>
+          <a:fontRef idx="minor">
+            <a:schemeClr val="lt1"/>
+          </a:fontRef>
+        </p:style>
+        <p:txBody>
+          <a:bodyPr rtlCol="0" anchor="ctr"/>
+          <a:lstStyle/>
+          <a:p>
+            <a:pPr algn="ctr"/>
+          </a:p>
+        </p:txBody>
+      </p:sp>
+      <p:sp>
+        <p:nvSpPr>
+          <p:cNvPr id="21" name="Rectangle 20"/>
+          <p:cNvSpPr/>
+          <p:nvPr/>
+        </p:nvSpPr>
+        <p:spPr>
+          <a:xfrm>
+            <a:off x="6355080" y="4617720"/>
+            <a:ext cx="640080" cy="1143000"/>
+          </a:xfrm>
+          <a:prstGeom prst="rect">
+            <a:avLst/>
+          </a:prstGeom>
+          <a:solidFill>
+            <a:srgbClr val="1E2761"/>
+          </a:solidFill>
+          <a:ln>
+            <a:noFill/>
+          </a:ln>
+          <a:effectLst/>
+        </p:spPr>
+        <p:style>
+          <a:lnRef idx="1">
+            <a:schemeClr val="accent1"/>
+          </a:lnRef>
+          <a:fillRef idx="3">
+            <a:schemeClr val="accent1"/>
+          </a:fillRef>
+          <a:effectRef idx="2">
+            <a:schemeClr val="accent1"/>
+          </a:effectRef>
+          <a:fontRef idx="minor">
+            <a:schemeClr val="lt1"/>
+          </a:fontRef>
+        </p:style>
+        <p:txBody>
+          <a:bodyPr rtlCol="0" anchor="ctr"/>
+          <a:lstStyle/>
+          <a:p>
+            <a:pPr algn="ctr"/>
+          </a:p>
+        </p:txBody>
+      </p:sp>
+      <p:sp>
+        <p:nvSpPr>
+          <p:cNvPr id="22" name="TextBox 21"/>
+          <p:cNvSpPr txBox="1"/>
+          <p:nvPr/>
+        </p:nvSpPr>
+        <p:spPr>
+          <a:xfrm>
+            <a:off x="6355080" y="4937760"/>
+            <a:ext cx="640080" cy="548640"/>
+          </a:xfrm>
+          <a:prstGeom prst="rect">
+            <a:avLst/>
+          </a:prstGeom>
+          <a:noFill/>
+        </p:spPr>
+        <p:txBody>
+          <a:bodyPr wrap="square">
+            <a:spAutoFit/>
+          </a:bodyPr>
+          <a:lstStyle/>
+          <a:p>
+            <a:pPr algn="ctr"/>
+            <a:r>
+              <a:rPr sz="2200" b="1" i="0">
+                <a:solidFill>
+                  <a:srgbClr val="FFFFFF"/>
+                </a:solidFill>
+                <a:latin typeface="Montserrat"/>
+              </a:rPr>
+              <a:t>D</a:t>
+            </a:r>
+          </a:p>
+        </p:txBody>
+      </p:sp>
+      <p:sp>
+        <p:nvSpPr>
+          <p:cNvPr id="23" name="TextBox 22"/>
+          <p:cNvSpPr txBox="1"/>
+          <p:nvPr/>
+        </p:nvSpPr>
+        <p:spPr>
+          <a:xfrm>
+            <a:off x="7132320" y="4800600"/>
+            <a:ext cx="4114800" cy="868680"/>
+          </a:xfrm>
+          <a:prstGeom prst="rect">
+            <a:avLst/>
+          </a:prstGeom>
+          <a:noFill/>
+        </p:spPr>
+        <p:txBody>
+          <a:bodyPr wrap="square">
+            <a:spAutoFit/>
+          </a:bodyPr>
+          <a:lstStyle/>
+          <a:p>
+            <a:r>
+              <a:rPr sz="1400" b="0" i="0">
+                <a:solidFill>
+                  <a:srgbClr val="1B2330"/>
+                </a:solidFill>
+                <a:latin typeface="Montserrat"/>
+              </a:rPr>
+              <a:t>Los apartados 1 a 17, las tres categorías</a:t>
             </a:r>
           </a:p>
         </p:txBody>
@@ -7155,6 +7939,18 @@
   <p:clrMapOvr>
     <a:masterClrMapping/>
   </p:clrMapOvr>
+  <mc:AlternateContent xmlns:mc="http://schemas.openxmlformats.org/markup-compatibility/2006">
+    <mc:Choice xmlns:p14="http://schemas.microsoft.com/office/powerpoint/2010/main" Requires="p14">
+      <p:transition spd="med" p14:dur="700">
+        <p14:cube dir="r"/>
+      </p:transition>
+    </mc:Choice>
+    <mc:Fallback>
+      <p:transition spd="med">
+        <p:push dir="r"/>
+      </p:transition>
+    </mc:Fallback>
+  </mc:AlternateContent>
 </p:sld>
 </file>
 
@@ -7242,7 +8038,7 @@
                 </a:solidFill>
                 <a:latin typeface="Montserrat"/>
               </a:rPr>
-              <a:t>015 / 016</a:t>
+              <a:t>015 / 020</a:t>
             </a:r>
           </a:p>
         </p:txBody>
@@ -7283,88 +8079,20 @@
       </p:sp>
       <p:sp>
         <p:nvSpPr>
-          <p:cNvPr id="5" name="TextBox 4"/>
-          <p:cNvSpPr txBox="1"/>
-          <p:nvPr/>
-        </p:nvSpPr>
-        <p:spPr>
-          <a:xfrm>
-            <a:off x="822960" y="457200"/>
-            <a:ext cx="10058400" cy="365760"/>
-          </a:xfrm>
-          <a:prstGeom prst="rect">
-            <a:avLst/>
-          </a:prstGeom>
-          <a:noFill/>
-        </p:spPr>
-        <p:txBody>
-          <a:bodyPr wrap="square">
-            <a:spAutoFit/>
-          </a:bodyPr>
-          <a:lstStyle/>
-          <a:p>
-            <a:r>
-              <a:rPr sz="1300" b="1" i="0">
-                <a:solidFill>
-                  <a:srgbClr val="E8801A"/>
-                </a:solidFill>
-                <a:latin typeface="Montserrat"/>
-              </a:rPr>
-              <a:t>TRAMPA CLÁSICA</a:t>
-            </a:r>
-          </a:p>
-        </p:txBody>
-      </p:sp>
-      <p:sp>
-        <p:nvSpPr>
-          <p:cNvPr id="6" name="TextBox 5"/>
-          <p:cNvSpPr txBox="1"/>
-          <p:nvPr/>
-        </p:nvSpPr>
-        <p:spPr>
-          <a:xfrm>
-            <a:off x="822960" y="868680"/>
-            <a:ext cx="10515600" cy="914400"/>
-          </a:xfrm>
-          <a:prstGeom prst="rect">
-            <a:avLst/>
-          </a:prstGeom>
-          <a:noFill/>
-        </p:spPr>
-        <p:txBody>
-          <a:bodyPr wrap="square">
-            <a:spAutoFit/>
-          </a:bodyPr>
-          <a:lstStyle/>
-          <a:p>
-            <a:r>
-              <a:rPr sz="2800" b="1" i="0">
-                <a:solidFill>
-                  <a:srgbClr val="1E2761"/>
-                </a:solidFill>
-                <a:latin typeface="Montserrat"/>
-              </a:rPr>
-              <a:t>Tipos de aparato ≠ categorías</a:t>
-            </a:r>
-          </a:p>
-        </p:txBody>
-      </p:sp>
-      <p:sp>
-        <p:nvSpPr>
-          <p:cNvPr id="7" name="Rounded Rectangle 6"/>
+          <p:cNvPr id="5" name="Rectangle 4"/>
           <p:cNvSpPr/>
           <p:nvPr/>
         </p:nvSpPr>
         <p:spPr>
           <a:xfrm>
-            <a:off x="868680" y="1627632"/>
-            <a:ext cx="2011680" cy="73152"/>
-          </a:xfrm>
-          <a:prstGeom prst="roundRect">
+            <a:off x="0" y="0"/>
+            <a:ext cx="12191695" cy="1143000"/>
+          </a:xfrm>
+          <a:prstGeom prst="rect">
             <a:avLst/>
           </a:prstGeom>
           <a:solidFill>
-            <a:srgbClr val="E8801A"/>
+            <a:srgbClr val="1E8E4B"/>
           </a:solidFill>
           <a:ln>
             <a:noFill/>
@@ -7395,14 +8123,14 @@
       </p:sp>
       <p:sp>
         <p:nvSpPr>
-          <p:cNvPr id="8" name="TextBox 7"/>
+          <p:cNvPr id="6" name="TextBox 5"/>
           <p:cNvSpPr txBox="1"/>
           <p:nvPr/>
         </p:nvSpPr>
         <p:spPr>
           <a:xfrm>
-            <a:off x="822960" y="1965960"/>
-            <a:ext cx="4983480" cy="4206240"/>
+            <a:off x="822960" y="274320"/>
+            <a:ext cx="10515600" cy="640080"/>
           </a:xfrm>
           <a:prstGeom prst="rect">
             <a:avLst/>
@@ -7415,127 +8143,72 @@
           </a:bodyPr>
           <a:lstStyle/>
           <a:p>
-            <a:pPr>
-              <a:spcAft>
-                <a:spcPts val="1100"/>
-              </a:spcAft>
-            </a:pPr>
-            <a:r>
-              <a:rPr sz="1600" b="1" i="0">
-                <a:solidFill>
-                  <a:srgbClr val="E8801A"/>
-                </a:solidFill>
-                <a:latin typeface="Montserrat"/>
-              </a:rPr>
-              <a:t>▸  </a:t>
-            </a:r>
-            <a:r>
-              <a:rPr sz="1600" b="0" i="0">
-                <a:solidFill>
-                  <a:srgbClr val="1B2330"/>
-                </a:solidFill>
-                <a:latin typeface="Montserrat"/>
-              </a:rPr>
-              <a:t>Tipo A: no conducido (humos al local)</a:t>
-            </a:r>
-          </a:p>
-          <a:p>
-            <a:pPr>
-              <a:spcAft>
-                <a:spcPts val="1100"/>
-              </a:spcAft>
-            </a:pPr>
-            <a:r>
-              <a:rPr sz="1600" b="1" i="0">
-                <a:solidFill>
-                  <a:srgbClr val="E8801A"/>
-                </a:solidFill>
-                <a:latin typeface="Montserrat"/>
-              </a:rPr>
-              <a:t>▸  </a:t>
-            </a:r>
-            <a:r>
-              <a:rPr sz="1600" b="0" i="0">
-                <a:solidFill>
-                  <a:srgbClr val="1B2330"/>
-                </a:solidFill>
-                <a:latin typeface="Montserrat"/>
-              </a:rPr>
-              <a:t>Tipo B: conducido, toma aire del local</a:t>
-            </a:r>
-          </a:p>
-          <a:p>
-            <a:pPr>
-              <a:spcAft>
-                <a:spcPts val="1100"/>
-              </a:spcAft>
-            </a:pPr>
-            <a:r>
-              <a:rPr sz="1600" b="1" i="0">
-                <a:solidFill>
-                  <a:srgbClr val="E8801A"/>
-                </a:solidFill>
-                <a:latin typeface="Montserrat"/>
-              </a:rPr>
-              <a:t>▸  </a:t>
-            </a:r>
-            <a:r>
-              <a:rPr sz="1600" b="0" i="0">
-                <a:solidFill>
-                  <a:srgbClr val="1B2330"/>
-                </a:solidFill>
-                <a:latin typeface="Montserrat"/>
-              </a:rPr>
-              <a:t>Tipo C: estanco, circuito con el exterior</a:t>
-            </a:r>
-          </a:p>
-          <a:p>
-            <a:pPr>
-              <a:spcAft>
-                <a:spcPts val="1100"/>
-              </a:spcAft>
-            </a:pPr>
-            <a:r>
-              <a:rPr sz="1600" b="1" i="0">
-                <a:solidFill>
-                  <a:srgbClr val="E8801A"/>
-                </a:solidFill>
-                <a:latin typeface="Montserrat"/>
-              </a:rPr>
-              <a:t>▸  </a:t>
-            </a:r>
-            <a:r>
-              <a:rPr sz="1600" b="0" i="0">
-                <a:solidFill>
-                  <a:srgbClr val="1B2330"/>
-                </a:solidFill>
-                <a:latin typeface="Montserrat"/>
-              </a:rPr>
-              <a:t>No son las categorías del instalador</a:t>
-            </a:r>
-          </a:p>
-        </p:txBody>
-      </p:sp>
-      <p:sp>
-        <p:nvSpPr>
-          <p:cNvPr id="9" name="imgph" descr="IMGQ:sealed balanced flue gas boiler on wall"/>
+            <a:r>
+              <a:rPr sz="2400" b="1" i="0">
+                <a:solidFill>
+                  <a:srgbClr val="FFFFFF"/>
+                </a:solidFill>
+                <a:latin typeface="Montserrat"/>
+              </a:rPr>
+              <a:t>✔  RESPUESTA:  A</a:t>
+            </a:r>
+          </a:p>
+        </p:txBody>
+      </p:sp>
+      <p:sp>
+        <p:nvSpPr>
+          <p:cNvPr id="7" name="TextBox 6"/>
+          <p:cNvSpPr txBox="1"/>
+          <p:nvPr/>
+        </p:nvSpPr>
+        <p:spPr>
+          <a:xfrm>
+            <a:off x="822960" y="1417320"/>
+            <a:ext cx="10515600" cy="914400"/>
+          </a:xfrm>
+          <a:prstGeom prst="rect">
+            <a:avLst/>
+          </a:prstGeom>
+          <a:noFill/>
+        </p:spPr>
+        <p:txBody>
+          <a:bodyPr wrap="square">
+            <a:spAutoFit/>
+          </a:bodyPr>
+          <a:lstStyle/>
+          <a:p>
+            <a:r>
+              <a:rPr sz="1800" b="1" i="0">
+                <a:solidFill>
+                  <a:srgbClr val="64748B"/>
+                </a:solidFill>
+                <a:latin typeface="Montserrat"/>
+              </a:rPr>
+              <a:t>Para adecuar un aparato por cambio de familia de gas (4.2), ¿qué parte del anexo 2 se exige y a qué categorías?</a:t>
+            </a:r>
+          </a:p>
+        </p:txBody>
+      </p:sp>
+      <p:sp>
+        <p:nvSpPr>
+          <p:cNvPr id="8" name="Rounded Rectangle 7"/>
           <p:cNvSpPr/>
           <p:nvPr/>
         </p:nvSpPr>
         <p:spPr>
           <a:xfrm>
-            <a:off x="5806440" y="1051560"/>
-            <a:ext cx="5298947" cy="4629150"/>
+            <a:off x="822960" y="2514600"/>
+            <a:ext cx="10515600" cy="914400"/>
           </a:xfrm>
           <a:prstGeom prst="roundRect">
             <a:avLst/>
           </a:prstGeom>
           <a:solidFill>
-            <a:srgbClr val="F3F6FB"/>
+            <a:srgbClr val="E9F6EE"/>
           </a:solidFill>
           <a:ln w="12700">
             <a:solidFill>
-              <a:srgbClr val="C7D2E6"/>
+              <a:srgbClr val="1E8E4B"/>
             </a:solidFill>
           </a:ln>
           <a:effectLst/>
@@ -7564,14 +8237,14 @@
       </p:sp>
       <p:sp>
         <p:nvSpPr>
-          <p:cNvPr id="10" name="TextBox 9"/>
+          <p:cNvPr id="9" name="TextBox 8"/>
           <p:cNvSpPr txBox="1"/>
           <p:nvPr/>
         </p:nvSpPr>
         <p:spPr>
           <a:xfrm>
-            <a:off x="6080760" y="2726055"/>
-            <a:ext cx="4750307" cy="1280160"/>
+            <a:off x="1097280" y="2697480"/>
+            <a:ext cx="10058400" cy="640080"/>
           </a:xfrm>
           <a:prstGeom prst="rect">
             <a:avLst/>
@@ -7584,27 +8257,66 @@
           </a:bodyPr>
           <a:lstStyle/>
           <a:p>
-            <a:pPr algn="ctr"/>
-            <a:r>
-              <a:rPr sz="1400" b="1" i="0">
-                <a:solidFill>
-                  <a:srgbClr val="64748B"/>
-                </a:solidFill>
-                <a:latin typeface="Montserrat"/>
-              </a:rPr>
-              <a:t>IMAGEN REALISTA</a:t>
-            </a:r>
-          </a:p>
-          <a:p>
-            <a:pPr algn="ctr"/>
-            <a:r>
-              <a:rPr sz="1100" b="0" i="1">
-                <a:solidFill>
-                  <a:srgbClr val="64748B"/>
-                </a:solidFill>
-                <a:latin typeface="Montserrat"/>
-              </a:rPr>
-              <a:t>sealed balanced flue gas boiler on wall</a:t>
+            <a:r>
+              <a:rPr sz="1800" b="1" i="0">
+                <a:solidFill>
+                  <a:srgbClr val="1E8E4B"/>
+                </a:solidFill>
+                <a:latin typeface="Montserrat"/>
+              </a:rPr>
+              <a:t>A.  </a:t>
+            </a:r>
+            <a:r>
+              <a:rPr sz="1800" b="1" i="0">
+                <a:solidFill>
+                  <a:srgbClr val="1E2761"/>
+                </a:solidFill>
+                <a:latin typeface="Montserrat"/>
+              </a:rPr>
+              <a:t>El anexo 2 completo (1 a 18), solo A y B</a:t>
+            </a:r>
+          </a:p>
+        </p:txBody>
+      </p:sp>
+      <p:sp>
+        <p:nvSpPr>
+          <p:cNvPr id="10" name="TextBox 9"/>
+          <p:cNvSpPr txBox="1"/>
+          <p:nvPr/>
+        </p:nvSpPr>
+        <p:spPr>
+          <a:xfrm>
+            <a:off x="822960" y="3749039"/>
+            <a:ext cx="10515600" cy="2194560"/>
+          </a:xfrm>
+          <a:prstGeom prst="rect">
+            <a:avLst/>
+          </a:prstGeom>
+          <a:noFill/>
+        </p:spPr>
+        <p:txBody>
+          <a:bodyPr wrap="square">
+            <a:spAutoFit/>
+          </a:bodyPr>
+          <a:lstStyle/>
+          <a:p>
+            <a:r>
+              <a:rPr sz="1500" b="1" i="0">
+                <a:solidFill>
+                  <a:srgbClr val="E8801A"/>
+                </a:solidFill>
+                <a:latin typeface="Montserrat"/>
+              </a:rPr>
+              <a:t>Por qué:  </a:t>
+            </a:r>
+            <a:r>
+              <a:rPr sz="1500" b="0" i="0">
+                <a:solidFill>
+                  <a:srgbClr val="1B2330"/>
+                </a:solidFill>
+                <a:latin typeface="Montserrat"/>
+              </a:rPr>
+              <a:t>El 4.2 exige el anexo 2 completo porque suma el apartado 18, de adaptación a otras familias de gas, y solo lo pueden acreditar las categorías A y B.</a:t>
             </a:r>
           </a:p>
         </p:txBody>
@@ -7614,6 +8326,18 @@
   <p:clrMapOvr>
     <a:masterClrMapping/>
   </p:clrMapOvr>
+  <mc:AlternateContent xmlns:mc="http://schemas.openxmlformats.org/markup-compatibility/2006">
+    <mc:Choice xmlns:p14="http://schemas.microsoft.com/office/powerpoint/2010/main" Requires="p14">
+      <p:transition spd="med" p14:dur="700">
+        <p14:cube dir="l"/>
+      </p:transition>
+    </mc:Choice>
+    <mc:Fallback>
+      <p:transition spd="med">
+        <p:push dir="l"/>
+      </p:transition>
+    </mc:Fallback>
+  </mc:AlternateContent>
 </p:sld>
 </file>
 
@@ -7642,7 +8366,7 @@
             <a:avLst/>
           </a:prstGeom>
           <a:solidFill>
-            <a:srgbClr val="1E2761"/>
+            <a:srgbClr val="FFFFFF"/>
           </a:solidFill>
           <a:ln>
             <a:noFill/>
@@ -7679,8 +8403,8 @@
         </p:nvSpPr>
         <p:spPr>
           <a:xfrm>
-            <a:off x="822960" y="640080"/>
-            <a:ext cx="10515600" cy="457200"/>
+            <a:off x="10607040" y="320040"/>
+            <a:ext cx="1371600" cy="365760"/>
           </a:xfrm>
           <a:prstGeom prst="rect">
             <a:avLst/>
@@ -7693,30 +8417,133 @@
           </a:bodyPr>
           <a:lstStyle/>
           <a:p>
-            <a:r>
-              <a:rPr sz="1400" b="1" i="0">
-                <a:solidFill>
-                  <a:srgbClr val="F4A24C"/>
-                </a:solidFill>
-                <a:latin typeface="Montserrat"/>
-              </a:rPr>
-              <a:t>LO QUE YA DOMINAS</a:t>
-            </a:r>
-          </a:p>
-        </p:txBody>
-      </p:sp>
-      <p:sp>
-        <p:nvSpPr>
-          <p:cNvPr id="4" name="Rounded Rectangle 3"/>
+            <a:pPr algn="r"/>
+            <a:r>
+              <a:rPr sz="1000" b="1" i="0">
+                <a:solidFill>
+                  <a:srgbClr val="64748B"/>
+                </a:solidFill>
+                <a:latin typeface="Montserrat"/>
+              </a:rPr>
+              <a:t>016 / 020</a:t>
+            </a:r>
+          </a:p>
+        </p:txBody>
+      </p:sp>
+      <p:sp>
+        <p:nvSpPr>
+          <p:cNvPr id="4" name="TextBox 3"/>
+          <p:cNvSpPr txBox="1"/>
+          <p:nvPr/>
+        </p:nvSpPr>
+        <p:spPr>
+          <a:xfrm>
+            <a:off x="457200" y="6419088"/>
+            <a:ext cx="8229600" cy="365760"/>
+          </a:xfrm>
+          <a:prstGeom prst="rect">
+            <a:avLst/>
+          </a:prstGeom>
+          <a:noFill/>
+        </p:spPr>
+        <p:txBody>
+          <a:bodyPr wrap="square">
+            <a:spAutoFit/>
+          </a:bodyPr>
+          <a:lstStyle/>
+          <a:p>
+            <a:r>
+              <a:rPr sz="900" b="0" i="0">
+                <a:solidFill>
+                  <a:srgbClr val="64748B"/>
+                </a:solidFill>
+                <a:latin typeface="Montserrat"/>
+              </a:rPr>
+              <a:t>Curso Gas B · Tema 06 · Instaladores y empresas instaladoras</a:t>
+            </a:r>
+          </a:p>
+        </p:txBody>
+      </p:sp>
+      <p:sp>
+        <p:nvSpPr>
+          <p:cNvPr id="5" name="TextBox 4"/>
+          <p:cNvSpPr txBox="1"/>
+          <p:nvPr/>
+        </p:nvSpPr>
+        <p:spPr>
+          <a:xfrm>
+            <a:off x="822960" y="457200"/>
+            <a:ext cx="10058400" cy="365760"/>
+          </a:xfrm>
+          <a:prstGeom prst="rect">
+            <a:avLst/>
+          </a:prstGeom>
+          <a:noFill/>
+        </p:spPr>
+        <p:txBody>
+          <a:bodyPr wrap="square">
+            <a:spAutoFit/>
+          </a:bodyPr>
+          <a:lstStyle/>
+          <a:p>
+            <a:r>
+              <a:rPr sz="1300" b="1" i="0">
+                <a:solidFill>
+                  <a:srgbClr val="E8801A"/>
+                </a:solidFill>
+                <a:latin typeface="Montserrat"/>
+              </a:rPr>
+              <a:t>ANEXO 2 · EN LA PRÁCTICA</a:t>
+            </a:r>
+          </a:p>
+        </p:txBody>
+      </p:sp>
+      <p:sp>
+        <p:nvSpPr>
+          <p:cNvPr id="6" name="TextBox 5"/>
+          <p:cNvSpPr txBox="1"/>
+          <p:nvPr/>
+        </p:nvSpPr>
+        <p:spPr>
+          <a:xfrm>
+            <a:off x="822960" y="868680"/>
+            <a:ext cx="10515600" cy="914400"/>
+          </a:xfrm>
+          <a:prstGeom prst="rect">
+            <a:avLst/>
+          </a:prstGeom>
+          <a:noFill/>
+        </p:spPr>
+        <p:txBody>
+          <a:bodyPr wrap="square">
+            <a:spAutoFit/>
+          </a:bodyPr>
+          <a:lstStyle/>
+          <a:p>
+            <a:r>
+              <a:rPr sz="2800" b="1" i="0">
+                <a:solidFill>
+                  <a:srgbClr val="1E2761"/>
+                </a:solidFill>
+                <a:latin typeface="Montserrat"/>
+              </a:rPr>
+              <a:t>El anexo 2 es un manual de averías</a:t>
+            </a:r>
+          </a:p>
+        </p:txBody>
+      </p:sp>
+      <p:sp>
+        <p:nvSpPr>
+          <p:cNvPr id="7" name="Rectangle 6"/>
           <p:cNvSpPr/>
           <p:nvPr/>
         </p:nvSpPr>
         <p:spPr>
           <a:xfrm>
-            <a:off x="868680" y="1051560"/>
-            <a:ext cx="1463040" cy="82296"/>
-          </a:xfrm>
-          <a:prstGeom prst="roundRect">
+            <a:off x="868680" y="1627632"/>
+            <a:ext cx="2011680" cy="73152"/>
+          </a:xfrm>
+          <a:prstGeom prst="rect">
             <a:avLst/>
           </a:prstGeom>
           <a:solidFill>
@@ -7751,14 +8578,14 @@
       </p:sp>
       <p:sp>
         <p:nvSpPr>
-          <p:cNvPr id="5" name="TextBox 4"/>
+          <p:cNvPr id="8" name="TextBox 7"/>
           <p:cNvSpPr txBox="1"/>
           <p:nvPr/>
         </p:nvSpPr>
         <p:spPr>
           <a:xfrm>
-            <a:off x="822960" y="1234440"/>
-            <a:ext cx="10515600" cy="1097280"/>
+            <a:off x="822960" y="1965960"/>
+            <a:ext cx="5029200" cy="4206240"/>
           </a:xfrm>
           <a:prstGeom prst="rect">
             <a:avLst/>
@@ -7771,28 +8598,163 @@
           </a:bodyPr>
           <a:lstStyle/>
           <a:p>
-            <a:r>
-              <a:rPr sz="3400" b="1" i="0">
-                <a:solidFill>
-                  <a:srgbClr val="FFFFFF"/>
-                </a:solidFill>
-                <a:latin typeface="Montserrat"/>
-              </a:rPr>
-              <a:t>Ya dominas la ITC-ICG 09 entera</a:t>
-            </a:r>
-          </a:p>
-        </p:txBody>
-      </p:sp>
-      <p:sp>
-        <p:nvSpPr>
-          <p:cNvPr id="6" name="TextBox 5"/>
+            <a:pPr>
+              <a:spcAft>
+                <a:spcPts val="1100"/>
+              </a:spcAft>
+            </a:pPr>
+            <a:r>
+              <a:rPr sz="1600" b="1" i="0">
+                <a:solidFill>
+                  <a:srgbClr val="E8801A"/>
+                </a:solidFill>
+                <a:latin typeface="Montserrat"/>
+              </a:rPr>
+              <a:t>▸  </a:t>
+            </a:r>
+            <a:r>
+              <a:rPr sz="1600" b="0" i="0">
+                <a:solidFill>
+                  <a:srgbClr val="1B2330"/>
+                </a:solidFill>
+                <a:latin typeface="Montserrat"/>
+              </a:rPr>
+              <a:t>Análisis de humos y CO ambiente</a:t>
+            </a:r>
+          </a:p>
+          <a:p>
+            <a:pPr>
+              <a:spcAft>
+                <a:spcPts val="1100"/>
+              </a:spcAft>
+            </a:pPr>
+            <a:r>
+              <a:rPr sz="1600" b="1" i="0">
+                <a:solidFill>
+                  <a:srgbClr val="E8801A"/>
+                </a:solidFill>
+                <a:latin typeface="Montserrat"/>
+              </a:rPr>
+              <a:t>▸  </a:t>
+            </a:r>
+            <a:r>
+              <a:rPr sz="1600" b="0" i="0">
+                <a:solidFill>
+                  <a:srgbClr val="1B2330"/>
+                </a:solidFill>
+                <a:latin typeface="Montserrat"/>
+              </a:rPr>
+              <a:t>Rendimiento e inquemados</a:t>
+            </a:r>
+          </a:p>
+          <a:p>
+            <a:pPr>
+              <a:spcAft>
+                <a:spcPts val="1100"/>
+              </a:spcAft>
+            </a:pPr>
+            <a:r>
+              <a:rPr sz="1600" b="1" i="0">
+                <a:solidFill>
+                  <a:srgbClr val="E8801A"/>
+                </a:solidFill>
+                <a:latin typeface="Montserrat"/>
+              </a:rPr>
+              <a:t>▸  </a:t>
+            </a:r>
+            <a:r>
+              <a:rPr sz="1600" b="0" i="0">
+                <a:solidFill>
+                  <a:srgbClr val="1B2330"/>
+                </a:solidFill>
+                <a:latin typeface="Montserrat"/>
+              </a:rPr>
+              <a:t>Seguridad: cortatiro y termopar</a:t>
+            </a:r>
+          </a:p>
+          <a:p>
+            <a:pPr>
+              <a:spcAft>
+                <a:spcPts val="1100"/>
+              </a:spcAft>
+            </a:pPr>
+            <a:r>
+              <a:rPr sz="1600" b="1" i="0">
+                <a:solidFill>
+                  <a:srgbClr val="E8801A"/>
+                </a:solidFill>
+                <a:latin typeface="Montserrat"/>
+              </a:rPr>
+              <a:t>▸  </a:t>
+            </a:r>
+            <a:r>
+              <a:rPr sz="1600" b="0" i="0">
+                <a:solidFill>
+                  <a:srgbClr val="1B2330"/>
+                </a:solidFill>
+                <a:latin typeface="Montserrat"/>
+              </a:rPr>
+              <a:t>Averías de calentadores y calderas</a:t>
+            </a:r>
+          </a:p>
+        </p:txBody>
+      </p:sp>
+      <p:sp>
+        <p:nvSpPr>
+          <p:cNvPr id="9" name="imgph" descr="IMGQ:technician measuring boiler flue gases with analyzer"/>
+          <p:cNvSpPr/>
+          <p:nvPr/>
+        </p:nvSpPr>
+        <p:spPr>
+          <a:xfrm>
+            <a:off x="6080760" y="1965960"/>
+            <a:ext cx="5303520" cy="4572000"/>
+          </a:xfrm>
+          <a:prstGeom prst="roundRect">
+            <a:avLst/>
+          </a:prstGeom>
+          <a:solidFill>
+            <a:srgbClr val="F3F6FB"/>
+          </a:solidFill>
+          <a:ln w="12700">
+            <a:solidFill>
+              <a:srgbClr val="C7D2E6"/>
+            </a:solidFill>
+          </a:ln>
+          <a:effectLst/>
+        </p:spPr>
+        <p:style>
+          <a:lnRef idx="1">
+            <a:schemeClr val="accent1"/>
+          </a:lnRef>
+          <a:fillRef idx="3">
+            <a:schemeClr val="accent1"/>
+          </a:fillRef>
+          <a:effectRef idx="2">
+            <a:schemeClr val="accent1"/>
+          </a:effectRef>
+          <a:fontRef idx="minor">
+            <a:schemeClr val="lt1"/>
+          </a:fontRef>
+        </p:style>
+        <p:txBody>
+          <a:bodyPr rtlCol="0" anchor="ctr"/>
+          <a:lstStyle/>
+          <a:p>
+            <a:pPr algn="ctr"/>
+          </a:p>
+        </p:txBody>
+      </p:sp>
+      <p:sp>
+        <p:nvSpPr>
+          <p:cNvPr id="10" name="TextBox 9"/>
           <p:cNvSpPr txBox="1"/>
           <p:nvPr/>
         </p:nvSpPr>
         <p:spPr>
           <a:xfrm>
-            <a:off x="822960" y="2606040"/>
-            <a:ext cx="10515600" cy="2743200"/>
+            <a:off x="6355080" y="3611880"/>
+            <a:ext cx="4754880" cy="1280160"/>
           </a:xfrm>
           <a:prstGeom prst="rect">
             <a:avLst/>
@@ -7805,119 +8767,254 @@
           </a:bodyPr>
           <a:lstStyle/>
           <a:p>
-            <a:pPr>
-              <a:spcAft>
-                <a:spcPts val="1200"/>
-              </a:spcAft>
-            </a:pPr>
-            <a:r>
-              <a:rPr sz="2000" b="1" i="0">
-                <a:solidFill>
-                  <a:srgbClr val="F4A24C"/>
-                </a:solidFill>
-                <a:latin typeface="Montserrat"/>
-              </a:rPr>
-              <a:t>✓  </a:t>
-            </a:r>
-            <a:r>
-              <a:rPr sz="1900" b="0" i="0">
-                <a:solidFill>
-                  <a:srgbClr val="FFFFFF"/>
-                </a:solidFill>
-                <a:latin typeface="Montserrat"/>
-              </a:rPr>
-              <a:t>Anexo 1 = temario del examen, por capas</a:t>
-            </a:r>
-          </a:p>
-          <a:p>
-            <a:pPr>
-              <a:spcAft>
-                <a:spcPts val="1200"/>
-              </a:spcAft>
-            </a:pPr>
-            <a:r>
-              <a:rPr sz="2000" b="1" i="0">
-                <a:solidFill>
-                  <a:srgbClr val="F4A24C"/>
-                </a:solidFill>
-                <a:latin typeface="Montserrat"/>
-              </a:rPr>
-              <a:t>✓  </a:t>
-            </a:r>
-            <a:r>
-              <a:rPr sz="1900" b="0" i="0">
-                <a:solidFill>
-                  <a:srgbClr val="FFFFFF"/>
-                </a:solidFill>
-                <a:latin typeface="Montserrat"/>
-              </a:rPr>
-              <a:t>A incluye a B; B incluye a C</a:t>
-            </a:r>
-          </a:p>
-          <a:p>
-            <a:pPr>
-              <a:spcAft>
-                <a:spcPts val="1200"/>
-              </a:spcAft>
-            </a:pPr>
-            <a:r>
-              <a:rPr sz="2000" b="1" i="0">
-                <a:solidFill>
-                  <a:srgbClr val="F4A24C"/>
-                </a:solidFill>
-                <a:latin typeface="Montserrat"/>
-              </a:rPr>
-              <a:t>✓  </a:t>
-            </a:r>
-            <a:r>
-              <a:rPr sz="1900" b="0" i="0">
-                <a:solidFill>
-                  <a:srgbClr val="FFFFFF"/>
-                </a:solidFill>
-                <a:latin typeface="Montserrat"/>
-              </a:rPr>
-              <a:t>UNE 60670 las tres; UNE 60601 solo A y B</a:t>
-            </a:r>
-          </a:p>
-          <a:p>
-            <a:pPr>
-              <a:spcAft>
-                <a:spcPts val="1200"/>
-              </a:spcAft>
-            </a:pPr>
-            <a:r>
-              <a:rPr sz="2000" b="1" i="0">
-                <a:solidFill>
-                  <a:srgbClr val="F4A24C"/>
-                </a:solidFill>
-                <a:latin typeface="Montserrat"/>
-              </a:rPr>
-              <a:t>✓  </a:t>
-            </a:r>
-            <a:r>
-              <a:rPr sz="1900" b="0" i="0">
-                <a:solidFill>
-                  <a:srgbClr val="FFFFFF"/>
-                </a:solidFill>
-                <a:latin typeface="Montserrat"/>
-              </a:rPr>
-              <a:t>Tipos de aparato A/B/C no son categorías</a:t>
-            </a:r>
-          </a:p>
-        </p:txBody>
-      </p:sp>
-      <p:sp>
-        <p:nvSpPr>
-          <p:cNvPr id="7" name="Rounded Rectangle 6"/>
+            <a:pPr algn="ctr"/>
+            <a:r>
+              <a:rPr sz="1400" b="1" i="0">
+                <a:solidFill>
+                  <a:srgbClr val="64748B"/>
+                </a:solidFill>
+                <a:latin typeface="Montserrat"/>
+              </a:rPr>
+              <a:t>IMAGEN</a:t>
+            </a:r>
+          </a:p>
+          <a:p>
+            <a:pPr algn="ctr"/>
+            <a:r>
+              <a:rPr sz="1100" b="0" i="1">
+                <a:solidFill>
+                  <a:srgbClr val="64748B"/>
+                </a:solidFill>
+                <a:latin typeface="Montserrat"/>
+              </a:rPr>
+              <a:t>technician measuring boiler flue gases with analyzer</a:t>
+            </a:r>
+          </a:p>
+        </p:txBody>
+      </p:sp>
+    </p:spTree>
+  </p:cSld>
+  <p:clrMapOvr>
+    <a:masterClrMapping/>
+  </p:clrMapOvr>
+  <mc:AlternateContent xmlns:mc="http://schemas.openxmlformats.org/markup-compatibility/2006">
+    <mc:Choice xmlns:p14="http://schemas.microsoft.com/office/powerpoint/2010/main" Requires="p14">
+      <p:transition spd="med" p14:dur="700">
+        <p14:cube dir="r"/>
+      </p:transition>
+    </mc:Choice>
+    <mc:Fallback>
+      <p:transition spd="med">
+        <p:push dir="r"/>
+      </p:transition>
+    </mc:Fallback>
+  </mc:AlternateContent>
+</p:sld>
+</file>
+
+<file path=ppt/slides/slide17.xml><?xml version="1.0" encoding="utf-8"?>
+<p:sld xmlns:a="http://schemas.openxmlformats.org/drawingml/2006/main" xmlns:p="http://schemas.openxmlformats.org/presentationml/2006/main" xmlns:r="http://schemas.openxmlformats.org/officeDocument/2006/relationships">
+  <p:cSld>
+    <p:spTree>
+      <p:nvGrpSpPr>
+        <p:cNvPr id="1" name=""/>
+        <p:cNvGrpSpPr/>
+        <p:nvPr/>
+      </p:nvGrpSpPr>
+      <p:grpSpPr/>
+      <p:sp>
+        <p:nvSpPr>
+          <p:cNvPr id="2" name="Rectangle 1"/>
           <p:cNvSpPr/>
           <p:nvPr/>
         </p:nvSpPr>
         <p:spPr>
           <a:xfrm>
-            <a:off x="822960" y="5532120"/>
-            <a:ext cx="10515600" cy="822960"/>
-          </a:xfrm>
-          <a:prstGeom prst="roundRect">
+            <a:off x="0" y="0"/>
+            <a:ext cx="12191695" cy="6858000"/>
+          </a:xfrm>
+          <a:prstGeom prst="rect">
+            <a:avLst/>
+          </a:prstGeom>
+          <a:solidFill>
+            <a:srgbClr val="FFFFFF"/>
+          </a:solidFill>
+          <a:ln>
+            <a:noFill/>
+          </a:ln>
+          <a:effectLst/>
+        </p:spPr>
+        <p:style>
+          <a:lnRef idx="1">
+            <a:schemeClr val="accent1"/>
+          </a:lnRef>
+          <a:fillRef idx="3">
+            <a:schemeClr val="accent1"/>
+          </a:fillRef>
+          <a:effectRef idx="2">
+            <a:schemeClr val="accent1"/>
+          </a:effectRef>
+          <a:fontRef idx="minor">
+            <a:schemeClr val="lt1"/>
+          </a:fontRef>
+        </p:style>
+        <p:txBody>
+          <a:bodyPr rtlCol="0" anchor="ctr"/>
+          <a:lstStyle/>
+          <a:p>
+            <a:pPr algn="ctr"/>
+          </a:p>
+        </p:txBody>
+      </p:sp>
+      <p:sp>
+        <p:nvSpPr>
+          <p:cNvPr id="3" name="TextBox 2"/>
+          <p:cNvSpPr txBox="1"/>
+          <p:nvPr/>
+        </p:nvSpPr>
+        <p:spPr>
+          <a:xfrm>
+            <a:off x="10607040" y="320040"/>
+            <a:ext cx="1371600" cy="365760"/>
+          </a:xfrm>
+          <a:prstGeom prst="rect">
+            <a:avLst/>
+          </a:prstGeom>
+          <a:noFill/>
+        </p:spPr>
+        <p:txBody>
+          <a:bodyPr wrap="square">
+            <a:spAutoFit/>
+          </a:bodyPr>
+          <a:lstStyle/>
+          <a:p>
+            <a:pPr algn="r"/>
+            <a:r>
+              <a:rPr sz="1000" b="1" i="0">
+                <a:solidFill>
+                  <a:srgbClr val="64748B"/>
+                </a:solidFill>
+                <a:latin typeface="Montserrat"/>
+              </a:rPr>
+              <a:t>017 / 020</a:t>
+            </a:r>
+          </a:p>
+        </p:txBody>
+      </p:sp>
+      <p:sp>
+        <p:nvSpPr>
+          <p:cNvPr id="4" name="TextBox 3"/>
+          <p:cNvSpPr txBox="1"/>
+          <p:nvPr/>
+        </p:nvSpPr>
+        <p:spPr>
+          <a:xfrm>
+            <a:off x="457200" y="6419088"/>
+            <a:ext cx="8229600" cy="365760"/>
+          </a:xfrm>
+          <a:prstGeom prst="rect">
+            <a:avLst/>
+          </a:prstGeom>
+          <a:noFill/>
+        </p:spPr>
+        <p:txBody>
+          <a:bodyPr wrap="square">
+            <a:spAutoFit/>
+          </a:bodyPr>
+          <a:lstStyle/>
+          <a:p>
+            <a:r>
+              <a:rPr sz="900" b="0" i="0">
+                <a:solidFill>
+                  <a:srgbClr val="64748B"/>
+                </a:solidFill>
+                <a:latin typeface="Montserrat"/>
+              </a:rPr>
+              <a:t>Curso Gas B · Tema 06 · Instaladores y empresas instaladoras</a:t>
+            </a:r>
+          </a:p>
+        </p:txBody>
+      </p:sp>
+      <p:sp>
+        <p:nvSpPr>
+          <p:cNvPr id="5" name="TextBox 4"/>
+          <p:cNvSpPr txBox="1"/>
+          <p:nvPr/>
+        </p:nvSpPr>
+        <p:spPr>
+          <a:xfrm>
+            <a:off x="822960" y="457200"/>
+            <a:ext cx="10058400" cy="365760"/>
+          </a:xfrm>
+          <a:prstGeom prst="rect">
+            <a:avLst/>
+          </a:prstGeom>
+          <a:noFill/>
+        </p:spPr>
+        <p:txBody>
+          <a:bodyPr wrap="square">
+            <a:spAutoFit/>
+          </a:bodyPr>
+          <a:lstStyle/>
+          <a:p>
+            <a:r>
+              <a:rPr sz="1300" b="1" i="0">
+                <a:solidFill>
+                  <a:srgbClr val="E8801A"/>
+                </a:solidFill>
+                <a:latin typeface="Montserrat"/>
+              </a:rPr>
+              <a:t>TRAMPA CLÁSICA</a:t>
+            </a:r>
+          </a:p>
+        </p:txBody>
+      </p:sp>
+      <p:sp>
+        <p:nvSpPr>
+          <p:cNvPr id="6" name="TextBox 5"/>
+          <p:cNvSpPr txBox="1"/>
+          <p:nvPr/>
+        </p:nvSpPr>
+        <p:spPr>
+          <a:xfrm>
+            <a:off x="822960" y="868680"/>
+            <a:ext cx="10515600" cy="914400"/>
+          </a:xfrm>
+          <a:prstGeom prst="rect">
+            <a:avLst/>
+          </a:prstGeom>
+          <a:noFill/>
+        </p:spPr>
+        <p:txBody>
+          <a:bodyPr wrap="square">
+            <a:spAutoFit/>
+          </a:bodyPr>
+          <a:lstStyle/>
+          <a:p>
+            <a:r>
+              <a:rPr sz="2800" b="1" i="0">
+                <a:solidFill>
+                  <a:srgbClr val="1E2761"/>
+                </a:solidFill>
+                <a:latin typeface="Montserrat"/>
+              </a:rPr>
+              <a:t>Tipos de aparato ≠ categorías</a:t>
+            </a:r>
+          </a:p>
+        </p:txBody>
+      </p:sp>
+      <p:sp>
+        <p:nvSpPr>
+          <p:cNvPr id="7" name="Rectangle 6"/>
+          <p:cNvSpPr/>
+          <p:nvPr/>
+        </p:nvSpPr>
+        <p:spPr>
+          <a:xfrm>
+            <a:off x="868680" y="1627632"/>
+            <a:ext cx="2011680" cy="73152"/>
+          </a:xfrm>
+          <a:prstGeom prst="rect">
             <a:avLst/>
           </a:prstGeom>
           <a:solidFill>
@@ -7958,8 +9055,8 @@
         </p:nvSpPr>
         <p:spPr>
           <a:xfrm>
-            <a:off x="1051560" y="5623560"/>
-            <a:ext cx="10058400" cy="640080"/>
+            <a:off x="6355080" y="1965960"/>
+            <a:ext cx="5029200" cy="4206240"/>
           </a:xfrm>
           <a:prstGeom prst="rect">
             <a:avLst/>
@@ -7972,14 +9069,196 @@
           </a:bodyPr>
           <a:lstStyle/>
           <a:p>
-            <a:r>
-              <a:rPr sz="1500" b="1" i="1">
-                <a:solidFill>
-                  <a:srgbClr val="1E2761"/>
-                </a:solidFill>
-                <a:latin typeface="Montserrat"/>
-              </a:rPr>
-              <a:t>Cierras la ITC-ICG 09 de punta a punta. Ya piensas como un gasista.</a:t>
+            <a:pPr>
+              <a:spcAft>
+                <a:spcPts val="1100"/>
+              </a:spcAft>
+            </a:pPr>
+            <a:r>
+              <a:rPr sz="1600" b="1" i="0">
+                <a:solidFill>
+                  <a:srgbClr val="E8801A"/>
+                </a:solidFill>
+                <a:latin typeface="Montserrat"/>
+              </a:rPr>
+              <a:t>▸  </a:t>
+            </a:r>
+            <a:r>
+              <a:rPr sz="1600" b="0" i="0">
+                <a:solidFill>
+                  <a:srgbClr val="1B2330"/>
+                </a:solidFill>
+                <a:latin typeface="Montserrat"/>
+              </a:rPr>
+              <a:t>Tipo A: no conducido (humos al local)</a:t>
+            </a:r>
+          </a:p>
+          <a:p>
+            <a:pPr>
+              <a:spcAft>
+                <a:spcPts val="1100"/>
+              </a:spcAft>
+            </a:pPr>
+            <a:r>
+              <a:rPr sz="1600" b="1" i="0">
+                <a:solidFill>
+                  <a:srgbClr val="E8801A"/>
+                </a:solidFill>
+                <a:latin typeface="Montserrat"/>
+              </a:rPr>
+              <a:t>▸  </a:t>
+            </a:r>
+            <a:r>
+              <a:rPr sz="1600" b="0" i="0">
+                <a:solidFill>
+                  <a:srgbClr val="1B2330"/>
+                </a:solidFill>
+                <a:latin typeface="Montserrat"/>
+              </a:rPr>
+              <a:t>Tipo B: conducido, toma aire del local</a:t>
+            </a:r>
+          </a:p>
+          <a:p>
+            <a:pPr>
+              <a:spcAft>
+                <a:spcPts val="1100"/>
+              </a:spcAft>
+            </a:pPr>
+            <a:r>
+              <a:rPr sz="1600" b="1" i="0">
+                <a:solidFill>
+                  <a:srgbClr val="E8801A"/>
+                </a:solidFill>
+                <a:latin typeface="Montserrat"/>
+              </a:rPr>
+              <a:t>▸  </a:t>
+            </a:r>
+            <a:r>
+              <a:rPr sz="1600" b="0" i="0">
+                <a:solidFill>
+                  <a:srgbClr val="1B2330"/>
+                </a:solidFill>
+                <a:latin typeface="Montserrat"/>
+              </a:rPr>
+              <a:t>Tipo C: estanco, circuito con el exterior</a:t>
+            </a:r>
+          </a:p>
+          <a:p>
+            <a:pPr>
+              <a:spcAft>
+                <a:spcPts val="1100"/>
+              </a:spcAft>
+            </a:pPr>
+            <a:r>
+              <a:rPr sz="1600" b="1" i="0">
+                <a:solidFill>
+                  <a:srgbClr val="E8801A"/>
+                </a:solidFill>
+                <a:latin typeface="Montserrat"/>
+              </a:rPr>
+              <a:t>▸  </a:t>
+            </a:r>
+            <a:r>
+              <a:rPr sz="1600" b="0" i="0">
+                <a:solidFill>
+                  <a:srgbClr val="1B2330"/>
+                </a:solidFill>
+                <a:latin typeface="Montserrat"/>
+              </a:rPr>
+              <a:t>No son las categorías del instalador</a:t>
+            </a:r>
+          </a:p>
+        </p:txBody>
+      </p:sp>
+      <p:sp>
+        <p:nvSpPr>
+          <p:cNvPr id="9" name="imgph" descr="IMGQ:sealed balanced flue gas boiler on wall"/>
+          <p:cNvSpPr/>
+          <p:nvPr/>
+        </p:nvSpPr>
+        <p:spPr>
+          <a:xfrm>
+            <a:off x="822960" y="1965960"/>
+            <a:ext cx="5303520" cy="4572000"/>
+          </a:xfrm>
+          <a:prstGeom prst="roundRect">
+            <a:avLst/>
+          </a:prstGeom>
+          <a:solidFill>
+            <a:srgbClr val="F3F6FB"/>
+          </a:solidFill>
+          <a:ln w="12700">
+            <a:solidFill>
+              <a:srgbClr val="C7D2E6"/>
+            </a:solidFill>
+          </a:ln>
+          <a:effectLst/>
+        </p:spPr>
+        <p:style>
+          <a:lnRef idx="1">
+            <a:schemeClr val="accent1"/>
+          </a:lnRef>
+          <a:fillRef idx="3">
+            <a:schemeClr val="accent1"/>
+          </a:fillRef>
+          <a:effectRef idx="2">
+            <a:schemeClr val="accent1"/>
+          </a:effectRef>
+          <a:fontRef idx="minor">
+            <a:schemeClr val="lt1"/>
+          </a:fontRef>
+        </p:style>
+        <p:txBody>
+          <a:bodyPr rtlCol="0" anchor="ctr"/>
+          <a:lstStyle/>
+          <a:p>
+            <a:pPr algn="ctr"/>
+          </a:p>
+        </p:txBody>
+      </p:sp>
+      <p:sp>
+        <p:nvSpPr>
+          <p:cNvPr id="10" name="TextBox 9"/>
+          <p:cNvSpPr txBox="1"/>
+          <p:nvPr/>
+        </p:nvSpPr>
+        <p:spPr>
+          <a:xfrm>
+            <a:off x="1097280" y="3611880"/>
+            <a:ext cx="4754880" cy="1280160"/>
+          </a:xfrm>
+          <a:prstGeom prst="rect">
+            <a:avLst/>
+          </a:prstGeom>
+          <a:noFill/>
+        </p:spPr>
+        <p:txBody>
+          <a:bodyPr wrap="square">
+            <a:spAutoFit/>
+          </a:bodyPr>
+          <a:lstStyle/>
+          <a:p>
+            <a:pPr algn="ctr"/>
+            <a:r>
+              <a:rPr sz="1400" b="1" i="0">
+                <a:solidFill>
+                  <a:srgbClr val="64748B"/>
+                </a:solidFill>
+                <a:latin typeface="Montserrat"/>
+              </a:rPr>
+              <a:t>IMAGEN</a:t>
+            </a:r>
+          </a:p>
+          <a:p>
+            <a:pPr algn="ctr"/>
+            <a:r>
+              <a:rPr sz="1100" b="0" i="1">
+                <a:solidFill>
+                  <a:srgbClr val="64748B"/>
+                </a:solidFill>
+                <a:latin typeface="Montserrat"/>
+              </a:rPr>
+              <a:t>sealed balanced flue gas boiler on wall</a:t>
             </a:r>
           </a:p>
         </p:txBody>
@@ -7989,6 +9268,1296 @@
   <p:clrMapOvr>
     <a:masterClrMapping/>
   </p:clrMapOvr>
+  <mc:AlternateContent xmlns:mc="http://schemas.openxmlformats.org/markup-compatibility/2006">
+    <mc:Choice xmlns:p14="http://schemas.microsoft.com/office/powerpoint/2010/main" Requires="p14">
+      <p:transition spd="med" p14:dur="700">
+        <p14:cube dir="l"/>
+      </p:transition>
+    </mc:Choice>
+    <mc:Fallback>
+      <p:transition spd="med">
+        <p:push dir="l"/>
+      </p:transition>
+    </mc:Fallback>
+  </mc:AlternateContent>
+</p:sld>
+</file>
+
+<file path=ppt/slides/slide18.xml><?xml version="1.0" encoding="utf-8"?>
+<p:sld xmlns:a="http://schemas.openxmlformats.org/drawingml/2006/main" xmlns:p="http://schemas.openxmlformats.org/presentationml/2006/main" xmlns:r="http://schemas.openxmlformats.org/officeDocument/2006/relationships">
+  <p:cSld>
+    <p:spTree>
+      <p:nvGrpSpPr>
+        <p:cNvPr id="1" name=""/>
+        <p:cNvGrpSpPr/>
+        <p:nvPr/>
+      </p:nvGrpSpPr>
+      <p:grpSpPr/>
+      <p:sp>
+        <p:nvSpPr>
+          <p:cNvPr id="2" name="Rectangle 1"/>
+          <p:cNvSpPr/>
+          <p:nvPr/>
+        </p:nvSpPr>
+        <p:spPr>
+          <a:xfrm>
+            <a:off x="0" y="0"/>
+            <a:ext cx="12191695" cy="6858000"/>
+          </a:xfrm>
+          <a:prstGeom prst="rect">
+            <a:avLst/>
+          </a:prstGeom>
+          <a:solidFill>
+            <a:srgbClr val="FFFFFF"/>
+          </a:solidFill>
+          <a:ln>
+            <a:noFill/>
+          </a:ln>
+          <a:effectLst/>
+        </p:spPr>
+        <p:style>
+          <a:lnRef idx="1">
+            <a:schemeClr val="accent1"/>
+          </a:lnRef>
+          <a:fillRef idx="3">
+            <a:schemeClr val="accent1"/>
+          </a:fillRef>
+          <a:effectRef idx="2">
+            <a:schemeClr val="accent1"/>
+          </a:effectRef>
+          <a:fontRef idx="minor">
+            <a:schemeClr val="lt1"/>
+          </a:fontRef>
+        </p:style>
+        <p:txBody>
+          <a:bodyPr rtlCol="0" anchor="ctr"/>
+          <a:lstStyle/>
+          <a:p>
+            <a:pPr algn="ctr"/>
+          </a:p>
+        </p:txBody>
+      </p:sp>
+      <p:sp>
+        <p:nvSpPr>
+          <p:cNvPr id="3" name="TextBox 2"/>
+          <p:cNvSpPr txBox="1"/>
+          <p:nvPr/>
+        </p:nvSpPr>
+        <p:spPr>
+          <a:xfrm>
+            <a:off x="10607040" y="320040"/>
+            <a:ext cx="1371600" cy="365760"/>
+          </a:xfrm>
+          <a:prstGeom prst="rect">
+            <a:avLst/>
+          </a:prstGeom>
+          <a:noFill/>
+        </p:spPr>
+        <p:txBody>
+          <a:bodyPr wrap="square">
+            <a:spAutoFit/>
+          </a:bodyPr>
+          <a:lstStyle/>
+          <a:p>
+            <a:pPr algn="r"/>
+            <a:r>
+              <a:rPr sz="1000" b="1" i="0">
+                <a:solidFill>
+                  <a:srgbClr val="64748B"/>
+                </a:solidFill>
+                <a:latin typeface="Montserrat"/>
+              </a:rPr>
+              <a:t>018 / 020</a:t>
+            </a:r>
+          </a:p>
+        </p:txBody>
+      </p:sp>
+      <p:sp>
+        <p:nvSpPr>
+          <p:cNvPr id="4" name="TextBox 3"/>
+          <p:cNvSpPr txBox="1"/>
+          <p:nvPr/>
+        </p:nvSpPr>
+        <p:spPr>
+          <a:xfrm>
+            <a:off x="457200" y="6419088"/>
+            <a:ext cx="8229600" cy="365760"/>
+          </a:xfrm>
+          <a:prstGeom prst="rect">
+            <a:avLst/>
+          </a:prstGeom>
+          <a:noFill/>
+        </p:spPr>
+        <p:txBody>
+          <a:bodyPr wrap="square">
+            <a:spAutoFit/>
+          </a:bodyPr>
+          <a:lstStyle/>
+          <a:p>
+            <a:r>
+              <a:rPr sz="900" b="0" i="0">
+                <a:solidFill>
+                  <a:srgbClr val="64748B"/>
+                </a:solidFill>
+                <a:latin typeface="Montserrat"/>
+              </a:rPr>
+              <a:t>Curso Gas B · Tema 06 · Instaladores y empresas instaladoras</a:t>
+            </a:r>
+          </a:p>
+        </p:txBody>
+      </p:sp>
+      <p:sp>
+        <p:nvSpPr>
+          <p:cNvPr id="5" name="Rectangle 4"/>
+          <p:cNvSpPr/>
+          <p:nvPr/>
+        </p:nvSpPr>
+        <p:spPr>
+          <a:xfrm>
+            <a:off x="0" y="0"/>
+            <a:ext cx="12191695" cy="1143000"/>
+          </a:xfrm>
+          <a:prstGeom prst="rect">
+            <a:avLst/>
+          </a:prstGeom>
+          <a:solidFill>
+            <a:srgbClr val="E8801A"/>
+          </a:solidFill>
+          <a:ln>
+            <a:noFill/>
+          </a:ln>
+          <a:effectLst/>
+        </p:spPr>
+        <p:style>
+          <a:lnRef idx="1">
+            <a:schemeClr val="accent1"/>
+          </a:lnRef>
+          <a:fillRef idx="3">
+            <a:schemeClr val="accent1"/>
+          </a:fillRef>
+          <a:effectRef idx="2">
+            <a:schemeClr val="accent1"/>
+          </a:effectRef>
+          <a:fontRef idx="minor">
+            <a:schemeClr val="lt1"/>
+          </a:fontRef>
+        </p:style>
+        <p:txBody>
+          <a:bodyPr rtlCol="0" anchor="ctr"/>
+          <a:lstStyle/>
+          <a:p>
+            <a:pPr algn="ctr"/>
+          </a:p>
+        </p:txBody>
+      </p:sp>
+      <p:sp>
+        <p:nvSpPr>
+          <p:cNvPr id="6" name="TextBox 5"/>
+          <p:cNvSpPr txBox="1"/>
+          <p:nvPr/>
+        </p:nvSpPr>
+        <p:spPr>
+          <a:xfrm>
+            <a:off x="822960" y="274320"/>
+            <a:ext cx="10515600" cy="640080"/>
+          </a:xfrm>
+          <a:prstGeom prst="rect">
+            <a:avLst/>
+          </a:prstGeom>
+          <a:noFill/>
+        </p:spPr>
+        <p:txBody>
+          <a:bodyPr wrap="square">
+            <a:spAutoFit/>
+          </a:bodyPr>
+          <a:lstStyle/>
+          <a:p>
+            <a:r>
+              <a:rPr sz="2400" b="1" i="0">
+                <a:solidFill>
+                  <a:srgbClr val="FFFFFF"/>
+                </a:solidFill>
+                <a:latin typeface="Montserrat"/>
+              </a:rPr>
+              <a:t>⚡  PREGUNTA RÁPIDA</a:t>
+            </a:r>
+          </a:p>
+        </p:txBody>
+      </p:sp>
+      <p:sp>
+        <p:nvSpPr>
+          <p:cNvPr id="7" name="TextBox 6"/>
+          <p:cNvSpPr txBox="1"/>
+          <p:nvPr/>
+        </p:nvSpPr>
+        <p:spPr>
+          <a:xfrm>
+            <a:off x="822960" y="1508760"/>
+            <a:ext cx="10515600" cy="1371600"/>
+          </a:xfrm>
+          <a:prstGeom prst="rect">
+            <a:avLst/>
+          </a:prstGeom>
+          <a:noFill/>
+        </p:spPr>
+        <p:txBody>
+          <a:bodyPr wrap="square">
+            <a:spAutoFit/>
+          </a:bodyPr>
+          <a:lstStyle/>
+          <a:p>
+            <a:r>
+              <a:rPr sz="2400" b="1" i="0">
+                <a:solidFill>
+                  <a:srgbClr val="1E2761"/>
+                </a:solidFill>
+                <a:latin typeface="Montserrat"/>
+              </a:rPr>
+              <a:t>En el anexo 2, ¿qué es un aparato de tipo A?</a:t>
+            </a:r>
+          </a:p>
+        </p:txBody>
+      </p:sp>
+      <p:sp>
+        <p:nvSpPr>
+          <p:cNvPr id="8" name="Rounded Rectangle 7"/>
+          <p:cNvSpPr/>
+          <p:nvPr/>
+        </p:nvSpPr>
+        <p:spPr>
+          <a:xfrm>
+            <a:off x="822960" y="3291840"/>
+            <a:ext cx="4983480" cy="1143000"/>
+          </a:xfrm>
+          <a:prstGeom prst="roundRect">
+            <a:avLst/>
+          </a:prstGeom>
+          <a:solidFill>
+            <a:srgbClr val="F3F6FB"/>
+          </a:solidFill>
+          <a:ln w="12700">
+            <a:solidFill>
+              <a:srgbClr val="C7D2E6"/>
+            </a:solidFill>
+          </a:ln>
+          <a:effectLst/>
+        </p:spPr>
+        <p:style>
+          <a:lnRef idx="1">
+            <a:schemeClr val="accent1"/>
+          </a:lnRef>
+          <a:fillRef idx="3">
+            <a:schemeClr val="accent1"/>
+          </a:fillRef>
+          <a:effectRef idx="2">
+            <a:schemeClr val="accent1"/>
+          </a:effectRef>
+          <a:fontRef idx="minor">
+            <a:schemeClr val="lt1"/>
+          </a:fontRef>
+        </p:style>
+        <p:txBody>
+          <a:bodyPr rtlCol="0" anchor="ctr"/>
+          <a:lstStyle/>
+          <a:p>
+            <a:pPr algn="ctr"/>
+          </a:p>
+        </p:txBody>
+      </p:sp>
+      <p:sp>
+        <p:nvSpPr>
+          <p:cNvPr id="9" name="Rectangle 8"/>
+          <p:cNvSpPr/>
+          <p:nvPr/>
+        </p:nvSpPr>
+        <p:spPr>
+          <a:xfrm>
+            <a:off x="822960" y="3291840"/>
+            <a:ext cx="640080" cy="1143000"/>
+          </a:xfrm>
+          <a:prstGeom prst="rect">
+            <a:avLst/>
+          </a:prstGeom>
+          <a:solidFill>
+            <a:srgbClr val="1E2761"/>
+          </a:solidFill>
+          <a:ln>
+            <a:noFill/>
+          </a:ln>
+          <a:effectLst/>
+        </p:spPr>
+        <p:style>
+          <a:lnRef idx="1">
+            <a:schemeClr val="accent1"/>
+          </a:lnRef>
+          <a:fillRef idx="3">
+            <a:schemeClr val="accent1"/>
+          </a:fillRef>
+          <a:effectRef idx="2">
+            <a:schemeClr val="accent1"/>
+          </a:effectRef>
+          <a:fontRef idx="minor">
+            <a:schemeClr val="lt1"/>
+          </a:fontRef>
+        </p:style>
+        <p:txBody>
+          <a:bodyPr rtlCol="0" anchor="ctr"/>
+          <a:lstStyle/>
+          <a:p>
+            <a:pPr algn="ctr"/>
+          </a:p>
+        </p:txBody>
+      </p:sp>
+      <p:sp>
+        <p:nvSpPr>
+          <p:cNvPr id="10" name="TextBox 9"/>
+          <p:cNvSpPr txBox="1"/>
+          <p:nvPr/>
+        </p:nvSpPr>
+        <p:spPr>
+          <a:xfrm>
+            <a:off x="822960" y="3611880"/>
+            <a:ext cx="640080" cy="548640"/>
+          </a:xfrm>
+          <a:prstGeom prst="rect">
+            <a:avLst/>
+          </a:prstGeom>
+          <a:noFill/>
+        </p:spPr>
+        <p:txBody>
+          <a:bodyPr wrap="square">
+            <a:spAutoFit/>
+          </a:bodyPr>
+          <a:lstStyle/>
+          <a:p>
+            <a:pPr algn="ctr"/>
+            <a:r>
+              <a:rPr sz="2200" b="1" i="0">
+                <a:solidFill>
+                  <a:srgbClr val="FFFFFF"/>
+                </a:solidFill>
+                <a:latin typeface="Montserrat"/>
+              </a:rPr>
+              <a:t>A</a:t>
+            </a:r>
+          </a:p>
+        </p:txBody>
+      </p:sp>
+      <p:sp>
+        <p:nvSpPr>
+          <p:cNvPr id="11" name="TextBox 10"/>
+          <p:cNvSpPr txBox="1"/>
+          <p:nvPr/>
+        </p:nvSpPr>
+        <p:spPr>
+          <a:xfrm>
+            <a:off x="1600200" y="3474720"/>
+            <a:ext cx="4114800" cy="868680"/>
+          </a:xfrm>
+          <a:prstGeom prst="rect">
+            <a:avLst/>
+          </a:prstGeom>
+          <a:noFill/>
+        </p:spPr>
+        <p:txBody>
+          <a:bodyPr wrap="square">
+            <a:spAutoFit/>
+          </a:bodyPr>
+          <a:lstStyle/>
+          <a:p>
+            <a:r>
+              <a:rPr sz="1400" b="0" i="0">
+                <a:solidFill>
+                  <a:srgbClr val="1B2330"/>
+                </a:solidFill>
+                <a:latin typeface="Montserrat"/>
+              </a:rPr>
+              <a:t>No conducido: evacúa los humos al propio local</a:t>
+            </a:r>
+          </a:p>
+        </p:txBody>
+      </p:sp>
+      <p:sp>
+        <p:nvSpPr>
+          <p:cNvPr id="12" name="Rounded Rectangle 11"/>
+          <p:cNvSpPr/>
+          <p:nvPr/>
+        </p:nvSpPr>
+        <p:spPr>
+          <a:xfrm>
+            <a:off x="6355080" y="3291840"/>
+            <a:ext cx="4983480" cy="1143000"/>
+          </a:xfrm>
+          <a:prstGeom prst="roundRect">
+            <a:avLst/>
+          </a:prstGeom>
+          <a:solidFill>
+            <a:srgbClr val="F3F6FB"/>
+          </a:solidFill>
+          <a:ln w="12700">
+            <a:solidFill>
+              <a:srgbClr val="C7D2E6"/>
+            </a:solidFill>
+          </a:ln>
+          <a:effectLst/>
+        </p:spPr>
+        <p:style>
+          <a:lnRef idx="1">
+            <a:schemeClr val="accent1"/>
+          </a:lnRef>
+          <a:fillRef idx="3">
+            <a:schemeClr val="accent1"/>
+          </a:fillRef>
+          <a:effectRef idx="2">
+            <a:schemeClr val="accent1"/>
+          </a:effectRef>
+          <a:fontRef idx="minor">
+            <a:schemeClr val="lt1"/>
+          </a:fontRef>
+        </p:style>
+        <p:txBody>
+          <a:bodyPr rtlCol="0" anchor="ctr"/>
+          <a:lstStyle/>
+          <a:p>
+            <a:pPr algn="ctr"/>
+          </a:p>
+        </p:txBody>
+      </p:sp>
+      <p:sp>
+        <p:nvSpPr>
+          <p:cNvPr id="13" name="Rectangle 12"/>
+          <p:cNvSpPr/>
+          <p:nvPr/>
+        </p:nvSpPr>
+        <p:spPr>
+          <a:xfrm>
+            <a:off x="6355080" y="3291840"/>
+            <a:ext cx="640080" cy="1143000"/>
+          </a:xfrm>
+          <a:prstGeom prst="rect">
+            <a:avLst/>
+          </a:prstGeom>
+          <a:solidFill>
+            <a:srgbClr val="1E2761"/>
+          </a:solidFill>
+          <a:ln>
+            <a:noFill/>
+          </a:ln>
+          <a:effectLst/>
+        </p:spPr>
+        <p:style>
+          <a:lnRef idx="1">
+            <a:schemeClr val="accent1"/>
+          </a:lnRef>
+          <a:fillRef idx="3">
+            <a:schemeClr val="accent1"/>
+          </a:fillRef>
+          <a:effectRef idx="2">
+            <a:schemeClr val="accent1"/>
+          </a:effectRef>
+          <a:fontRef idx="minor">
+            <a:schemeClr val="lt1"/>
+          </a:fontRef>
+        </p:style>
+        <p:txBody>
+          <a:bodyPr rtlCol="0" anchor="ctr"/>
+          <a:lstStyle/>
+          <a:p>
+            <a:pPr algn="ctr"/>
+          </a:p>
+        </p:txBody>
+      </p:sp>
+      <p:sp>
+        <p:nvSpPr>
+          <p:cNvPr id="14" name="TextBox 13"/>
+          <p:cNvSpPr txBox="1"/>
+          <p:nvPr/>
+        </p:nvSpPr>
+        <p:spPr>
+          <a:xfrm>
+            <a:off x="6355080" y="3611880"/>
+            <a:ext cx="640080" cy="548640"/>
+          </a:xfrm>
+          <a:prstGeom prst="rect">
+            <a:avLst/>
+          </a:prstGeom>
+          <a:noFill/>
+        </p:spPr>
+        <p:txBody>
+          <a:bodyPr wrap="square">
+            <a:spAutoFit/>
+          </a:bodyPr>
+          <a:lstStyle/>
+          <a:p>
+            <a:pPr algn="ctr"/>
+            <a:r>
+              <a:rPr sz="2200" b="1" i="0">
+                <a:solidFill>
+                  <a:srgbClr val="FFFFFF"/>
+                </a:solidFill>
+                <a:latin typeface="Montserrat"/>
+              </a:rPr>
+              <a:t>B</a:t>
+            </a:r>
+          </a:p>
+        </p:txBody>
+      </p:sp>
+      <p:sp>
+        <p:nvSpPr>
+          <p:cNvPr id="15" name="TextBox 14"/>
+          <p:cNvSpPr txBox="1"/>
+          <p:nvPr/>
+        </p:nvSpPr>
+        <p:spPr>
+          <a:xfrm>
+            <a:off x="7132320" y="3474720"/>
+            <a:ext cx="4114800" cy="868680"/>
+          </a:xfrm>
+          <a:prstGeom prst="rect">
+            <a:avLst/>
+          </a:prstGeom>
+          <a:noFill/>
+        </p:spPr>
+        <p:txBody>
+          <a:bodyPr wrap="square">
+            <a:spAutoFit/>
+          </a:bodyPr>
+          <a:lstStyle/>
+          <a:p>
+            <a:r>
+              <a:rPr sz="1400" b="0" i="0">
+                <a:solidFill>
+                  <a:srgbClr val="1B2330"/>
+                </a:solidFill>
+                <a:latin typeface="Montserrat"/>
+              </a:rPr>
+              <a:t>Estanco: circuito cerrado con el exterior</a:t>
+            </a:r>
+          </a:p>
+        </p:txBody>
+      </p:sp>
+      <p:sp>
+        <p:nvSpPr>
+          <p:cNvPr id="16" name="Rounded Rectangle 15"/>
+          <p:cNvSpPr/>
+          <p:nvPr/>
+        </p:nvSpPr>
+        <p:spPr>
+          <a:xfrm>
+            <a:off x="822960" y="4617720"/>
+            <a:ext cx="4983480" cy="1143000"/>
+          </a:xfrm>
+          <a:prstGeom prst="roundRect">
+            <a:avLst/>
+          </a:prstGeom>
+          <a:solidFill>
+            <a:srgbClr val="F3F6FB"/>
+          </a:solidFill>
+          <a:ln w="12700">
+            <a:solidFill>
+              <a:srgbClr val="C7D2E6"/>
+            </a:solidFill>
+          </a:ln>
+          <a:effectLst/>
+        </p:spPr>
+        <p:style>
+          <a:lnRef idx="1">
+            <a:schemeClr val="accent1"/>
+          </a:lnRef>
+          <a:fillRef idx="3">
+            <a:schemeClr val="accent1"/>
+          </a:fillRef>
+          <a:effectRef idx="2">
+            <a:schemeClr val="accent1"/>
+          </a:effectRef>
+          <a:fontRef idx="minor">
+            <a:schemeClr val="lt1"/>
+          </a:fontRef>
+        </p:style>
+        <p:txBody>
+          <a:bodyPr rtlCol="0" anchor="ctr"/>
+          <a:lstStyle/>
+          <a:p>
+            <a:pPr algn="ctr"/>
+          </a:p>
+        </p:txBody>
+      </p:sp>
+      <p:sp>
+        <p:nvSpPr>
+          <p:cNvPr id="17" name="Rectangle 16"/>
+          <p:cNvSpPr/>
+          <p:nvPr/>
+        </p:nvSpPr>
+        <p:spPr>
+          <a:xfrm>
+            <a:off x="822960" y="4617720"/>
+            <a:ext cx="640080" cy="1143000"/>
+          </a:xfrm>
+          <a:prstGeom prst="rect">
+            <a:avLst/>
+          </a:prstGeom>
+          <a:solidFill>
+            <a:srgbClr val="1E2761"/>
+          </a:solidFill>
+          <a:ln>
+            <a:noFill/>
+          </a:ln>
+          <a:effectLst/>
+        </p:spPr>
+        <p:style>
+          <a:lnRef idx="1">
+            <a:schemeClr val="accent1"/>
+          </a:lnRef>
+          <a:fillRef idx="3">
+            <a:schemeClr val="accent1"/>
+          </a:fillRef>
+          <a:effectRef idx="2">
+            <a:schemeClr val="accent1"/>
+          </a:effectRef>
+          <a:fontRef idx="minor">
+            <a:schemeClr val="lt1"/>
+          </a:fontRef>
+        </p:style>
+        <p:txBody>
+          <a:bodyPr rtlCol="0" anchor="ctr"/>
+          <a:lstStyle/>
+          <a:p>
+            <a:pPr algn="ctr"/>
+          </a:p>
+        </p:txBody>
+      </p:sp>
+      <p:sp>
+        <p:nvSpPr>
+          <p:cNvPr id="18" name="TextBox 17"/>
+          <p:cNvSpPr txBox="1"/>
+          <p:nvPr/>
+        </p:nvSpPr>
+        <p:spPr>
+          <a:xfrm>
+            <a:off x="822960" y="4937760"/>
+            <a:ext cx="640080" cy="548640"/>
+          </a:xfrm>
+          <a:prstGeom prst="rect">
+            <a:avLst/>
+          </a:prstGeom>
+          <a:noFill/>
+        </p:spPr>
+        <p:txBody>
+          <a:bodyPr wrap="square">
+            <a:spAutoFit/>
+          </a:bodyPr>
+          <a:lstStyle/>
+          <a:p>
+            <a:pPr algn="ctr"/>
+            <a:r>
+              <a:rPr sz="2200" b="1" i="0">
+                <a:solidFill>
+                  <a:srgbClr val="FFFFFF"/>
+                </a:solidFill>
+                <a:latin typeface="Montserrat"/>
+              </a:rPr>
+              <a:t>C</a:t>
+            </a:r>
+          </a:p>
+        </p:txBody>
+      </p:sp>
+      <p:sp>
+        <p:nvSpPr>
+          <p:cNvPr id="19" name="TextBox 18"/>
+          <p:cNvSpPr txBox="1"/>
+          <p:nvPr/>
+        </p:nvSpPr>
+        <p:spPr>
+          <a:xfrm>
+            <a:off x="1600200" y="4800600"/>
+            <a:ext cx="4114800" cy="868680"/>
+          </a:xfrm>
+          <a:prstGeom prst="rect">
+            <a:avLst/>
+          </a:prstGeom>
+          <a:noFill/>
+        </p:spPr>
+        <p:txBody>
+          <a:bodyPr wrap="square">
+            <a:spAutoFit/>
+          </a:bodyPr>
+          <a:lstStyle/>
+          <a:p>
+            <a:r>
+              <a:rPr sz="1400" b="0" i="0">
+                <a:solidFill>
+                  <a:srgbClr val="1B2330"/>
+                </a:solidFill>
+                <a:latin typeface="Montserrat"/>
+              </a:rPr>
+              <a:t>Conducido: toma el aire del local y saca los humos fuera</a:t>
+            </a:r>
+          </a:p>
+        </p:txBody>
+      </p:sp>
+      <p:sp>
+        <p:nvSpPr>
+          <p:cNvPr id="20" name="Rounded Rectangle 19"/>
+          <p:cNvSpPr/>
+          <p:nvPr/>
+        </p:nvSpPr>
+        <p:spPr>
+          <a:xfrm>
+            <a:off x="6355080" y="4617720"/>
+            <a:ext cx="4983480" cy="1143000"/>
+          </a:xfrm>
+          <a:prstGeom prst="roundRect">
+            <a:avLst/>
+          </a:prstGeom>
+          <a:solidFill>
+            <a:srgbClr val="F3F6FB"/>
+          </a:solidFill>
+          <a:ln w="12700">
+            <a:solidFill>
+              <a:srgbClr val="C7D2E6"/>
+            </a:solidFill>
+          </a:ln>
+          <a:effectLst/>
+        </p:spPr>
+        <p:style>
+          <a:lnRef idx="1">
+            <a:schemeClr val="accent1"/>
+          </a:lnRef>
+          <a:fillRef idx="3">
+            <a:schemeClr val="accent1"/>
+          </a:fillRef>
+          <a:effectRef idx="2">
+            <a:schemeClr val="accent1"/>
+          </a:effectRef>
+          <a:fontRef idx="minor">
+            <a:schemeClr val="lt1"/>
+          </a:fontRef>
+        </p:style>
+        <p:txBody>
+          <a:bodyPr rtlCol="0" anchor="ctr"/>
+          <a:lstStyle/>
+          <a:p>
+            <a:pPr algn="ctr"/>
+          </a:p>
+        </p:txBody>
+      </p:sp>
+      <p:sp>
+        <p:nvSpPr>
+          <p:cNvPr id="21" name="Rectangle 20"/>
+          <p:cNvSpPr/>
+          <p:nvPr/>
+        </p:nvSpPr>
+        <p:spPr>
+          <a:xfrm>
+            <a:off x="6355080" y="4617720"/>
+            <a:ext cx="640080" cy="1143000"/>
+          </a:xfrm>
+          <a:prstGeom prst="rect">
+            <a:avLst/>
+          </a:prstGeom>
+          <a:solidFill>
+            <a:srgbClr val="1E2761"/>
+          </a:solidFill>
+          <a:ln>
+            <a:noFill/>
+          </a:ln>
+          <a:effectLst/>
+        </p:spPr>
+        <p:style>
+          <a:lnRef idx="1">
+            <a:schemeClr val="accent1"/>
+          </a:lnRef>
+          <a:fillRef idx="3">
+            <a:schemeClr val="accent1"/>
+          </a:fillRef>
+          <a:effectRef idx="2">
+            <a:schemeClr val="accent1"/>
+          </a:effectRef>
+          <a:fontRef idx="minor">
+            <a:schemeClr val="lt1"/>
+          </a:fontRef>
+        </p:style>
+        <p:txBody>
+          <a:bodyPr rtlCol="0" anchor="ctr"/>
+          <a:lstStyle/>
+          <a:p>
+            <a:pPr algn="ctr"/>
+          </a:p>
+        </p:txBody>
+      </p:sp>
+      <p:sp>
+        <p:nvSpPr>
+          <p:cNvPr id="22" name="TextBox 21"/>
+          <p:cNvSpPr txBox="1"/>
+          <p:nvPr/>
+        </p:nvSpPr>
+        <p:spPr>
+          <a:xfrm>
+            <a:off x="6355080" y="4937760"/>
+            <a:ext cx="640080" cy="548640"/>
+          </a:xfrm>
+          <a:prstGeom prst="rect">
+            <a:avLst/>
+          </a:prstGeom>
+          <a:noFill/>
+        </p:spPr>
+        <p:txBody>
+          <a:bodyPr wrap="square">
+            <a:spAutoFit/>
+          </a:bodyPr>
+          <a:lstStyle/>
+          <a:p>
+            <a:pPr algn="ctr"/>
+            <a:r>
+              <a:rPr sz="2200" b="1" i="0">
+                <a:solidFill>
+                  <a:srgbClr val="FFFFFF"/>
+                </a:solidFill>
+                <a:latin typeface="Montserrat"/>
+              </a:rPr>
+              <a:t>D</a:t>
+            </a:r>
+          </a:p>
+        </p:txBody>
+      </p:sp>
+      <p:sp>
+        <p:nvSpPr>
+          <p:cNvPr id="23" name="TextBox 22"/>
+          <p:cNvSpPr txBox="1"/>
+          <p:nvPr/>
+        </p:nvSpPr>
+        <p:spPr>
+          <a:xfrm>
+            <a:off x="7132320" y="4800600"/>
+            <a:ext cx="4114800" cy="868680"/>
+          </a:xfrm>
+          <a:prstGeom prst="rect">
+            <a:avLst/>
+          </a:prstGeom>
+          <a:noFill/>
+        </p:spPr>
+        <p:txBody>
+          <a:bodyPr wrap="square">
+            <a:spAutoFit/>
+          </a:bodyPr>
+          <a:lstStyle/>
+          <a:p>
+            <a:r>
+              <a:rPr sz="1400" b="0" i="0">
+                <a:solidFill>
+                  <a:srgbClr val="1B2330"/>
+                </a:solidFill>
+                <a:latin typeface="Montserrat"/>
+              </a:rPr>
+              <a:t>La categoría más alta del instalador</a:t>
+            </a:r>
+          </a:p>
+        </p:txBody>
+      </p:sp>
+    </p:spTree>
+  </p:cSld>
+  <p:clrMapOvr>
+    <a:masterClrMapping/>
+  </p:clrMapOvr>
+  <mc:AlternateContent xmlns:mc="http://schemas.openxmlformats.org/markup-compatibility/2006">
+    <mc:Choice xmlns:p14="http://schemas.microsoft.com/office/powerpoint/2010/main" Requires="p14">
+      <p:transition spd="med" p14:dur="700">
+        <p14:cube dir="r"/>
+      </p:transition>
+    </mc:Choice>
+    <mc:Fallback>
+      <p:transition spd="med">
+        <p:push dir="r"/>
+      </p:transition>
+    </mc:Fallback>
+  </mc:AlternateContent>
+</p:sld>
+</file>
+
+<file path=ppt/slides/slide19.xml><?xml version="1.0" encoding="utf-8"?>
+<p:sld xmlns:a="http://schemas.openxmlformats.org/drawingml/2006/main" xmlns:p="http://schemas.openxmlformats.org/presentationml/2006/main" xmlns:r="http://schemas.openxmlformats.org/officeDocument/2006/relationships">
+  <p:cSld>
+    <p:spTree>
+      <p:nvGrpSpPr>
+        <p:cNvPr id="1" name=""/>
+        <p:cNvGrpSpPr/>
+        <p:nvPr/>
+      </p:nvGrpSpPr>
+      <p:grpSpPr/>
+      <p:sp>
+        <p:nvSpPr>
+          <p:cNvPr id="2" name="Rectangle 1"/>
+          <p:cNvSpPr/>
+          <p:nvPr/>
+        </p:nvSpPr>
+        <p:spPr>
+          <a:xfrm>
+            <a:off x="0" y="0"/>
+            <a:ext cx="12191695" cy="6858000"/>
+          </a:xfrm>
+          <a:prstGeom prst="rect">
+            <a:avLst/>
+          </a:prstGeom>
+          <a:solidFill>
+            <a:srgbClr val="FFFFFF"/>
+          </a:solidFill>
+          <a:ln>
+            <a:noFill/>
+          </a:ln>
+          <a:effectLst/>
+        </p:spPr>
+        <p:style>
+          <a:lnRef idx="1">
+            <a:schemeClr val="accent1"/>
+          </a:lnRef>
+          <a:fillRef idx="3">
+            <a:schemeClr val="accent1"/>
+          </a:fillRef>
+          <a:effectRef idx="2">
+            <a:schemeClr val="accent1"/>
+          </a:effectRef>
+          <a:fontRef idx="minor">
+            <a:schemeClr val="lt1"/>
+          </a:fontRef>
+        </p:style>
+        <p:txBody>
+          <a:bodyPr rtlCol="0" anchor="ctr"/>
+          <a:lstStyle/>
+          <a:p>
+            <a:pPr algn="ctr"/>
+          </a:p>
+        </p:txBody>
+      </p:sp>
+      <p:sp>
+        <p:nvSpPr>
+          <p:cNvPr id="3" name="TextBox 2"/>
+          <p:cNvSpPr txBox="1"/>
+          <p:nvPr/>
+        </p:nvSpPr>
+        <p:spPr>
+          <a:xfrm>
+            <a:off x="10607040" y="320040"/>
+            <a:ext cx="1371600" cy="365760"/>
+          </a:xfrm>
+          <a:prstGeom prst="rect">
+            <a:avLst/>
+          </a:prstGeom>
+          <a:noFill/>
+        </p:spPr>
+        <p:txBody>
+          <a:bodyPr wrap="square">
+            <a:spAutoFit/>
+          </a:bodyPr>
+          <a:lstStyle/>
+          <a:p>
+            <a:pPr algn="r"/>
+            <a:r>
+              <a:rPr sz="1000" b="1" i="0">
+                <a:solidFill>
+                  <a:srgbClr val="64748B"/>
+                </a:solidFill>
+                <a:latin typeface="Montserrat"/>
+              </a:rPr>
+              <a:t>019 / 020</a:t>
+            </a:r>
+          </a:p>
+        </p:txBody>
+      </p:sp>
+      <p:sp>
+        <p:nvSpPr>
+          <p:cNvPr id="4" name="TextBox 3"/>
+          <p:cNvSpPr txBox="1"/>
+          <p:nvPr/>
+        </p:nvSpPr>
+        <p:spPr>
+          <a:xfrm>
+            <a:off x="457200" y="6419088"/>
+            <a:ext cx="8229600" cy="365760"/>
+          </a:xfrm>
+          <a:prstGeom prst="rect">
+            <a:avLst/>
+          </a:prstGeom>
+          <a:noFill/>
+        </p:spPr>
+        <p:txBody>
+          <a:bodyPr wrap="square">
+            <a:spAutoFit/>
+          </a:bodyPr>
+          <a:lstStyle/>
+          <a:p>
+            <a:r>
+              <a:rPr sz="900" b="0" i="0">
+                <a:solidFill>
+                  <a:srgbClr val="64748B"/>
+                </a:solidFill>
+                <a:latin typeface="Montserrat"/>
+              </a:rPr>
+              <a:t>Curso Gas B · Tema 06 · Instaladores y empresas instaladoras</a:t>
+            </a:r>
+          </a:p>
+        </p:txBody>
+      </p:sp>
+      <p:sp>
+        <p:nvSpPr>
+          <p:cNvPr id="5" name="Rectangle 4"/>
+          <p:cNvSpPr/>
+          <p:nvPr/>
+        </p:nvSpPr>
+        <p:spPr>
+          <a:xfrm>
+            <a:off x="0" y="0"/>
+            <a:ext cx="12191695" cy="1143000"/>
+          </a:xfrm>
+          <a:prstGeom prst="rect">
+            <a:avLst/>
+          </a:prstGeom>
+          <a:solidFill>
+            <a:srgbClr val="1E8E4B"/>
+          </a:solidFill>
+          <a:ln>
+            <a:noFill/>
+          </a:ln>
+          <a:effectLst/>
+        </p:spPr>
+        <p:style>
+          <a:lnRef idx="1">
+            <a:schemeClr val="accent1"/>
+          </a:lnRef>
+          <a:fillRef idx="3">
+            <a:schemeClr val="accent1"/>
+          </a:fillRef>
+          <a:effectRef idx="2">
+            <a:schemeClr val="accent1"/>
+          </a:effectRef>
+          <a:fontRef idx="minor">
+            <a:schemeClr val="lt1"/>
+          </a:fontRef>
+        </p:style>
+        <p:txBody>
+          <a:bodyPr rtlCol="0" anchor="ctr"/>
+          <a:lstStyle/>
+          <a:p>
+            <a:pPr algn="ctr"/>
+          </a:p>
+        </p:txBody>
+      </p:sp>
+      <p:sp>
+        <p:nvSpPr>
+          <p:cNvPr id="6" name="TextBox 5"/>
+          <p:cNvSpPr txBox="1"/>
+          <p:nvPr/>
+        </p:nvSpPr>
+        <p:spPr>
+          <a:xfrm>
+            <a:off x="822960" y="274320"/>
+            <a:ext cx="10515600" cy="640080"/>
+          </a:xfrm>
+          <a:prstGeom prst="rect">
+            <a:avLst/>
+          </a:prstGeom>
+          <a:noFill/>
+        </p:spPr>
+        <p:txBody>
+          <a:bodyPr wrap="square">
+            <a:spAutoFit/>
+          </a:bodyPr>
+          <a:lstStyle/>
+          <a:p>
+            <a:r>
+              <a:rPr sz="2400" b="1" i="0">
+                <a:solidFill>
+                  <a:srgbClr val="FFFFFF"/>
+                </a:solidFill>
+                <a:latin typeface="Montserrat"/>
+              </a:rPr>
+              <a:t>✔  RESPUESTA:  A</a:t>
+            </a:r>
+          </a:p>
+        </p:txBody>
+      </p:sp>
+      <p:sp>
+        <p:nvSpPr>
+          <p:cNvPr id="7" name="TextBox 6"/>
+          <p:cNvSpPr txBox="1"/>
+          <p:nvPr/>
+        </p:nvSpPr>
+        <p:spPr>
+          <a:xfrm>
+            <a:off x="822960" y="1417320"/>
+            <a:ext cx="10515600" cy="914400"/>
+          </a:xfrm>
+          <a:prstGeom prst="rect">
+            <a:avLst/>
+          </a:prstGeom>
+          <a:noFill/>
+        </p:spPr>
+        <p:txBody>
+          <a:bodyPr wrap="square">
+            <a:spAutoFit/>
+          </a:bodyPr>
+          <a:lstStyle/>
+          <a:p>
+            <a:r>
+              <a:rPr sz="1800" b="1" i="0">
+                <a:solidFill>
+                  <a:srgbClr val="64748B"/>
+                </a:solidFill>
+                <a:latin typeface="Montserrat"/>
+              </a:rPr>
+              <a:t>En el anexo 2, ¿qué es un aparato de tipo A?</a:t>
+            </a:r>
+          </a:p>
+        </p:txBody>
+      </p:sp>
+      <p:sp>
+        <p:nvSpPr>
+          <p:cNvPr id="8" name="Rounded Rectangle 7"/>
+          <p:cNvSpPr/>
+          <p:nvPr/>
+        </p:nvSpPr>
+        <p:spPr>
+          <a:xfrm>
+            <a:off x="822960" y="2514600"/>
+            <a:ext cx="10515600" cy="914400"/>
+          </a:xfrm>
+          <a:prstGeom prst="roundRect">
+            <a:avLst/>
+          </a:prstGeom>
+          <a:solidFill>
+            <a:srgbClr val="E9F6EE"/>
+          </a:solidFill>
+          <a:ln w="12700">
+            <a:solidFill>
+              <a:srgbClr val="1E8E4B"/>
+            </a:solidFill>
+          </a:ln>
+          <a:effectLst/>
+        </p:spPr>
+        <p:style>
+          <a:lnRef idx="1">
+            <a:schemeClr val="accent1"/>
+          </a:lnRef>
+          <a:fillRef idx="3">
+            <a:schemeClr val="accent1"/>
+          </a:fillRef>
+          <a:effectRef idx="2">
+            <a:schemeClr val="accent1"/>
+          </a:effectRef>
+          <a:fontRef idx="minor">
+            <a:schemeClr val="lt1"/>
+          </a:fontRef>
+        </p:style>
+        <p:txBody>
+          <a:bodyPr rtlCol="0" anchor="ctr"/>
+          <a:lstStyle/>
+          <a:p>
+            <a:pPr algn="ctr"/>
+          </a:p>
+        </p:txBody>
+      </p:sp>
+      <p:sp>
+        <p:nvSpPr>
+          <p:cNvPr id="9" name="TextBox 8"/>
+          <p:cNvSpPr txBox="1"/>
+          <p:nvPr/>
+        </p:nvSpPr>
+        <p:spPr>
+          <a:xfrm>
+            <a:off x="1097280" y="2697480"/>
+            <a:ext cx="10058400" cy="640080"/>
+          </a:xfrm>
+          <a:prstGeom prst="rect">
+            <a:avLst/>
+          </a:prstGeom>
+          <a:noFill/>
+        </p:spPr>
+        <p:txBody>
+          <a:bodyPr wrap="square">
+            <a:spAutoFit/>
+          </a:bodyPr>
+          <a:lstStyle/>
+          <a:p>
+            <a:r>
+              <a:rPr sz="1800" b="1" i="0">
+                <a:solidFill>
+                  <a:srgbClr val="1E8E4B"/>
+                </a:solidFill>
+                <a:latin typeface="Montserrat"/>
+              </a:rPr>
+              <a:t>A.  </a:t>
+            </a:r>
+            <a:r>
+              <a:rPr sz="1800" b="1" i="0">
+                <a:solidFill>
+                  <a:srgbClr val="1E2761"/>
+                </a:solidFill>
+                <a:latin typeface="Montserrat"/>
+              </a:rPr>
+              <a:t>No conducido: evacúa los humos al propio local</a:t>
+            </a:r>
+          </a:p>
+        </p:txBody>
+      </p:sp>
+      <p:sp>
+        <p:nvSpPr>
+          <p:cNvPr id="10" name="TextBox 9"/>
+          <p:cNvSpPr txBox="1"/>
+          <p:nvPr/>
+        </p:nvSpPr>
+        <p:spPr>
+          <a:xfrm>
+            <a:off x="822960" y="3749039"/>
+            <a:ext cx="10515600" cy="2194560"/>
+          </a:xfrm>
+          <a:prstGeom prst="rect">
+            <a:avLst/>
+          </a:prstGeom>
+          <a:noFill/>
+        </p:spPr>
+        <p:txBody>
+          <a:bodyPr wrap="square">
+            <a:spAutoFit/>
+          </a:bodyPr>
+          <a:lstStyle/>
+          <a:p>
+            <a:r>
+              <a:rPr sz="1500" b="1" i="0">
+                <a:solidFill>
+                  <a:srgbClr val="E8801A"/>
+                </a:solidFill>
+                <a:latin typeface="Montserrat"/>
+              </a:rPr>
+              <a:t>Por qué:  </a:t>
+            </a:r>
+            <a:r>
+              <a:rPr sz="1500" b="0" i="0">
+                <a:solidFill>
+                  <a:srgbClr val="1B2330"/>
+                </a:solidFill>
+                <a:latin typeface="Montserrat"/>
+              </a:rPr>
+              <a:t>El tipo A es el aparato no conducido: suelta los productos de la combustión al local. No tiene nada que ver con la categoría A del instalador.</a:t>
+            </a:r>
+          </a:p>
+        </p:txBody>
+      </p:sp>
+    </p:spTree>
+  </p:cSld>
+  <p:clrMapOvr>
+    <a:masterClrMapping/>
+  </p:clrMapOvr>
+  <mc:AlternateContent xmlns:mc="http://schemas.openxmlformats.org/markup-compatibility/2006">
+    <mc:Choice xmlns:p14="http://schemas.microsoft.com/office/powerpoint/2010/main" Requires="p14">
+      <p:transition spd="med" p14:dur="700">
+        <p14:cube dir="l"/>
+      </p:transition>
+    </mc:Choice>
+    <mc:Fallback>
+      <p:transition spd="med">
+        <p:push dir="l"/>
+      </p:transition>
+    </mc:Fallback>
+  </mc:AlternateContent>
 </p:sld>
 </file>
 
@@ -8076,7 +10645,7 @@
                 </a:solidFill>
                 <a:latin typeface="Montserrat"/>
               </a:rPr>
-              <a:t>002 / 016</a:t>
+              <a:t>002 / 020</a:t>
             </a:r>
           </a:p>
         </p:txBody>
@@ -8151,7 +10720,7 @@
       </p:sp>
       <p:sp>
         <p:nvSpPr>
-          <p:cNvPr id="6" name="Rounded Rectangle 5"/>
+          <p:cNvPr id="6" name="Rectangle 5"/>
           <p:cNvSpPr/>
           <p:nvPr/>
         </p:nvSpPr>
@@ -8160,7 +10729,7 @@
             <a:off x="868680" y="1234440"/>
             <a:ext cx="1463040" cy="73152"/>
           </a:xfrm>
-          <a:prstGeom prst="roundRect">
+          <a:prstGeom prst="rect">
             <a:avLst/>
           </a:prstGeom>
           <a:solidFill>
@@ -8241,14 +10810,58 @@
       </p:sp>
       <p:sp>
         <p:nvSpPr>
-          <p:cNvPr id="8" name="TextBox 7"/>
+          <p:cNvPr id="8" name="Rectangle 7"/>
+          <p:cNvSpPr/>
+          <p:nvPr/>
+        </p:nvSpPr>
+        <p:spPr>
+          <a:xfrm>
+            <a:off x="822960" y="2011680"/>
+            <a:ext cx="3017520" cy="128016"/>
+          </a:xfrm>
+          <a:prstGeom prst="rect">
+            <a:avLst/>
+          </a:prstGeom>
+          <a:solidFill>
+            <a:srgbClr val="E8801A"/>
+          </a:solidFill>
+          <a:ln>
+            <a:noFill/>
+          </a:ln>
+          <a:effectLst/>
+        </p:spPr>
+        <p:style>
+          <a:lnRef idx="1">
+            <a:schemeClr val="accent1"/>
+          </a:lnRef>
+          <a:fillRef idx="3">
+            <a:schemeClr val="accent1"/>
+          </a:fillRef>
+          <a:effectRef idx="2">
+            <a:schemeClr val="accent1"/>
+          </a:effectRef>
+          <a:fontRef idx="minor">
+            <a:schemeClr val="lt1"/>
+          </a:fontRef>
+        </p:style>
+        <p:txBody>
+          <a:bodyPr rtlCol="0" anchor="ctr"/>
+          <a:lstStyle/>
+          <a:p>
+            <a:pPr algn="ctr"/>
+          </a:p>
+        </p:txBody>
+      </p:sp>
+      <p:sp>
+        <p:nvSpPr>
+          <p:cNvPr id="9" name="TextBox 8"/>
           <p:cNvSpPr txBox="1"/>
           <p:nvPr/>
         </p:nvSpPr>
         <p:spPr>
           <a:xfrm>
-            <a:off x="822960" y="2331720"/>
-            <a:ext cx="3017520" cy="1463040"/>
+            <a:off x="822960" y="2377440"/>
+            <a:ext cx="3017520" cy="1371600"/>
           </a:xfrm>
           <a:prstGeom prst="rect">
             <a:avLst/>
@@ -8263,7 +10876,7 @@
           <a:p>
             <a:pPr algn="ctr"/>
             <a:r>
-              <a:rPr sz="6000" b="1" i="0">
+              <a:rPr sz="5800" b="1" i="0">
                 <a:solidFill>
                   <a:srgbClr val="1E2761"/>
                 </a:solidFill>
@@ -8276,13 +10889,13 @@
       </p:sp>
       <p:sp>
         <p:nvSpPr>
-          <p:cNvPr id="9" name="TextBox 8"/>
+          <p:cNvPr id="10" name="TextBox 9"/>
           <p:cNvSpPr txBox="1"/>
           <p:nvPr/>
         </p:nvSpPr>
         <p:spPr>
           <a:xfrm>
-            <a:off x="1051560" y="3611880"/>
+            <a:off x="1051560" y="3657600"/>
             <a:ext cx="2560320" cy="1005840"/>
           </a:xfrm>
           <a:prstGeom prst="rect">
@@ -8311,7 +10924,7 @@
       </p:sp>
       <p:sp>
         <p:nvSpPr>
-          <p:cNvPr id="10" name="Rounded Rectangle 9"/>
+          <p:cNvPr id="11" name="Rounded Rectangle 10"/>
           <p:cNvSpPr/>
           <p:nvPr/>
         </p:nvSpPr>
@@ -8357,14 +10970,58 @@
       </p:sp>
       <p:sp>
         <p:nvSpPr>
-          <p:cNvPr id="11" name="TextBox 10"/>
+          <p:cNvPr id="12" name="Rectangle 11"/>
+          <p:cNvSpPr/>
+          <p:nvPr/>
+        </p:nvSpPr>
+        <p:spPr>
+          <a:xfrm>
+            <a:off x="4617720" y="2011680"/>
+            <a:ext cx="3017520" cy="128016"/>
+          </a:xfrm>
+          <a:prstGeom prst="rect">
+            <a:avLst/>
+          </a:prstGeom>
+          <a:solidFill>
+            <a:srgbClr val="E8801A"/>
+          </a:solidFill>
+          <a:ln>
+            <a:noFill/>
+          </a:ln>
+          <a:effectLst/>
+        </p:spPr>
+        <p:style>
+          <a:lnRef idx="1">
+            <a:schemeClr val="accent1"/>
+          </a:lnRef>
+          <a:fillRef idx="3">
+            <a:schemeClr val="accent1"/>
+          </a:fillRef>
+          <a:effectRef idx="2">
+            <a:schemeClr val="accent1"/>
+          </a:effectRef>
+          <a:fontRef idx="minor">
+            <a:schemeClr val="lt1"/>
+          </a:fontRef>
+        </p:style>
+        <p:txBody>
+          <a:bodyPr rtlCol="0" anchor="ctr"/>
+          <a:lstStyle/>
+          <a:p>
+            <a:pPr algn="ctr"/>
+          </a:p>
+        </p:txBody>
+      </p:sp>
+      <p:sp>
+        <p:nvSpPr>
+          <p:cNvPr id="13" name="TextBox 12"/>
           <p:cNvSpPr txBox="1"/>
           <p:nvPr/>
         </p:nvSpPr>
         <p:spPr>
           <a:xfrm>
-            <a:off x="4617720" y="2331720"/>
-            <a:ext cx="3017520" cy="1463040"/>
+            <a:off x="4617720" y="2377440"/>
+            <a:ext cx="3017520" cy="1371600"/>
           </a:xfrm>
           <a:prstGeom prst="rect">
             <a:avLst/>
@@ -8379,7 +11036,7 @@
           <a:p>
             <a:pPr algn="ctr"/>
             <a:r>
-              <a:rPr sz="6000" b="1" i="0">
+              <a:rPr sz="5800" b="1" i="0">
                 <a:solidFill>
                   <a:srgbClr val="1E2761"/>
                 </a:solidFill>
@@ -8392,13 +11049,13 @@
       </p:sp>
       <p:sp>
         <p:nvSpPr>
-          <p:cNvPr id="12" name="TextBox 11"/>
+          <p:cNvPr id="14" name="TextBox 13"/>
           <p:cNvSpPr txBox="1"/>
           <p:nvPr/>
         </p:nvSpPr>
         <p:spPr>
           <a:xfrm>
-            <a:off x="4846320" y="3611880"/>
+            <a:off x="4846320" y="3657600"/>
             <a:ext cx="2560320" cy="1005840"/>
           </a:xfrm>
           <a:prstGeom prst="rect">
@@ -8427,7 +11084,7 @@
       </p:sp>
       <p:sp>
         <p:nvSpPr>
-          <p:cNvPr id="13" name="Rounded Rectangle 12"/>
+          <p:cNvPr id="15" name="Rounded Rectangle 14"/>
           <p:cNvSpPr/>
           <p:nvPr/>
         </p:nvSpPr>
@@ -8473,14 +11130,58 @@
       </p:sp>
       <p:sp>
         <p:nvSpPr>
-          <p:cNvPr id="14" name="TextBox 13"/>
+          <p:cNvPr id="16" name="Rectangle 15"/>
+          <p:cNvSpPr/>
+          <p:nvPr/>
+        </p:nvSpPr>
+        <p:spPr>
+          <a:xfrm>
+            <a:off x="8412480" y="2011680"/>
+            <a:ext cx="3017520" cy="128016"/>
+          </a:xfrm>
+          <a:prstGeom prst="rect">
+            <a:avLst/>
+          </a:prstGeom>
+          <a:solidFill>
+            <a:srgbClr val="E8801A"/>
+          </a:solidFill>
+          <a:ln>
+            <a:noFill/>
+          </a:ln>
+          <a:effectLst/>
+        </p:spPr>
+        <p:style>
+          <a:lnRef idx="1">
+            <a:schemeClr val="accent1"/>
+          </a:lnRef>
+          <a:fillRef idx="3">
+            <a:schemeClr val="accent1"/>
+          </a:fillRef>
+          <a:effectRef idx="2">
+            <a:schemeClr val="accent1"/>
+          </a:effectRef>
+          <a:fontRef idx="minor">
+            <a:schemeClr val="lt1"/>
+          </a:fontRef>
+        </p:style>
+        <p:txBody>
+          <a:bodyPr rtlCol="0" anchor="ctr"/>
+          <a:lstStyle/>
+          <a:p>
+            <a:pPr algn="ctr"/>
+          </a:p>
+        </p:txBody>
+      </p:sp>
+      <p:sp>
+        <p:nvSpPr>
+          <p:cNvPr id="17" name="TextBox 16"/>
           <p:cNvSpPr txBox="1"/>
           <p:nvPr/>
         </p:nvSpPr>
         <p:spPr>
           <a:xfrm>
-            <a:off x="8412480" y="2331720"/>
-            <a:ext cx="3017520" cy="1463040"/>
+            <a:off x="8412480" y="2377440"/>
+            <a:ext cx="3017520" cy="1371600"/>
           </a:xfrm>
           <a:prstGeom prst="rect">
             <a:avLst/>
@@ -8495,7 +11196,7 @@
           <a:p>
             <a:pPr algn="ctr"/>
             <a:r>
-              <a:rPr sz="6000" b="1" i="0">
+              <a:rPr sz="5800" b="1" i="0">
                 <a:solidFill>
                   <a:srgbClr val="1E2761"/>
                 </a:solidFill>
@@ -8508,13 +11209,13 @@
       </p:sp>
       <p:sp>
         <p:nvSpPr>
-          <p:cNvPr id="15" name="TextBox 14"/>
+          <p:cNvPr id="18" name="TextBox 17"/>
           <p:cNvSpPr txBox="1"/>
           <p:nvPr/>
         </p:nvSpPr>
         <p:spPr>
           <a:xfrm>
-            <a:off x="8641080" y="3611880"/>
+            <a:off x="8641080" y="3657600"/>
             <a:ext cx="2560320" cy="1005840"/>
           </a:xfrm>
           <a:prstGeom prst="rect">
@@ -8546,6 +11247,405 @@
   <p:clrMapOvr>
     <a:masterClrMapping/>
   </p:clrMapOvr>
+  <mc:AlternateContent xmlns:mc="http://schemas.openxmlformats.org/markup-compatibility/2006">
+    <mc:Choice xmlns:p14="http://schemas.microsoft.com/office/powerpoint/2010/main" Requires="p14">
+      <p:transition spd="med" p14:dur="700">
+        <p14:cube dir="r"/>
+      </p:transition>
+    </mc:Choice>
+    <mc:Fallback>
+      <p:transition spd="med">
+        <p:push dir="r"/>
+      </p:transition>
+    </mc:Fallback>
+  </mc:AlternateContent>
+</p:sld>
+</file>
+
+<file path=ppt/slides/slide20.xml><?xml version="1.0" encoding="utf-8"?>
+<p:sld xmlns:a="http://schemas.openxmlformats.org/drawingml/2006/main" xmlns:p="http://schemas.openxmlformats.org/presentationml/2006/main" xmlns:r="http://schemas.openxmlformats.org/officeDocument/2006/relationships">
+  <p:cSld>
+    <p:spTree>
+      <p:nvGrpSpPr>
+        <p:cNvPr id="1" name=""/>
+        <p:cNvGrpSpPr/>
+        <p:nvPr/>
+      </p:nvGrpSpPr>
+      <p:grpSpPr/>
+      <p:sp>
+        <p:nvSpPr>
+          <p:cNvPr id="2" name="Rectangle 1"/>
+          <p:cNvSpPr/>
+          <p:nvPr/>
+        </p:nvSpPr>
+        <p:spPr>
+          <a:xfrm>
+            <a:off x="0" y="0"/>
+            <a:ext cx="12191695" cy="6858000"/>
+          </a:xfrm>
+          <a:prstGeom prst="rect">
+            <a:avLst/>
+          </a:prstGeom>
+          <a:solidFill>
+            <a:srgbClr val="1E2761"/>
+          </a:solidFill>
+          <a:ln>
+            <a:noFill/>
+          </a:ln>
+          <a:effectLst/>
+        </p:spPr>
+        <p:style>
+          <a:lnRef idx="1">
+            <a:schemeClr val="accent1"/>
+          </a:lnRef>
+          <a:fillRef idx="3">
+            <a:schemeClr val="accent1"/>
+          </a:fillRef>
+          <a:effectRef idx="2">
+            <a:schemeClr val="accent1"/>
+          </a:effectRef>
+          <a:fontRef idx="minor">
+            <a:schemeClr val="lt1"/>
+          </a:fontRef>
+        </p:style>
+        <p:txBody>
+          <a:bodyPr rtlCol="0" anchor="ctr"/>
+          <a:lstStyle/>
+          <a:p>
+            <a:pPr algn="ctr"/>
+          </a:p>
+        </p:txBody>
+      </p:sp>
+      <p:sp>
+        <p:nvSpPr>
+          <p:cNvPr id="3" name="TextBox 2"/>
+          <p:cNvSpPr txBox="1"/>
+          <p:nvPr/>
+        </p:nvSpPr>
+        <p:spPr>
+          <a:xfrm>
+            <a:off x="822960" y="640080"/>
+            <a:ext cx="10515600" cy="457200"/>
+          </a:xfrm>
+          <a:prstGeom prst="rect">
+            <a:avLst/>
+          </a:prstGeom>
+          <a:noFill/>
+        </p:spPr>
+        <p:txBody>
+          <a:bodyPr wrap="square">
+            <a:spAutoFit/>
+          </a:bodyPr>
+          <a:lstStyle/>
+          <a:p>
+            <a:r>
+              <a:rPr sz="1400" b="1" i="0">
+                <a:solidFill>
+                  <a:srgbClr val="F4A24C"/>
+                </a:solidFill>
+                <a:latin typeface="Montserrat"/>
+              </a:rPr>
+              <a:t>LO QUE YA DOMINAS</a:t>
+            </a:r>
+          </a:p>
+        </p:txBody>
+      </p:sp>
+      <p:sp>
+        <p:nvSpPr>
+          <p:cNvPr id="4" name="Rectangle 3"/>
+          <p:cNvSpPr/>
+          <p:nvPr/>
+        </p:nvSpPr>
+        <p:spPr>
+          <a:xfrm>
+            <a:off x="868680" y="1051560"/>
+            <a:ext cx="1463040" cy="82296"/>
+          </a:xfrm>
+          <a:prstGeom prst="rect">
+            <a:avLst/>
+          </a:prstGeom>
+          <a:solidFill>
+            <a:srgbClr val="E8801A"/>
+          </a:solidFill>
+          <a:ln>
+            <a:noFill/>
+          </a:ln>
+          <a:effectLst/>
+        </p:spPr>
+        <p:style>
+          <a:lnRef idx="1">
+            <a:schemeClr val="accent1"/>
+          </a:lnRef>
+          <a:fillRef idx="3">
+            <a:schemeClr val="accent1"/>
+          </a:fillRef>
+          <a:effectRef idx="2">
+            <a:schemeClr val="accent1"/>
+          </a:effectRef>
+          <a:fontRef idx="minor">
+            <a:schemeClr val="lt1"/>
+          </a:fontRef>
+        </p:style>
+        <p:txBody>
+          <a:bodyPr rtlCol="0" anchor="ctr"/>
+          <a:lstStyle/>
+          <a:p>
+            <a:pPr algn="ctr"/>
+          </a:p>
+        </p:txBody>
+      </p:sp>
+      <p:sp>
+        <p:nvSpPr>
+          <p:cNvPr id="5" name="TextBox 4"/>
+          <p:cNvSpPr txBox="1"/>
+          <p:nvPr/>
+        </p:nvSpPr>
+        <p:spPr>
+          <a:xfrm>
+            <a:off x="822960" y="1234440"/>
+            <a:ext cx="10515600" cy="1097280"/>
+          </a:xfrm>
+          <a:prstGeom prst="rect">
+            <a:avLst/>
+          </a:prstGeom>
+          <a:noFill/>
+        </p:spPr>
+        <p:txBody>
+          <a:bodyPr wrap="square">
+            <a:spAutoFit/>
+          </a:bodyPr>
+          <a:lstStyle/>
+          <a:p>
+            <a:r>
+              <a:rPr sz="3400" b="1" i="0">
+                <a:solidFill>
+                  <a:srgbClr val="FFFFFF"/>
+                </a:solidFill>
+                <a:latin typeface="Montserrat"/>
+              </a:rPr>
+              <a:t>Ya dominas la ITC-ICG 09 entera</a:t>
+            </a:r>
+          </a:p>
+        </p:txBody>
+      </p:sp>
+      <p:sp>
+        <p:nvSpPr>
+          <p:cNvPr id="6" name="TextBox 5"/>
+          <p:cNvSpPr txBox="1"/>
+          <p:nvPr/>
+        </p:nvSpPr>
+        <p:spPr>
+          <a:xfrm>
+            <a:off x="822960" y="2606040"/>
+            <a:ext cx="10515600" cy="2743200"/>
+          </a:xfrm>
+          <a:prstGeom prst="rect">
+            <a:avLst/>
+          </a:prstGeom>
+          <a:noFill/>
+        </p:spPr>
+        <p:txBody>
+          <a:bodyPr wrap="square">
+            <a:spAutoFit/>
+          </a:bodyPr>
+          <a:lstStyle/>
+          <a:p>
+            <a:pPr>
+              <a:spcAft>
+                <a:spcPts val="1200"/>
+              </a:spcAft>
+            </a:pPr>
+            <a:r>
+              <a:rPr sz="2000" b="1" i="0">
+                <a:solidFill>
+                  <a:srgbClr val="F4A24C"/>
+                </a:solidFill>
+                <a:latin typeface="Montserrat"/>
+              </a:rPr>
+              <a:t>✓  </a:t>
+            </a:r>
+            <a:r>
+              <a:rPr sz="1900" b="0" i="0">
+                <a:solidFill>
+                  <a:srgbClr val="FFFFFF"/>
+                </a:solidFill>
+                <a:latin typeface="Montserrat"/>
+              </a:rPr>
+              <a:t>Anexo 1 = temario del examen, por capas</a:t>
+            </a:r>
+          </a:p>
+          <a:p>
+            <a:pPr>
+              <a:spcAft>
+                <a:spcPts val="1200"/>
+              </a:spcAft>
+            </a:pPr>
+            <a:r>
+              <a:rPr sz="2000" b="1" i="0">
+                <a:solidFill>
+                  <a:srgbClr val="F4A24C"/>
+                </a:solidFill>
+                <a:latin typeface="Montserrat"/>
+              </a:rPr>
+              <a:t>✓  </a:t>
+            </a:r>
+            <a:r>
+              <a:rPr sz="1900" b="0" i="0">
+                <a:solidFill>
+                  <a:srgbClr val="FFFFFF"/>
+                </a:solidFill>
+                <a:latin typeface="Montserrat"/>
+              </a:rPr>
+              <a:t>A incluye a B; B incluye a C</a:t>
+            </a:r>
+          </a:p>
+          <a:p>
+            <a:pPr>
+              <a:spcAft>
+                <a:spcPts val="1200"/>
+              </a:spcAft>
+            </a:pPr>
+            <a:r>
+              <a:rPr sz="2000" b="1" i="0">
+                <a:solidFill>
+                  <a:srgbClr val="F4A24C"/>
+                </a:solidFill>
+                <a:latin typeface="Montserrat"/>
+              </a:rPr>
+              <a:t>✓  </a:t>
+            </a:r>
+            <a:r>
+              <a:rPr sz="1900" b="0" i="0">
+                <a:solidFill>
+                  <a:srgbClr val="FFFFFF"/>
+                </a:solidFill>
+                <a:latin typeface="Montserrat"/>
+              </a:rPr>
+              <a:t>UNE 60670 las tres; UNE 60601 solo A y B</a:t>
+            </a:r>
+          </a:p>
+          <a:p>
+            <a:pPr>
+              <a:spcAft>
+                <a:spcPts val="1200"/>
+              </a:spcAft>
+            </a:pPr>
+            <a:r>
+              <a:rPr sz="2000" b="1" i="0">
+                <a:solidFill>
+                  <a:srgbClr val="F4A24C"/>
+                </a:solidFill>
+                <a:latin typeface="Montserrat"/>
+              </a:rPr>
+              <a:t>✓  </a:t>
+            </a:r>
+            <a:r>
+              <a:rPr sz="1900" b="0" i="0">
+                <a:solidFill>
+                  <a:srgbClr val="FFFFFF"/>
+                </a:solidFill>
+                <a:latin typeface="Montserrat"/>
+              </a:rPr>
+              <a:t>Tipos de aparato A/B/C no son categorías</a:t>
+            </a:r>
+          </a:p>
+        </p:txBody>
+      </p:sp>
+      <p:sp>
+        <p:nvSpPr>
+          <p:cNvPr id="7" name="Rounded Rectangle 6"/>
+          <p:cNvSpPr/>
+          <p:nvPr/>
+        </p:nvSpPr>
+        <p:spPr>
+          <a:xfrm>
+            <a:off x="822960" y="5532120"/>
+            <a:ext cx="10515600" cy="822960"/>
+          </a:xfrm>
+          <a:prstGeom prst="roundRect">
+            <a:avLst/>
+          </a:prstGeom>
+          <a:solidFill>
+            <a:srgbClr val="E8801A"/>
+          </a:solidFill>
+          <a:ln>
+            <a:noFill/>
+          </a:ln>
+          <a:effectLst/>
+        </p:spPr>
+        <p:style>
+          <a:lnRef idx="1">
+            <a:schemeClr val="accent1"/>
+          </a:lnRef>
+          <a:fillRef idx="3">
+            <a:schemeClr val="accent1"/>
+          </a:fillRef>
+          <a:effectRef idx="2">
+            <a:schemeClr val="accent1"/>
+          </a:effectRef>
+          <a:fontRef idx="minor">
+            <a:schemeClr val="lt1"/>
+          </a:fontRef>
+        </p:style>
+        <p:txBody>
+          <a:bodyPr rtlCol="0" anchor="ctr"/>
+          <a:lstStyle/>
+          <a:p>
+            <a:pPr algn="ctr"/>
+          </a:p>
+        </p:txBody>
+      </p:sp>
+      <p:sp>
+        <p:nvSpPr>
+          <p:cNvPr id="8" name="TextBox 7"/>
+          <p:cNvSpPr txBox="1"/>
+          <p:nvPr/>
+        </p:nvSpPr>
+        <p:spPr>
+          <a:xfrm>
+            <a:off x="1051560" y="5623560"/>
+            <a:ext cx="10058400" cy="640080"/>
+          </a:xfrm>
+          <a:prstGeom prst="rect">
+            <a:avLst/>
+          </a:prstGeom>
+          <a:noFill/>
+        </p:spPr>
+        <p:txBody>
+          <a:bodyPr wrap="square">
+            <a:spAutoFit/>
+          </a:bodyPr>
+          <a:lstStyle/>
+          <a:p>
+            <a:r>
+              <a:rPr sz="1500" b="1" i="1">
+                <a:solidFill>
+                  <a:srgbClr val="1E2761"/>
+                </a:solidFill>
+                <a:latin typeface="Montserrat"/>
+              </a:rPr>
+              <a:t>Cierras la ITC-ICG 09 de punta a punta. Ya piensas como un gasista.</a:t>
+            </a:r>
+          </a:p>
+        </p:txBody>
+      </p:sp>
+    </p:spTree>
+  </p:cSld>
+  <p:clrMapOvr>
+    <a:masterClrMapping/>
+  </p:clrMapOvr>
+  <mc:AlternateContent xmlns:mc="http://schemas.openxmlformats.org/markup-compatibility/2006">
+    <mc:Choice xmlns:p14="http://schemas.microsoft.com/office/powerpoint/2010/main" Requires="p14">
+      <p:transition spd="med" p14:dur="700">
+        <p14:cube dir="r"/>
+      </p:transition>
+    </mc:Choice>
+    <mc:Fallback>
+      <p:transition spd="med">
+        <p:push dir="r"/>
+      </p:transition>
+    </mc:Fallback>
+  </mc:AlternateContent>
 </p:sld>
 </file>
 
@@ -8633,7 +11733,7 @@
                 </a:solidFill>
                 <a:latin typeface="Montserrat"/>
               </a:rPr>
-              <a:t>003 / 016</a:t>
+              <a:t>003 / 020</a:t>
             </a:r>
           </a:p>
         </p:txBody>
@@ -8742,7 +11842,7 @@
       </p:sp>
       <p:sp>
         <p:nvSpPr>
-          <p:cNvPr id="7" name="Rounded Rectangle 6"/>
+          <p:cNvPr id="7" name="Rectangle 6"/>
           <p:cNvSpPr/>
           <p:nvPr/>
         </p:nvSpPr>
@@ -8751,7 +11851,7 @@
             <a:off x="868680" y="1673352"/>
             <a:ext cx="2011680" cy="73152"/>
           </a:xfrm>
-          <a:prstGeom prst="roundRect">
+          <a:prstGeom prst="rect">
             <a:avLst/>
           </a:prstGeom>
           <a:solidFill>
@@ -8962,6 +12062,18 @@
   <p:clrMapOvr>
     <a:masterClrMapping/>
   </p:clrMapOvr>
+  <mc:AlternateContent xmlns:mc="http://schemas.openxmlformats.org/markup-compatibility/2006">
+    <mc:Choice xmlns:p14="http://schemas.microsoft.com/office/powerpoint/2010/main" Requires="p14">
+      <p:transition spd="med" p14:dur="700">
+        <p14:cube dir="l"/>
+      </p:transition>
+    </mc:Choice>
+    <mc:Fallback>
+      <p:transition spd="med">
+        <p:push dir="l"/>
+      </p:transition>
+    </mc:Fallback>
+  </mc:AlternateContent>
 </p:sld>
 </file>
 
@@ -9049,7 +12161,7 @@
                 </a:solidFill>
                 <a:latin typeface="Montserrat"/>
               </a:rPr>
-              <a:t>004 / 016</a:t>
+              <a:t>004 / 020</a:t>
             </a:r>
           </a:p>
         </p:txBody>
@@ -9158,7 +12270,7 @@
       </p:sp>
       <p:sp>
         <p:nvSpPr>
-          <p:cNvPr id="7" name="Rounded Rectangle 6"/>
+          <p:cNvPr id="7" name="Rectangle 6"/>
           <p:cNvSpPr/>
           <p:nvPr/>
         </p:nvSpPr>
@@ -9167,7 +12279,7 @@
             <a:off x="868680" y="1627632"/>
             <a:ext cx="2011680" cy="73152"/>
           </a:xfrm>
-          <a:prstGeom prst="roundRect">
+          <a:prstGeom prst="rect">
             <a:avLst/>
           </a:prstGeom>
           <a:solidFill>
@@ -9209,7 +12321,7 @@
         <p:spPr>
           <a:xfrm>
             <a:off x="822960" y="1965960"/>
-            <a:ext cx="4983480" cy="4206240"/>
+            <a:ext cx="5029200" cy="4206240"/>
           </a:xfrm>
           <a:prstGeom prst="rect">
             <a:avLst/>
@@ -9331,8 +12443,8 @@
         </p:nvSpPr>
         <p:spPr>
           <a:xfrm>
-            <a:off x="5806440" y="1051560"/>
-            <a:ext cx="5298947" cy="4629150"/>
+            <a:off x="6080760" y="1965960"/>
+            <a:ext cx="5303520" cy="4572000"/>
           </a:xfrm>
           <a:prstGeom prst="roundRect">
             <a:avLst/>
@@ -9377,8 +12489,8 @@
         </p:nvSpPr>
         <p:spPr>
           <a:xfrm>
-            <a:off x="6080760" y="2726055"/>
-            <a:ext cx="4750307" cy="1280160"/>
+            <a:off x="6355080" y="3611880"/>
+            <a:ext cx="4754880" cy="1280160"/>
           </a:xfrm>
           <a:prstGeom prst="rect">
             <a:avLst/>
@@ -9399,7 +12511,7 @@
                 </a:solidFill>
                 <a:latin typeface="Montserrat"/>
               </a:rPr>
-              <a:t>IMAGEN REALISTA</a:t>
+              <a:t>IMAGEN</a:t>
             </a:r>
           </a:p>
           <a:p>
@@ -9421,6 +12533,18 @@
   <p:clrMapOvr>
     <a:masterClrMapping/>
   </p:clrMapOvr>
+  <mc:AlternateContent xmlns:mc="http://schemas.openxmlformats.org/markup-compatibility/2006">
+    <mc:Choice xmlns:p14="http://schemas.microsoft.com/office/powerpoint/2010/main" Requires="p14">
+      <p:transition spd="med" p14:dur="700">
+        <p14:cube dir="r"/>
+      </p:transition>
+    </mc:Choice>
+    <mc:Fallback>
+      <p:transition spd="med">
+        <p:push dir="r"/>
+      </p:transition>
+    </mc:Fallback>
+  </mc:AlternateContent>
 </p:sld>
 </file>
 
@@ -9508,7 +12632,7 @@
                 </a:solidFill>
                 <a:latin typeface="Montserrat"/>
               </a:rPr>
-              <a:t>005 / 016</a:t>
+              <a:t>005 / 020</a:t>
             </a:r>
           </a:p>
         </p:txBody>
@@ -9617,7 +12741,7 @@
       </p:sp>
       <p:sp>
         <p:nvSpPr>
-          <p:cNvPr id="7" name="Rounded Rectangle 6"/>
+          <p:cNvPr id="7" name="Rectangle 6"/>
           <p:cNvSpPr/>
           <p:nvPr/>
         </p:nvSpPr>
@@ -9626,7 +12750,7 @@
             <a:off x="868680" y="1627632"/>
             <a:ext cx="2011680" cy="73152"/>
           </a:xfrm>
-          <a:prstGeom prst="roundRect">
+          <a:prstGeom prst="rect">
             <a:avLst/>
           </a:prstGeom>
           <a:solidFill>
@@ -9667,8 +12791,8 @@
         </p:nvSpPr>
         <p:spPr>
           <a:xfrm>
-            <a:off x="822960" y="1965960"/>
-            <a:ext cx="4983480" cy="4206240"/>
+            <a:off x="6355080" y="1965960"/>
+            <a:ext cx="5029200" cy="4206240"/>
           </a:xfrm>
           <a:prstGeom prst="rect">
             <a:avLst/>
@@ -9790,8 +12914,8 @@
         </p:nvSpPr>
         <p:spPr>
           <a:xfrm>
-            <a:off x="5806440" y="1051560"/>
-            <a:ext cx="5298947" cy="4629150"/>
+            <a:off x="822960" y="1965960"/>
+            <a:ext cx="5303520" cy="4572000"/>
           </a:xfrm>
           <a:prstGeom prst="roundRect">
             <a:avLst/>
@@ -9836,8 +12960,8 @@
         </p:nvSpPr>
         <p:spPr>
           <a:xfrm>
-            <a:off x="6080760" y="2726055"/>
-            <a:ext cx="4750307" cy="1280160"/>
+            <a:off x="1097280" y="3611880"/>
+            <a:ext cx="4754880" cy="1280160"/>
           </a:xfrm>
           <a:prstGeom prst="rect">
             <a:avLst/>
@@ -9858,7 +12982,7 @@
                 </a:solidFill>
                 <a:latin typeface="Montserrat"/>
               </a:rPr>
-              <a:t>IMAGEN REALISTA</a:t>
+              <a:t>IMAGEN</a:t>
             </a:r>
           </a:p>
           <a:p>
@@ -9880,6 +13004,18 @@
   <p:clrMapOvr>
     <a:masterClrMapping/>
   </p:clrMapOvr>
+  <mc:AlternateContent xmlns:mc="http://schemas.openxmlformats.org/markup-compatibility/2006">
+    <mc:Choice xmlns:p14="http://schemas.microsoft.com/office/powerpoint/2010/main" Requires="p14">
+      <p:transition spd="med" p14:dur="700">
+        <p14:cube dir="l"/>
+      </p:transition>
+    </mc:Choice>
+    <mc:Fallback>
+      <p:transition spd="med">
+        <p:push dir="l"/>
+      </p:transition>
+    </mc:Fallback>
+  </mc:AlternateContent>
 </p:sld>
 </file>
 
@@ -9967,7 +13103,7 @@
                 </a:solidFill>
                 <a:latin typeface="Montserrat"/>
               </a:rPr>
-              <a:t>006 / 016</a:t>
+              <a:t>006 / 020</a:t>
             </a:r>
           </a:p>
         </p:txBody>
@@ -10076,7 +13212,7 @@
       </p:sp>
       <p:sp>
         <p:nvSpPr>
-          <p:cNvPr id="7" name="Rounded Rectangle 6"/>
+          <p:cNvPr id="7" name="Rectangle 6"/>
           <p:cNvSpPr/>
           <p:nvPr/>
         </p:nvSpPr>
@@ -10085,7 +13221,7 @@
             <a:off x="868680" y="1627632"/>
             <a:ext cx="2011680" cy="73152"/>
           </a:xfrm>
-          <a:prstGeom prst="roundRect">
+          <a:prstGeom prst="rect">
             <a:avLst/>
           </a:prstGeom>
           <a:solidFill>
@@ -10127,7 +13263,7 @@
         <p:spPr>
           <a:xfrm>
             <a:off x="822960" y="1965960"/>
-            <a:ext cx="4983480" cy="4206240"/>
+            <a:ext cx="5029200" cy="4206240"/>
           </a:xfrm>
           <a:prstGeom prst="rect">
             <a:avLst/>
@@ -10249,8 +13385,8 @@
         </p:nvSpPr>
         <p:spPr>
           <a:xfrm>
-            <a:off x="5806440" y="1051560"/>
-            <a:ext cx="5298947" cy="4629150"/>
+            <a:off x="6080760" y="1965960"/>
+            <a:ext cx="5303520" cy="4572000"/>
           </a:xfrm>
           <a:prstGeom prst="roundRect">
             <a:avLst/>
@@ -10295,8 +13431,8 @@
         </p:nvSpPr>
         <p:spPr>
           <a:xfrm>
-            <a:off x="6080760" y="2726055"/>
-            <a:ext cx="4750307" cy="1280160"/>
+            <a:off x="6355080" y="3611880"/>
+            <a:ext cx="4754880" cy="1280160"/>
           </a:xfrm>
           <a:prstGeom prst="rect">
             <a:avLst/>
@@ -10317,7 +13453,7 @@
                 </a:solidFill>
                 <a:latin typeface="Montserrat"/>
               </a:rPr>
-              <a:t>IMAGEN REALISTA</a:t>
+              <a:t>IMAGEN</a:t>
             </a:r>
           </a:p>
           <a:p>
@@ -10339,6 +13475,18 @@
   <p:clrMapOvr>
     <a:masterClrMapping/>
   </p:clrMapOvr>
+  <mc:AlternateContent xmlns:mc="http://schemas.openxmlformats.org/markup-compatibility/2006">
+    <mc:Choice xmlns:p14="http://schemas.microsoft.com/office/powerpoint/2010/main" Requires="p14">
+      <p:transition spd="med" p14:dur="700">
+        <p14:cube dir="r"/>
+      </p:transition>
+    </mc:Choice>
+    <mc:Fallback>
+      <p:transition spd="med">
+        <p:push dir="r"/>
+      </p:transition>
+    </mc:Fallback>
+  </mc:AlternateContent>
 </p:sld>
 </file>
 
@@ -10426,7 +13574,7 @@
                 </a:solidFill>
                 <a:latin typeface="Montserrat"/>
               </a:rPr>
-              <a:t>007 / 016</a:t>
+              <a:t>007 / 020</a:t>
             </a:r>
           </a:p>
         </p:txBody>
@@ -10535,7 +13683,7 @@
       </p:sp>
       <p:sp>
         <p:nvSpPr>
-          <p:cNvPr id="7" name="Rounded Rectangle 6"/>
+          <p:cNvPr id="7" name="Rectangle 6"/>
           <p:cNvSpPr/>
           <p:nvPr/>
         </p:nvSpPr>
@@ -10544,7 +13692,7 @@
             <a:off x="868680" y="1627632"/>
             <a:ext cx="2011680" cy="73152"/>
           </a:xfrm>
-          <a:prstGeom prst="roundRect">
+          <a:prstGeom prst="rect">
             <a:avLst/>
           </a:prstGeom>
           <a:solidFill>
@@ -10585,8 +13733,8 @@
         </p:nvSpPr>
         <p:spPr>
           <a:xfrm>
-            <a:off x="822960" y="1965960"/>
-            <a:ext cx="4983480" cy="4206240"/>
+            <a:off x="6355080" y="1965960"/>
+            <a:ext cx="5029200" cy="4206240"/>
           </a:xfrm>
           <a:prstGeom prst="rect">
             <a:avLst/>
@@ -10708,8 +13856,8 @@
         </p:nvSpPr>
         <p:spPr>
           <a:xfrm>
-            <a:off x="5806440" y="1051560"/>
-            <a:ext cx="5298947" cy="4629150"/>
+            <a:off x="822960" y="1965960"/>
+            <a:ext cx="5303520" cy="4572000"/>
           </a:xfrm>
           <a:prstGeom prst="roundRect">
             <a:avLst/>
@@ -10754,8 +13902,8 @@
         </p:nvSpPr>
         <p:spPr>
           <a:xfrm>
-            <a:off x="6080760" y="2726055"/>
-            <a:ext cx="4750307" cy="1280160"/>
+            <a:off x="1097280" y="3611880"/>
+            <a:ext cx="4754880" cy="1280160"/>
           </a:xfrm>
           <a:prstGeom prst="rect">
             <a:avLst/>
@@ -10776,7 +13924,7 @@
                 </a:solidFill>
                 <a:latin typeface="Montserrat"/>
               </a:rPr>
-              <a:t>IMAGEN REALISTA</a:t>
+              <a:t>IMAGEN</a:t>
             </a:r>
           </a:p>
           <a:p>
@@ -10798,6 +13946,18 @@
   <p:clrMapOvr>
     <a:masterClrMapping/>
   </p:clrMapOvr>
+  <mc:AlternateContent xmlns:mc="http://schemas.openxmlformats.org/markup-compatibility/2006">
+    <mc:Choice xmlns:p14="http://schemas.microsoft.com/office/powerpoint/2010/main" Requires="p14">
+      <p:transition spd="med" p14:dur="700">
+        <p14:cube dir="l"/>
+      </p:transition>
+    </mc:Choice>
+    <mc:Fallback>
+      <p:transition spd="med">
+        <p:push dir="l"/>
+      </p:transition>
+    </mc:Fallback>
+  </mc:AlternateContent>
 </p:sld>
 </file>
 
@@ -10885,7 +14045,7 @@
                 </a:solidFill>
                 <a:latin typeface="Montserrat"/>
               </a:rPr>
-              <a:t>008 / 016</a:t>
+              <a:t>008 / 020</a:t>
             </a:r>
           </a:p>
         </p:txBody>
@@ -10994,7 +14154,7 @@
       </p:sp>
       <p:sp>
         <p:nvSpPr>
-          <p:cNvPr id="7" name="Rounded Rectangle 6"/>
+          <p:cNvPr id="7" name="Rectangle 6"/>
           <p:cNvSpPr/>
           <p:nvPr/>
         </p:nvSpPr>
@@ -11003,7 +14163,7 @@
             <a:off x="868680" y="1627632"/>
             <a:ext cx="2011680" cy="73152"/>
           </a:xfrm>
-          <a:prstGeom prst="roundRect">
+          <a:prstGeom prst="rect">
             <a:avLst/>
           </a:prstGeom>
           <a:solidFill>
@@ -11045,7 +14205,7 @@
         <p:spPr>
           <a:xfrm>
             <a:off x="822960" y="1965960"/>
-            <a:ext cx="4983480" cy="4206240"/>
+            <a:ext cx="5029200" cy="4206240"/>
           </a:xfrm>
           <a:prstGeom prst="rect">
             <a:avLst/>
@@ -11167,8 +14327,8 @@
         </p:nvSpPr>
         <p:spPr>
           <a:xfrm>
-            <a:off x="5806440" y="1051560"/>
-            <a:ext cx="5298947" cy="4629150"/>
+            <a:off x="6080760" y="1965960"/>
+            <a:ext cx="5303520" cy="4572000"/>
           </a:xfrm>
           <a:prstGeom prst="roundRect">
             <a:avLst/>
@@ -11213,8 +14373,8 @@
         </p:nvSpPr>
         <p:spPr>
           <a:xfrm>
-            <a:off x="6080760" y="2726055"/>
-            <a:ext cx="4750307" cy="1280160"/>
+            <a:off x="6355080" y="3611880"/>
+            <a:ext cx="4754880" cy="1280160"/>
           </a:xfrm>
           <a:prstGeom prst="rect">
             <a:avLst/>
@@ -11235,7 +14395,7 @@
                 </a:solidFill>
                 <a:latin typeface="Montserrat"/>
               </a:rPr>
-              <a:t>IMAGEN REALISTA</a:t>
+              <a:t>IMAGEN</a:t>
             </a:r>
           </a:p>
           <a:p>
@@ -11257,6 +14417,18 @@
   <p:clrMapOvr>
     <a:masterClrMapping/>
   </p:clrMapOvr>
+  <mc:AlternateContent xmlns:mc="http://schemas.openxmlformats.org/markup-compatibility/2006">
+    <mc:Choice xmlns:p14="http://schemas.microsoft.com/office/powerpoint/2010/main" Requires="p14">
+      <p:transition spd="med" p14:dur="700">
+        <p14:cube dir="r"/>
+      </p:transition>
+    </mc:Choice>
+    <mc:Fallback>
+      <p:transition spd="med">
+        <p:push dir="r"/>
+      </p:transition>
+    </mc:Fallback>
+  </mc:AlternateContent>
 </p:sld>
 </file>
 
@@ -11344,7 +14516,7 @@
                 </a:solidFill>
                 <a:latin typeface="Montserrat"/>
               </a:rPr>
-              <a:t>009 / 016</a:t>
+              <a:t>009 / 020</a:t>
             </a:r>
           </a:p>
         </p:txBody>
@@ -11453,7 +14625,7 @@
       </p:sp>
       <p:sp>
         <p:nvSpPr>
-          <p:cNvPr id="7" name="Rounded Rectangle 6"/>
+          <p:cNvPr id="7" name="Rectangle 6"/>
           <p:cNvSpPr/>
           <p:nvPr/>
         </p:nvSpPr>
@@ -11462,7 +14634,7 @@
             <a:off x="868680" y="1627632"/>
             <a:ext cx="2011680" cy="73152"/>
           </a:xfrm>
-          <a:prstGeom prst="roundRect">
+          <a:prstGeom prst="rect">
             <a:avLst/>
           </a:prstGeom>
           <a:solidFill>
@@ -11503,8 +14675,8 @@
         </p:nvSpPr>
         <p:spPr>
           <a:xfrm>
-            <a:off x="822960" y="1965960"/>
-            <a:ext cx="4983480" cy="4206240"/>
+            <a:off x="6355080" y="1965960"/>
+            <a:ext cx="5029200" cy="4206240"/>
           </a:xfrm>
           <a:prstGeom prst="rect">
             <a:avLst/>
@@ -11601,8 +14773,8 @@
         </p:nvSpPr>
         <p:spPr>
           <a:xfrm>
-            <a:off x="5806440" y="1051560"/>
-            <a:ext cx="5298947" cy="4629150"/>
+            <a:off x="822960" y="1965960"/>
+            <a:ext cx="5303520" cy="4572000"/>
           </a:xfrm>
           <a:prstGeom prst="roundRect">
             <a:avLst/>
@@ -11647,8 +14819,8 @@
         </p:nvSpPr>
         <p:spPr>
           <a:xfrm>
-            <a:off x="6080760" y="2726055"/>
-            <a:ext cx="4750307" cy="1280160"/>
+            <a:off x="1097280" y="3611880"/>
+            <a:ext cx="4754880" cy="1280160"/>
           </a:xfrm>
           <a:prstGeom prst="rect">
             <a:avLst/>
@@ -11669,7 +14841,7 @@
                 </a:solidFill>
                 <a:latin typeface="Montserrat"/>
               </a:rPr>
-              <a:t>IMAGEN REALISTA</a:t>
+              <a:t>IMAGEN</a:t>
             </a:r>
           </a:p>
           <a:p>
@@ -11691,6 +14863,18 @@
   <p:clrMapOvr>
     <a:masterClrMapping/>
   </p:clrMapOvr>
+  <mc:AlternateContent xmlns:mc="http://schemas.openxmlformats.org/markup-compatibility/2006">
+    <mc:Choice xmlns:p14="http://schemas.microsoft.com/office/powerpoint/2010/main" Requires="p14">
+      <p:transition spd="med" p14:dur="700">
+        <p14:cube dir="l"/>
+      </p:transition>
+    </mc:Choice>
+    <mc:Fallback>
+      <p:transition spd="med">
+        <p:push dir="l"/>
+      </p:transition>
+    </mc:Fallback>
+  </mc:AlternateContent>
 </p:sld>
 </file>
 

--- a/Curso Gas B/06 - ITC-ICG 09 - Instaladores y empresas instaladoras/06 - ITC-ICG 09 - Instaladores y empresas instaladoras - Vídeo 3.pptx
+++ b/Curso Gas B/06 - ITC-ICG 09 - Instaladores y empresas instaladoras/06 - ITC-ICG 09 - Instaladores y empresas instaladoras - Vídeo 3.pptx
@@ -896,12 +896,12 @@
           <a:lstStyle/>
           <a:p>
             <a:r>
-              <a:t>N1: Regla fina de este vídeo. Para el cambio de familia de gas, ¿cuánto anexo dos te piden y quién puede hacerlo?</a:t>
-            </a:r>
-          </a:p>
-          <a:p>
-            <a:r>
-              <a:t>N2: Acuérdate del apartado que marca la diferencia y de que la ce se queda fuera de cambiar el gas. Junta esas dos pistas.</a:t>
+              <a:t>N1: Regla fina de este vídeo. Escucha con calma la pregunta y las cuatro opciones. Para adecuar un aparato por cambio de familia de gas, el caso cuatro punto dos, ¿qué parte del anexo dos se exige y a qué categorías? Opción A, el anexo dos completo, del uno al dieciocho, solo la a y la be. Opción B, los apartados del uno al diecisiete, solo la a y la be. Opción C, el anexo dos completo, para las tres categorías. Opción D, los apartados del uno al diecisiete, para las tres categorías. Párala y decídete.</a:t>
+            </a:r>
+          </a:p>
+          <a:p>
+            <a:r>
+              <a:t>N2: Dos pistas: acuérdate del apartado que marca la diferencia, el dieciocho, y de que la ce se queda fuera de cambiar el gas. Junta esas dos ideas.</a:t>
             </a:r>
           </a:p>
         </p:txBody>
@@ -971,12 +971,12 @@
           <a:lstStyle/>
           <a:p>
             <a:r>
-              <a:t>N1: ¿Por qué el completo y solo la a y la be?</a:t>
-            </a:r>
-          </a:p>
-          <a:p>
-            <a:r>
-              <a:t>N2: Porque el cuatro punto dos, cambiar de familia de gas, necesita el apartado dieciocho, el de adaptación de aparatos a otras familias, y ese solo está en el anexo completo. Y como la ce trabaja con instalaciones que no cambian de familia de gas, esa operación le está vetada: solo la a y la be. El truco: el cuatro punto uno, arrancar los grandes, se queda en el uno al diecisiete; el cambio de gas se lo lleva todo.</a:t>
+              <a:t>N2: La respuesta correcta es la opción A: el anexo dos completo, del uno al dieciocho, y solo la a y la be. El cambio de familia de gas necesita el apartado dieciocho, el de adaptación de aparatos a otras familias, y ese solo aparece en el anexo completo. Y como la ce trabaja con instalaciones que no cambian de familia de gas, esa operación le está vetada. El truco: el cuatro punto uno, arrancar los grandes, se queda en el uno al diecisiete; el cambio de gas se lo lleva todo, hasta el dieciocho.</a:t>
+            </a:r>
+          </a:p>
+          <a:p>
+            <a:r>
+              <a:t>N1: Completo y solo a y be; el dieciocho es el que cambia el gas.</a:t>
             </a:r>
           </a:p>
         </p:txBody>
@@ -1196,12 +1196,12 @@
           <a:lstStyle/>
           <a:p>
             <a:r>
-              <a:t>N1: Y cerramos con la trampa clásica del tema. En el anexo dos, un aparato de tipo a, ¿qué es?</a:t>
-            </a:r>
-          </a:p>
-          <a:p>
-            <a:r>
-              <a:t>N2: Ojo, que no te hablo de tu carné. Aquí las letras van por cómo saca el aparato los humos. Piensa en una cocina de gas sin campana.</a:t>
+              <a:t>N1: Y cerramos con la trampa clásica del tema. Escucha la pregunta y las cuatro opciones, y no pienses en tu carné. En el anexo dos, ¿qué es un aparato de tipo a? Opción A, no conducido, que evacúa los humos al propio local. Opción B, estanco, en circuito cerrado con el exterior. Opción C, conducido, que toma el aire del local y saca los humos fuera. Opción D, la categoría más alta del instalador. Piénsalo un momento.</a:t>
+            </a:r>
+          </a:p>
+          <a:p>
+            <a:r>
+              <a:t>N2: Una pista: aquí las letras van por cómo saca el aparato los humos, no por tu categoría. Imagínate una cocina de gas sin campana.</a:t>
             </a:r>
           </a:p>
         </p:txBody>
@@ -1271,12 +1271,12 @@
           <a:lstStyle/>
           <a:p>
             <a:r>
-              <a:t>N1: ¿Por qué no conducido y no la categoría del instalador?</a:t>
-            </a:r>
-          </a:p>
-          <a:p>
-            <a:r>
-              <a:t>N2: Porque en el anexo dos las letras de los aparatos van por cómo evacúan los humos: el tipo a los suelta al local, el tipo be los saca fuera pero coge el aire de dentro, y el tipo ce es estanco, en circuito cerrado con el exterior. Son dos clasificaciones distintas que usan las mismas letras. El truco para no caer: si te hablan de humos y evacuación, es el tipo del aparato; si te hablan de presión y alcance, es la categoría del carné.</a:t>
+              <a:t>N2: La respuesta correcta es la opción A: no conducido, el que suelta los productos de la combustión al propio local. En el anexo dos las letras de los aparatos van por cómo evacúan los humos: el tipo a los suelta al local, el tipo be los saca fuera pero coge el aire de dentro, y el tipo ce es estanco, en circuito cerrado con el exterior. La opción D es la trampa: mezcla el tipo del aparato con la categoría del carné, y no tienen nada que ver.</a:t>
+            </a:r>
+          </a:p>
+          <a:p>
+            <a:r>
+              <a:t>N1: El truco: si te hablan de humos y evacuación, es el tipo del aparato; si te hablan de presión y alcance, es la categoría del carné.</a:t>
             </a:r>
           </a:p>
         </p:txBody>
